--- a/Fortune_Teller_Presentation.pptx
+++ b/Fortune_Teller_Presentation.pptx
@@ -3089,7 +3089,7 @@
     <p:bg>
       <p:bgPr>
         <a:solidFill>
-          <a:srgbClr val="0D0D2B"/>
+          <a:srgbClr val="141414"/>
         </a:solidFill>
         <a:effectLst/>
       </p:bgPr>
@@ -3110,13 +3110,13 @@
         <p:spPr>
           <a:xfrm>
             <a:off x="0" y="0"/>
-            <a:ext cx="12188952" cy="109728"/>
+            <a:ext cx="12188952" cy="91440"/>
           </a:xfrm>
           <a:prstGeom prst="rect">
             <a:avLst/>
           </a:prstGeom>
           <a:solidFill>
-            <a:srgbClr val="F0C040"/>
+            <a:srgbClr val="D4A017"/>
           </a:solidFill>
           <a:ln>
             <a:noFill/>
@@ -3152,14 +3152,14 @@
         </p:nvSpPr>
         <p:spPr>
           <a:xfrm>
-            <a:off x="2286000" y="1463040"/>
-            <a:ext cx="7616952" cy="3931920"/>
+            <a:off x="0" y="6766560"/>
+            <a:ext cx="12188952" cy="91440"/>
           </a:xfrm>
           <a:prstGeom prst="rect">
             <a:avLst/>
           </a:prstGeom>
           <a:solidFill>
-            <a:srgbClr val="1A1A3E"/>
+            <a:srgbClr val="1ABC9C"/>
           </a:solidFill>
           <a:ln>
             <a:noFill/>
@@ -3189,20 +3189,54 @@
       </p:sp>
       <p:sp>
         <p:nvSpPr>
-          <p:cNvPr id="4" name="Rectangle 3"/>
+          <p:cNvPr id="4" name="TextBox 3"/>
+          <p:cNvSpPr txBox="1"/>
+          <p:nvPr/>
+        </p:nvSpPr>
+        <p:spPr>
+          <a:xfrm>
+            <a:off x="0" y="6766560"/>
+            <a:ext cx="12188952" cy="91440"/>
+          </a:xfrm>
+          <a:prstGeom prst="rect">
+            <a:avLst/>
+          </a:prstGeom>
+          <a:noFill/>
+        </p:spPr>
+        <p:txBody>
+          <a:bodyPr wrap="none">
+            <a:spAutoFit/>
+          </a:bodyPr>
+          <a:lstStyle/>
+          <a:p>
+            <a:pPr algn="ctr"/>
+            <a:r>
+              <a:rPr sz="900" b="0" i="0">
+                <a:solidFill>
+                  <a:srgbClr val="888888"/>
+                </a:solidFill>
+              </a:rPr>
+              <a:t>Fortune Teller  ·  AI Tarot Card Recognition  ·  2026</a:t>
+            </a:r>
+          </a:p>
+        </p:txBody>
+      </p:sp>
+      <p:sp>
+        <p:nvSpPr>
+          <p:cNvPr id="5" name="Rectangle 4"/>
           <p:cNvSpPr/>
           <p:nvPr/>
         </p:nvSpPr>
         <p:spPr>
           <a:xfrm>
-            <a:off x="2286000" y="1463040"/>
-            <a:ext cx="73152" cy="3931920"/>
+            <a:off x="0" y="91440"/>
+            <a:ext cx="457200" cy="6675120"/>
           </a:xfrm>
           <a:prstGeom prst="rect">
             <a:avLst/>
           </a:prstGeom>
           <a:solidFill>
-            <a:srgbClr val="F0C040"/>
+            <a:srgbClr val="D4A017"/>
           </a:solidFill>
           <a:ln>
             <a:noFill/>
@@ -3232,88 +3266,20 @@
       </p:sp>
       <p:sp>
         <p:nvSpPr>
-          <p:cNvPr id="5" name="TextBox 4"/>
-          <p:cNvSpPr txBox="1"/>
-          <p:nvPr/>
-        </p:nvSpPr>
-        <p:spPr>
-          <a:xfrm>
-            <a:off x="2560320" y="1828800"/>
-            <a:ext cx="7315200" cy="1097280"/>
-          </a:xfrm>
-          <a:prstGeom prst="rect">
-            <a:avLst/>
-          </a:prstGeom>
-          <a:noFill/>
-        </p:spPr>
-        <p:txBody>
-          <a:bodyPr wrap="none">
-            <a:spAutoFit/>
-          </a:bodyPr>
-          <a:lstStyle/>
-          <a:p>
-            <a:pPr algn="ctr"/>
-            <a:r>
-              <a:rPr sz="4800" b="1" i="0">
-                <a:solidFill>
-                  <a:srgbClr val="F0C040"/>
-                </a:solidFill>
-              </a:rPr>
-              <a:t>🔮 Fortune Teller</a:t>
-            </a:r>
-          </a:p>
-        </p:txBody>
-      </p:sp>
-      <p:sp>
-        <p:nvSpPr>
-          <p:cNvPr id="6" name="TextBox 5"/>
-          <p:cNvSpPr txBox="1"/>
-          <p:nvPr/>
-        </p:nvSpPr>
-        <p:spPr>
-          <a:xfrm>
-            <a:off x="2560320" y="2834640"/>
-            <a:ext cx="7315200" cy="640080"/>
-          </a:xfrm>
-          <a:prstGeom prst="rect">
-            <a:avLst/>
-          </a:prstGeom>
-          <a:noFill/>
-        </p:spPr>
-        <p:txBody>
-          <a:bodyPr wrap="none">
-            <a:spAutoFit/>
-          </a:bodyPr>
-          <a:lstStyle/>
-          <a:p>
-            <a:pPr algn="ctr"/>
-            <a:r>
-              <a:rPr sz="2200" b="0" i="1">
-                <a:solidFill>
-                  <a:srgbClr val="CCCCFF"/>
-                </a:solidFill>
-              </a:rPr>
-              <a:t>AI-Powered Tarot Card Recognition</a:t>
-            </a:r>
-          </a:p>
-        </p:txBody>
-      </p:sp>
-      <p:sp>
-        <p:nvSpPr>
-          <p:cNvPr id="7" name="Rectangle 6"/>
+          <p:cNvPr id="6" name="Rectangle 5"/>
           <p:cNvSpPr/>
           <p:nvPr/>
         </p:nvSpPr>
         <p:spPr>
           <a:xfrm>
-            <a:off x="457200" y="3657600"/>
-            <a:ext cx="11274552" cy="27432"/>
+            <a:off x="2560320" y="1645920"/>
+            <a:ext cx="7315200" cy="3474720"/>
           </a:xfrm>
           <a:prstGeom prst="rect">
             <a:avLst/>
           </a:prstGeom>
           <a:solidFill>
-            <a:srgbClr val="9B59B6"/>
+            <a:srgbClr val="222222"/>
           </a:solidFill>
           <a:ln>
             <a:noFill/>
@@ -3343,88 +3309,20 @@
       </p:sp>
       <p:sp>
         <p:nvSpPr>
-          <p:cNvPr id="8" name="TextBox 7"/>
-          <p:cNvSpPr txBox="1"/>
-          <p:nvPr/>
-        </p:nvSpPr>
-        <p:spPr>
-          <a:xfrm>
-            <a:off x="2560320" y="3749039"/>
-            <a:ext cx="7315200" cy="457200"/>
-          </a:xfrm>
-          <a:prstGeom prst="rect">
-            <a:avLst/>
-          </a:prstGeom>
-          <a:noFill/>
-        </p:spPr>
-        <p:txBody>
-          <a:bodyPr wrap="none">
-            <a:spAutoFit/>
-          </a:bodyPr>
-          <a:lstStyle/>
-          <a:p>
-            <a:pPr algn="ctr"/>
-            <a:r>
-              <a:rPr sz="1400" b="0" i="0">
-                <a:solidFill>
-                  <a:srgbClr val="F0C040"/>
-                </a:solidFill>
-              </a:rPr>
-              <a:t>EfficientNet-B0  ·  PyTorch  ·  Transfer Learning</a:t>
-            </a:r>
-          </a:p>
-        </p:txBody>
-      </p:sp>
-      <p:sp>
-        <p:nvSpPr>
-          <p:cNvPr id="9" name="TextBox 8"/>
-          <p:cNvSpPr txBox="1"/>
-          <p:nvPr/>
-        </p:nvSpPr>
-        <p:spPr>
-          <a:xfrm>
-            <a:off x="2560320" y="4389120"/>
-            <a:ext cx="7315200" cy="365760"/>
-          </a:xfrm>
-          <a:prstGeom prst="rect">
-            <a:avLst/>
-          </a:prstGeom>
-          <a:noFill/>
-        </p:spPr>
-        <p:txBody>
-          <a:bodyPr wrap="none">
-            <a:spAutoFit/>
-          </a:bodyPr>
-          <a:lstStyle/>
-          <a:p>
-            <a:pPr algn="ctr"/>
-            <a:r>
-              <a:rPr sz="1300" b="0" i="0">
-                <a:solidFill>
-                  <a:srgbClr val="CCCCFF"/>
-                </a:solidFill>
-              </a:rPr>
-              <a:t>Wannakorn Sangthongngam  ·  2026</a:t>
-            </a:r>
-          </a:p>
-        </p:txBody>
-      </p:sp>
-      <p:sp>
-        <p:nvSpPr>
-          <p:cNvPr id="10" name="Rectangle 9"/>
+          <p:cNvPr id="7" name="Rectangle 6"/>
           <p:cNvSpPr/>
           <p:nvPr/>
         </p:nvSpPr>
         <p:spPr>
           <a:xfrm>
-            <a:off x="0" y="6748272"/>
-            <a:ext cx="12188952" cy="109728"/>
+            <a:off x="2560320" y="1645920"/>
+            <a:ext cx="54864" cy="3474720"/>
           </a:xfrm>
           <a:prstGeom prst="rect">
             <a:avLst/>
           </a:prstGeom>
           <a:solidFill>
-            <a:srgbClr val="9B59B6"/>
+            <a:srgbClr val="1ABC9C"/>
           </a:solidFill>
           <a:ln>
             <a:noFill/>
@@ -3449,6 +3347,185 @@
           <a:lstStyle/>
           <a:p>
             <a:pPr algn="ctr"/>
+          </a:p>
+        </p:txBody>
+      </p:sp>
+      <p:sp>
+        <p:nvSpPr>
+          <p:cNvPr id="8" name="TextBox 7"/>
+          <p:cNvSpPr txBox="1"/>
+          <p:nvPr/>
+        </p:nvSpPr>
+        <p:spPr>
+          <a:xfrm>
+            <a:off x="2743200" y="1920240"/>
+            <a:ext cx="6949440" cy="1280160"/>
+          </a:xfrm>
+          <a:prstGeom prst="rect">
+            <a:avLst/>
+          </a:prstGeom>
+          <a:noFill/>
+        </p:spPr>
+        <p:txBody>
+          <a:bodyPr wrap="none">
+            <a:spAutoFit/>
+          </a:bodyPr>
+          <a:lstStyle/>
+          <a:p>
+            <a:pPr algn="ctr"/>
+            <a:r>
+              <a:rPr sz="5400" b="1" i="0">
+                <a:solidFill>
+                  <a:srgbClr val="D4A017"/>
+                </a:solidFill>
+              </a:rPr>
+              <a:t>Fortune Teller</a:t>
+            </a:r>
+          </a:p>
+        </p:txBody>
+      </p:sp>
+      <p:sp>
+        <p:nvSpPr>
+          <p:cNvPr id="9" name="TextBox 8"/>
+          <p:cNvSpPr txBox="1"/>
+          <p:nvPr/>
+        </p:nvSpPr>
+        <p:spPr>
+          <a:xfrm>
+            <a:off x="2743200" y="3017520"/>
+            <a:ext cx="6949440" cy="640080"/>
+          </a:xfrm>
+          <a:prstGeom prst="rect">
+            <a:avLst/>
+          </a:prstGeom>
+          <a:noFill/>
+        </p:spPr>
+        <p:txBody>
+          <a:bodyPr wrap="none">
+            <a:spAutoFit/>
+          </a:bodyPr>
+          <a:lstStyle/>
+          <a:p>
+            <a:pPr algn="ctr"/>
+            <a:r>
+              <a:rPr sz="2400" b="0" i="1">
+                <a:solidFill>
+                  <a:srgbClr val="FFFFFF"/>
+                </a:solidFill>
+              </a:rPr>
+              <a:t>AI-Powered Tarot Card Recognition</a:t>
+            </a:r>
+          </a:p>
+        </p:txBody>
+      </p:sp>
+      <p:sp>
+        <p:nvSpPr>
+          <p:cNvPr id="10" name="Rectangle 9"/>
+          <p:cNvSpPr/>
+          <p:nvPr/>
+        </p:nvSpPr>
+        <p:spPr>
+          <a:xfrm>
+            <a:off x="3200400" y="3749039"/>
+            <a:ext cx="5943600" cy="45720"/>
+          </a:xfrm>
+          <a:prstGeom prst="rect">
+            <a:avLst/>
+          </a:prstGeom>
+          <a:solidFill>
+            <a:srgbClr val="888888"/>
+          </a:solidFill>
+          <a:ln>
+            <a:noFill/>
+          </a:ln>
+        </p:spPr>
+        <p:style>
+          <a:lnRef idx="1">
+            <a:schemeClr val="accent1"/>
+          </a:lnRef>
+          <a:fillRef idx="3">
+            <a:schemeClr val="accent1"/>
+          </a:fillRef>
+          <a:effectRef idx="2">
+            <a:schemeClr val="accent1"/>
+          </a:effectRef>
+          <a:fontRef idx="minor">
+            <a:schemeClr val="lt1"/>
+          </a:fontRef>
+        </p:style>
+        <p:txBody>
+          <a:bodyPr rtlCol="0" anchor="ctr"/>
+          <a:lstStyle/>
+          <a:p>
+            <a:pPr algn="ctr"/>
+          </a:p>
+        </p:txBody>
+      </p:sp>
+      <p:sp>
+        <p:nvSpPr>
+          <p:cNvPr id="11" name="TextBox 10"/>
+          <p:cNvSpPr txBox="1"/>
+          <p:nvPr/>
+        </p:nvSpPr>
+        <p:spPr>
+          <a:xfrm>
+            <a:off x="2743200" y="3886200"/>
+            <a:ext cx="6949440" cy="457200"/>
+          </a:xfrm>
+          <a:prstGeom prst="rect">
+            <a:avLst/>
+          </a:prstGeom>
+          <a:noFill/>
+        </p:spPr>
+        <p:txBody>
+          <a:bodyPr wrap="none">
+            <a:spAutoFit/>
+          </a:bodyPr>
+          <a:lstStyle/>
+          <a:p>
+            <a:pPr algn="ctr"/>
+            <a:r>
+              <a:rPr sz="1600" b="0" i="0">
+                <a:solidFill>
+                  <a:srgbClr val="1ABC9C"/>
+                </a:solidFill>
+              </a:rPr>
+              <a:t>EfficientNet-B0   ·   PyTorch   ·   Transfer Learning</a:t>
+            </a:r>
+          </a:p>
+        </p:txBody>
+      </p:sp>
+      <p:sp>
+        <p:nvSpPr>
+          <p:cNvPr id="12" name="TextBox 11"/>
+          <p:cNvSpPr txBox="1"/>
+          <p:nvPr/>
+        </p:nvSpPr>
+        <p:spPr>
+          <a:xfrm>
+            <a:off x="2743200" y="4434840"/>
+            <a:ext cx="6949440" cy="411480"/>
+          </a:xfrm>
+          <a:prstGeom prst="rect">
+            <a:avLst/>
+          </a:prstGeom>
+          <a:noFill/>
+        </p:spPr>
+        <p:txBody>
+          <a:bodyPr wrap="none">
+            <a:spAutoFit/>
+          </a:bodyPr>
+          <a:lstStyle/>
+          <a:p>
+            <a:pPr algn="ctr"/>
+            <a:r>
+              <a:rPr sz="1400" b="0" i="0">
+                <a:solidFill>
+                  <a:srgbClr val="888888"/>
+                </a:solidFill>
+              </a:rPr>
+              <a:t>Wannakorn Sangthongngam   ·   2026</a:t>
+            </a:r>
           </a:p>
         </p:txBody>
       </p:sp>
@@ -3466,7 +3543,7 @@
     <p:bg>
       <p:bgPr>
         <a:solidFill>
-          <a:srgbClr val="0D0D2B"/>
+          <a:srgbClr val="141414"/>
         </a:solidFill>
         <a:effectLst/>
       </p:bgPr>
@@ -3487,13 +3564,13 @@
         <p:spPr>
           <a:xfrm>
             <a:off x="0" y="0"/>
-            <a:ext cx="12188952" cy="109728"/>
+            <a:ext cx="12188952" cy="91440"/>
           </a:xfrm>
           <a:prstGeom prst="rect">
             <a:avLst/>
           </a:prstGeom>
           <a:solidFill>
-            <a:srgbClr val="F0C040"/>
+            <a:srgbClr val="D4A017"/>
           </a:solidFill>
           <a:ln>
             <a:noFill/>
@@ -3529,14 +3606,14 @@
         </p:nvSpPr>
         <p:spPr>
           <a:xfrm>
-            <a:off x="0" y="6748272"/>
-            <a:ext cx="12188952" cy="109728"/>
+            <a:off x="0" y="6766560"/>
+            <a:ext cx="12188952" cy="91440"/>
           </a:xfrm>
           <a:prstGeom prst="rect">
             <a:avLst/>
           </a:prstGeom>
           <a:solidFill>
-            <a:srgbClr val="9B59B6"/>
+            <a:srgbClr val="1ABC9C"/>
           </a:solidFill>
           <a:ln>
             <a:noFill/>
@@ -3566,20 +3643,54 @@
       </p:sp>
       <p:sp>
         <p:nvSpPr>
-          <p:cNvPr id="4" name="Rectangle 3"/>
+          <p:cNvPr id="4" name="TextBox 3"/>
+          <p:cNvSpPr txBox="1"/>
+          <p:nvPr/>
+        </p:nvSpPr>
+        <p:spPr>
+          <a:xfrm>
+            <a:off x="0" y="6766560"/>
+            <a:ext cx="12188952" cy="91440"/>
+          </a:xfrm>
+          <a:prstGeom prst="rect">
+            <a:avLst/>
+          </a:prstGeom>
+          <a:noFill/>
+        </p:spPr>
+        <p:txBody>
+          <a:bodyPr wrap="none">
+            <a:spAutoFit/>
+          </a:bodyPr>
+          <a:lstStyle/>
+          <a:p>
+            <a:pPr algn="ctr"/>
+            <a:r>
+              <a:rPr sz="900" b="0" i="0">
+                <a:solidFill>
+                  <a:srgbClr val="888888"/>
+                </a:solidFill>
+              </a:rPr>
+              <a:t>Fortune Teller  ·  AI Tarot Card Recognition  ·  2026</a:t>
+            </a:r>
+          </a:p>
+        </p:txBody>
+      </p:sp>
+      <p:sp>
+        <p:nvSpPr>
+          <p:cNvPr id="5" name="Rectangle 4"/>
           <p:cNvSpPr/>
           <p:nvPr/>
         </p:nvSpPr>
         <p:spPr>
           <a:xfrm>
-            <a:off x="457200" y="228600"/>
-            <a:ext cx="1645920" cy="292608"/>
+            <a:off x="457200" y="201168"/>
+            <a:ext cx="1536192" cy="301752"/>
           </a:xfrm>
           <a:prstGeom prst="rect">
             <a:avLst/>
           </a:prstGeom>
           <a:solidFill>
-            <a:srgbClr val="9B59B6"/>
+            <a:srgbClr val="1ABC9C"/>
           </a:solidFill>
           <a:ln>
             <a:noFill/>
@@ -3609,67 +3720,67 @@
       </p:sp>
       <p:sp>
         <p:nvSpPr>
-          <p:cNvPr id="5" name="TextBox 4"/>
-          <p:cNvSpPr txBox="1"/>
-          <p:nvPr/>
-        </p:nvSpPr>
-        <p:spPr>
-          <a:xfrm>
-            <a:off x="502920" y="246888"/>
-            <a:ext cx="1554480" cy="274320"/>
-          </a:xfrm>
-          <a:prstGeom prst="rect">
-            <a:avLst/>
-          </a:prstGeom>
-          <a:noFill/>
-        </p:spPr>
-        <p:txBody>
-          <a:bodyPr wrap="none">
-            <a:spAutoFit/>
-          </a:bodyPr>
-          <a:lstStyle/>
-          <a:p>
-            <a:pPr algn="ctr"/>
-            <a:r>
-              <a:rPr sz="1000" b="1" i="0">
+          <p:cNvPr id="6" name="TextBox 5"/>
+          <p:cNvSpPr txBox="1"/>
+          <p:nvPr/>
+        </p:nvSpPr>
+        <p:spPr>
+          <a:xfrm>
+            <a:off x="530352" y="237744"/>
+            <a:ext cx="1399032" cy="256032"/>
+          </a:xfrm>
+          <a:prstGeom prst="rect">
+            <a:avLst/>
+          </a:prstGeom>
+          <a:noFill/>
+        </p:spPr>
+        <p:txBody>
+          <a:bodyPr wrap="none">
+            <a:spAutoFit/>
+          </a:bodyPr>
+          <a:lstStyle/>
+          <a:p>
+            <a:pPr algn="l"/>
+            <a:r>
+              <a:rPr sz="1100" b="1" i="0">
+                <a:solidFill>
+                  <a:srgbClr val="141414"/>
+                </a:solidFill>
+              </a:rPr>
+              <a:t>INTRODUCTION</a:t>
+            </a:r>
+          </a:p>
+        </p:txBody>
+      </p:sp>
+      <p:sp>
+        <p:nvSpPr>
+          <p:cNvPr id="7" name="TextBox 6"/>
+          <p:cNvSpPr txBox="1"/>
+          <p:nvPr/>
+        </p:nvSpPr>
+        <p:spPr>
+          <a:xfrm>
+            <a:off x="457200" y="594360"/>
+            <a:ext cx="10972800" cy="685800"/>
+          </a:xfrm>
+          <a:prstGeom prst="rect">
+            <a:avLst/>
+          </a:prstGeom>
+          <a:noFill/>
+        </p:spPr>
+        <p:txBody>
+          <a:bodyPr wrap="none">
+            <a:spAutoFit/>
+          </a:bodyPr>
+          <a:lstStyle/>
+          <a:p>
+            <a:pPr algn="l"/>
+            <a:r>
+              <a:rPr sz="3400" b="1" i="0">
                 <a:solidFill>
                   <a:srgbClr val="FFFFFF"/>
                 </a:solidFill>
               </a:rPr>
-              <a:t>INTRODUCTION</a:t>
-            </a:r>
-          </a:p>
-        </p:txBody>
-      </p:sp>
-      <p:sp>
-        <p:nvSpPr>
-          <p:cNvPr id="6" name="TextBox 5"/>
-          <p:cNvSpPr txBox="1"/>
-          <p:nvPr/>
-        </p:nvSpPr>
-        <p:spPr>
-          <a:xfrm>
-            <a:off x="457200" y="640080"/>
-            <a:ext cx="9144000" cy="640080"/>
-          </a:xfrm>
-          <a:prstGeom prst="rect">
-            <a:avLst/>
-          </a:prstGeom>
-          <a:noFill/>
-        </p:spPr>
-        <p:txBody>
-          <a:bodyPr wrap="none">
-            <a:spAutoFit/>
-          </a:bodyPr>
-          <a:lstStyle/>
-          <a:p>
-            <a:pPr algn="l"/>
-            <a:r>
-              <a:rPr sz="3200" b="1" i="0">
-                <a:solidFill>
-                  <a:srgbClr val="F0C040"/>
-                </a:solidFill>
-              </a:rPr>
               <a:t>What is Fortune Teller?</a:t>
             </a:r>
           </a:p>
@@ -3677,20 +3788,20 @@
       </p:sp>
       <p:sp>
         <p:nvSpPr>
-          <p:cNvPr id="7" name="Rectangle 6"/>
+          <p:cNvPr id="8" name="Rectangle 7"/>
           <p:cNvSpPr/>
           <p:nvPr/>
         </p:nvSpPr>
         <p:spPr>
           <a:xfrm>
-            <a:off x="457200" y="1371600"/>
+            <a:off x="457200" y="1389888"/>
             <a:ext cx="11274552" cy="36576"/>
           </a:xfrm>
           <a:prstGeom prst="rect">
             <a:avLst/>
           </a:prstGeom>
           <a:solidFill>
-            <a:srgbClr val="9B59B6"/>
+            <a:srgbClr val="1ABC9C"/>
           </a:solidFill>
           <a:ln>
             <a:noFill/>
@@ -3720,20 +3831,20 @@
       </p:sp>
       <p:sp>
         <p:nvSpPr>
-          <p:cNvPr id="8" name="Rectangle 7"/>
+          <p:cNvPr id="9" name="Rectangle 8"/>
           <p:cNvSpPr/>
           <p:nvPr/>
         </p:nvSpPr>
         <p:spPr>
           <a:xfrm>
             <a:off x="457200" y="1554480"/>
-            <a:ext cx="5212080" cy="2560320"/>
+            <a:ext cx="5303520" cy="2743200"/>
           </a:xfrm>
           <a:prstGeom prst="rect">
             <a:avLst/>
           </a:prstGeom>
           <a:solidFill>
-            <a:srgbClr val="1A1A3E"/>
+            <a:srgbClr val="222222"/>
           </a:solidFill>
           <a:ln>
             <a:noFill/>
@@ -3763,20 +3874,20 @@
       </p:sp>
       <p:sp>
         <p:nvSpPr>
-          <p:cNvPr id="9" name="Rectangle 8"/>
+          <p:cNvPr id="10" name="Rectangle 9"/>
           <p:cNvSpPr/>
           <p:nvPr/>
         </p:nvSpPr>
         <p:spPr>
           <a:xfrm>
             <a:off x="457200" y="1554480"/>
-            <a:ext cx="73152" cy="2560320"/>
+            <a:ext cx="54864" cy="2743200"/>
           </a:xfrm>
           <a:prstGeom prst="rect">
             <a:avLst/>
           </a:prstGeom>
           <a:solidFill>
-            <a:srgbClr val="F0C040"/>
+            <a:srgbClr val="D4A017"/>
           </a:solidFill>
           <a:ln>
             <a:noFill/>
@@ -3806,14 +3917,14 @@
       </p:sp>
       <p:sp>
         <p:nvSpPr>
-          <p:cNvPr id="10" name="TextBox 9"/>
-          <p:cNvSpPr txBox="1"/>
-          <p:nvPr/>
-        </p:nvSpPr>
-        <p:spPr>
-          <a:xfrm>
-            <a:off x="685800" y="1600200"/>
-            <a:ext cx="4754880" cy="411480"/>
+          <p:cNvPr id="11" name="TextBox 10"/>
+          <p:cNvSpPr txBox="1"/>
+          <p:nvPr/>
+        </p:nvSpPr>
+        <p:spPr>
+          <a:xfrm>
+            <a:off x="658368" y="1627632"/>
+            <a:ext cx="4846320" cy="457200"/>
           </a:xfrm>
           <a:prstGeom prst="rect">
             <a:avLst/>
@@ -3828,9 +3939,9 @@
           <a:p>
             <a:pPr algn="l"/>
             <a:r>
-              <a:rPr sz="1600" b="1" i="0">
-                <a:solidFill>
-                  <a:srgbClr val="F0C040"/>
+              <a:rPr sz="1800" b="1" i="0">
+                <a:solidFill>
+                  <a:srgbClr val="D4A017"/>
                 </a:solidFill>
               </a:rPr>
               <a:t>Overview</a:t>
@@ -3840,14 +3951,14 @@
       </p:sp>
       <p:sp>
         <p:nvSpPr>
-          <p:cNvPr id="11" name="TextBox 10"/>
-          <p:cNvSpPr txBox="1"/>
-          <p:nvPr/>
-        </p:nvSpPr>
-        <p:spPr>
-          <a:xfrm>
-            <a:off x="594360" y="2011680"/>
-            <a:ext cx="9144000" cy="365760"/>
+          <p:cNvPr id="12" name="TextBox 11"/>
+          <p:cNvSpPr txBox="1"/>
+          <p:nvPr/>
+        </p:nvSpPr>
+        <p:spPr>
+          <a:xfrm>
+            <a:off x="594360" y="2121408"/>
+            <a:ext cx="10058400" cy="384048"/>
           </a:xfrm>
           <a:prstGeom prst="rect">
             <a:avLst/>
@@ -3862,26 +3973,26 @@
           <a:p>
             <a:pPr algn="l"/>
             <a:r>
-              <a:rPr sz="1600" b="0" i="0">
-                <a:solidFill>
-                  <a:srgbClr val="CCCCFF"/>
-                </a:solidFill>
-              </a:rPr>
-              <a:t>  ▸  Take a photo of a tarot card</a:t>
-            </a:r>
-          </a:p>
-        </p:txBody>
-      </p:sp>
-      <p:sp>
-        <p:nvSpPr>
-          <p:cNvPr id="12" name="TextBox 11"/>
-          <p:cNvSpPr txBox="1"/>
-          <p:nvPr/>
-        </p:nvSpPr>
-        <p:spPr>
-          <a:xfrm>
-            <a:off x="594360" y="2377440"/>
-            <a:ext cx="9144000" cy="365760"/>
+              <a:rPr sz="1700" b="0" i="0">
+                <a:solidFill>
+                  <a:srgbClr val="CCCCCC"/>
+                </a:solidFill>
+              </a:rPr>
+              <a:t>▸   Take a photo of a tarot card</a:t>
+            </a:r>
+          </a:p>
+        </p:txBody>
+      </p:sp>
+      <p:sp>
+        <p:nvSpPr>
+          <p:cNvPr id="13" name="TextBox 12"/>
+          <p:cNvSpPr txBox="1"/>
+          <p:nvPr/>
+        </p:nvSpPr>
+        <p:spPr>
+          <a:xfrm>
+            <a:off x="594360" y="2514600"/>
+            <a:ext cx="10058400" cy="384048"/>
           </a:xfrm>
           <a:prstGeom prst="rect">
             <a:avLst/>
@@ -3896,26 +4007,26 @@
           <a:p>
             <a:pPr algn="l"/>
             <a:r>
-              <a:rPr sz="1600" b="0" i="0">
-                <a:solidFill>
-                  <a:srgbClr val="CCCCFF"/>
-                </a:solidFill>
-              </a:rPr>
-              <a:t>  ▸  AI identifies which card it is</a:t>
-            </a:r>
-          </a:p>
-        </p:txBody>
-      </p:sp>
-      <p:sp>
-        <p:nvSpPr>
-          <p:cNvPr id="13" name="TextBox 12"/>
-          <p:cNvSpPr txBox="1"/>
-          <p:nvPr/>
-        </p:nvSpPr>
-        <p:spPr>
-          <a:xfrm>
-            <a:off x="594360" y="2743200"/>
-            <a:ext cx="9144000" cy="365760"/>
+              <a:rPr sz="1700" b="0" i="0">
+                <a:solidFill>
+                  <a:srgbClr val="CCCCCC"/>
+                </a:solidFill>
+              </a:rPr>
+              <a:t>▸   AI identifies which card it is</a:t>
+            </a:r>
+          </a:p>
+        </p:txBody>
+      </p:sp>
+      <p:sp>
+        <p:nvSpPr>
+          <p:cNvPr id="14" name="TextBox 13"/>
+          <p:cNvSpPr txBox="1"/>
+          <p:nvPr/>
+        </p:nvSpPr>
+        <p:spPr>
+          <a:xfrm>
+            <a:off x="594360" y="2907792"/>
+            <a:ext cx="10058400" cy="384048"/>
           </a:xfrm>
           <a:prstGeom prst="rect">
             <a:avLst/>
@@ -3930,26 +4041,26 @@
           <a:p>
             <a:pPr algn="l"/>
             <a:r>
-              <a:rPr sz="1600" b="0" i="0">
-                <a:solidFill>
-                  <a:srgbClr val="CCCCFF"/>
-                </a:solidFill>
-              </a:rPr>
-              <a:t>  ▸  Receive your fortune reading</a:t>
-            </a:r>
-          </a:p>
-        </p:txBody>
-      </p:sp>
-      <p:sp>
-        <p:nvSpPr>
-          <p:cNvPr id="14" name="TextBox 13"/>
-          <p:cNvSpPr txBox="1"/>
-          <p:nvPr/>
-        </p:nvSpPr>
-        <p:spPr>
-          <a:xfrm>
-            <a:off x="594360" y="3108960"/>
-            <a:ext cx="9144000" cy="365760"/>
+              <a:rPr sz="1700" b="0" i="0">
+                <a:solidFill>
+                  <a:srgbClr val="CCCCCC"/>
+                </a:solidFill>
+              </a:rPr>
+              <a:t>▸   Receive your fortune reading</a:t>
+            </a:r>
+          </a:p>
+        </p:txBody>
+      </p:sp>
+      <p:sp>
+        <p:nvSpPr>
+          <p:cNvPr id="15" name="TextBox 14"/>
+          <p:cNvSpPr txBox="1"/>
+          <p:nvPr/>
+        </p:nvSpPr>
+        <p:spPr>
+          <a:xfrm>
+            <a:off x="594360" y="3300984"/>
+            <a:ext cx="10058400" cy="384048"/>
           </a:xfrm>
           <a:prstGeom prst="rect">
             <a:avLst/>
@@ -3964,32 +4075,32 @@
           <a:p>
             <a:pPr algn="l"/>
             <a:r>
-              <a:rPr sz="1600" b="0" i="0">
-                <a:solidFill>
-                  <a:srgbClr val="CCCCFF"/>
-                </a:solidFill>
-              </a:rPr>
-              <a:t>  ▸  78 unique tarot cards supported</a:t>
-            </a:r>
-          </a:p>
-        </p:txBody>
-      </p:sp>
-      <p:sp>
-        <p:nvSpPr>
-          <p:cNvPr id="15" name="Rectangle 14"/>
+              <a:rPr sz="1700" b="0" i="0">
+                <a:solidFill>
+                  <a:srgbClr val="CCCCCC"/>
+                </a:solidFill>
+              </a:rPr>
+              <a:t>▸   78 unique tarot cards supported</a:t>
+            </a:r>
+          </a:p>
+        </p:txBody>
+      </p:sp>
+      <p:sp>
+        <p:nvSpPr>
+          <p:cNvPr id="16" name="Rectangle 15"/>
           <p:cNvSpPr/>
           <p:nvPr/>
         </p:nvSpPr>
         <p:spPr>
           <a:xfrm>
-            <a:off x="6217920" y="1554480"/>
-            <a:ext cx="5394960" cy="2560320"/>
+            <a:off x="6309360" y="1554480"/>
+            <a:ext cx="5394960" cy="2743200"/>
           </a:xfrm>
           <a:prstGeom prst="rect">
             <a:avLst/>
           </a:prstGeom>
           <a:solidFill>
-            <a:srgbClr val="1A1A3E"/>
+            <a:srgbClr val="222222"/>
           </a:solidFill>
           <a:ln>
             <a:noFill/>
@@ -4019,20 +4130,20 @@
       </p:sp>
       <p:sp>
         <p:nvSpPr>
-          <p:cNvPr id="16" name="Rectangle 15"/>
+          <p:cNvPr id="17" name="Rectangle 16"/>
           <p:cNvSpPr/>
           <p:nvPr/>
         </p:nvSpPr>
         <p:spPr>
           <a:xfrm>
-            <a:off x="6217920" y="1554480"/>
-            <a:ext cx="73152" cy="2560320"/>
+            <a:off x="6309360" y="1554480"/>
+            <a:ext cx="54864" cy="2743200"/>
           </a:xfrm>
           <a:prstGeom prst="rect">
             <a:avLst/>
           </a:prstGeom>
           <a:solidFill>
-            <a:srgbClr val="9B59B6"/>
+            <a:srgbClr val="1ABC9C"/>
           </a:solidFill>
           <a:ln>
             <a:noFill/>
@@ -4062,14 +4173,14 @@
       </p:sp>
       <p:sp>
         <p:nvSpPr>
-          <p:cNvPr id="17" name="TextBox 16"/>
-          <p:cNvSpPr txBox="1"/>
-          <p:nvPr/>
-        </p:nvSpPr>
-        <p:spPr>
-          <a:xfrm>
-            <a:off x="6446520" y="1600200"/>
-            <a:ext cx="4937760" cy="411480"/>
+          <p:cNvPr id="18" name="TextBox 17"/>
+          <p:cNvSpPr txBox="1"/>
+          <p:nvPr/>
+        </p:nvSpPr>
+        <p:spPr>
+          <a:xfrm>
+            <a:off x="6510528" y="1627632"/>
+            <a:ext cx="4937760" cy="457200"/>
           </a:xfrm>
           <a:prstGeom prst="rect">
             <a:avLst/>
@@ -4084,9 +4195,9 @@
           <a:p>
             <a:pPr algn="l"/>
             <a:r>
-              <a:rPr sz="1600" b="1" i="0">
-                <a:solidFill>
-                  <a:srgbClr val="9B59B6"/>
+              <a:rPr sz="1800" b="1" i="0">
+                <a:solidFill>
+                  <a:srgbClr val="1ABC9C"/>
                 </a:solidFill>
               </a:rPr>
               <a:t>Tech Stack</a:t>
@@ -4096,14 +4207,14 @@
       </p:sp>
       <p:sp>
         <p:nvSpPr>
-          <p:cNvPr id="18" name="TextBox 17"/>
-          <p:cNvSpPr txBox="1"/>
-          <p:nvPr/>
-        </p:nvSpPr>
-        <p:spPr>
-          <a:xfrm>
-            <a:off x="6355080" y="2011680"/>
-            <a:ext cx="9144000" cy="365760"/>
+          <p:cNvPr id="19" name="TextBox 18"/>
+          <p:cNvSpPr txBox="1"/>
+          <p:nvPr/>
+        </p:nvSpPr>
+        <p:spPr>
+          <a:xfrm>
+            <a:off x="6446520" y="2121408"/>
+            <a:ext cx="10058400" cy="384048"/>
           </a:xfrm>
           <a:prstGeom prst="rect">
             <a:avLst/>
@@ -4118,26 +4229,26 @@
           <a:p>
             <a:pPr algn="l"/>
             <a:r>
-              <a:rPr sz="1600" b="0" i="0">
-                <a:solidFill>
-                  <a:srgbClr val="CCCCFF"/>
-                </a:solidFill>
-              </a:rPr>
-              <a:t>  ▸  Framework: PyTorch</a:t>
-            </a:r>
-          </a:p>
-        </p:txBody>
-      </p:sp>
-      <p:sp>
-        <p:nvSpPr>
-          <p:cNvPr id="19" name="TextBox 18"/>
-          <p:cNvSpPr txBox="1"/>
-          <p:nvPr/>
-        </p:nvSpPr>
-        <p:spPr>
-          <a:xfrm>
-            <a:off x="6355080" y="2377440"/>
-            <a:ext cx="9144000" cy="365760"/>
+              <a:rPr sz="1700" b="0" i="0">
+                <a:solidFill>
+                  <a:srgbClr val="CCCCCC"/>
+                </a:solidFill>
+              </a:rPr>
+              <a:t>▸   Framework: PyTorch</a:t>
+            </a:r>
+          </a:p>
+        </p:txBody>
+      </p:sp>
+      <p:sp>
+        <p:nvSpPr>
+          <p:cNvPr id="20" name="TextBox 19"/>
+          <p:cNvSpPr txBox="1"/>
+          <p:nvPr/>
+        </p:nvSpPr>
+        <p:spPr>
+          <a:xfrm>
+            <a:off x="6446520" y="2514600"/>
+            <a:ext cx="10058400" cy="384048"/>
           </a:xfrm>
           <a:prstGeom prst="rect">
             <a:avLst/>
@@ -4152,26 +4263,26 @@
           <a:p>
             <a:pPr algn="l"/>
             <a:r>
-              <a:rPr sz="1600" b="0" i="0">
-                <a:solidFill>
-                  <a:srgbClr val="CCCCFF"/>
-                </a:solidFill>
-              </a:rPr>
-              <a:t>  ▸  Model: EfficientNet-B0</a:t>
-            </a:r>
-          </a:p>
-        </p:txBody>
-      </p:sp>
-      <p:sp>
-        <p:nvSpPr>
-          <p:cNvPr id="20" name="TextBox 19"/>
-          <p:cNvSpPr txBox="1"/>
-          <p:nvPr/>
-        </p:nvSpPr>
-        <p:spPr>
-          <a:xfrm>
-            <a:off x="6355080" y="2743200"/>
-            <a:ext cx="9144000" cy="365760"/>
+              <a:rPr sz="1700" b="0" i="0">
+                <a:solidFill>
+                  <a:srgbClr val="CCCCCC"/>
+                </a:solidFill>
+              </a:rPr>
+              <a:t>▸   Model: EfficientNet-B0</a:t>
+            </a:r>
+          </a:p>
+        </p:txBody>
+      </p:sp>
+      <p:sp>
+        <p:nvSpPr>
+          <p:cNvPr id="21" name="TextBox 20"/>
+          <p:cNvSpPr txBox="1"/>
+          <p:nvPr/>
+        </p:nvSpPr>
+        <p:spPr>
+          <a:xfrm>
+            <a:off x="6446520" y="2907792"/>
+            <a:ext cx="10058400" cy="384048"/>
           </a:xfrm>
           <a:prstGeom prst="rect">
             <a:avLst/>
@@ -4186,26 +4297,26 @@
           <a:p>
             <a:pPr algn="l"/>
             <a:r>
-              <a:rPr sz="1600" b="0" i="0">
-                <a:solidFill>
-                  <a:srgbClr val="CCCCFF"/>
-                </a:solidFill>
-              </a:rPr>
-              <a:t>  ▸  Training: Google Colab (T4 GPU)</a:t>
-            </a:r>
-          </a:p>
-        </p:txBody>
-      </p:sp>
-      <p:sp>
-        <p:nvSpPr>
-          <p:cNvPr id="21" name="TextBox 20"/>
-          <p:cNvSpPr txBox="1"/>
-          <p:nvPr/>
-        </p:nvSpPr>
-        <p:spPr>
-          <a:xfrm>
-            <a:off x="6355080" y="3108960"/>
-            <a:ext cx="9144000" cy="365760"/>
+              <a:rPr sz="1700" b="0" i="0">
+                <a:solidFill>
+                  <a:srgbClr val="CCCCCC"/>
+                </a:solidFill>
+              </a:rPr>
+              <a:t>▸   Training: Google Colab (T4 GPU)</a:t>
+            </a:r>
+          </a:p>
+        </p:txBody>
+      </p:sp>
+      <p:sp>
+        <p:nvSpPr>
+          <p:cNvPr id="22" name="TextBox 21"/>
+          <p:cNvSpPr txBox="1"/>
+          <p:nvPr/>
+        </p:nvSpPr>
+        <p:spPr>
+          <a:xfrm>
+            <a:off x="6446520" y="3300984"/>
+            <a:ext cx="10058400" cy="384048"/>
           </a:xfrm>
           <a:prstGeom prst="rect">
             <a:avLst/>
@@ -4220,32 +4331,32 @@
           <a:p>
             <a:pPr algn="l"/>
             <a:r>
-              <a:rPr sz="1600" b="0" i="0">
-                <a:solidFill>
-                  <a:srgbClr val="CCCCFF"/>
-                </a:solidFill>
-              </a:rPr>
-              <a:t>  ▸  Data: Custom tarot card photos</a:t>
-            </a:r>
-          </a:p>
-        </p:txBody>
-      </p:sp>
-      <p:sp>
-        <p:nvSpPr>
-          <p:cNvPr id="22" name="Rectangle 21"/>
+              <a:rPr sz="1700" b="0" i="0">
+                <a:solidFill>
+                  <a:srgbClr val="CCCCCC"/>
+                </a:solidFill>
+              </a:rPr>
+              <a:t>▸   Data: Custom tarot card photos</a:t>
+            </a:r>
+          </a:p>
+        </p:txBody>
+      </p:sp>
+      <p:sp>
+        <p:nvSpPr>
+          <p:cNvPr id="23" name="Rectangle 22"/>
           <p:cNvSpPr/>
           <p:nvPr/>
         </p:nvSpPr>
         <p:spPr>
           <a:xfrm>
-            <a:off x="914400" y="4663440"/>
-            <a:ext cx="2011680" cy="640080"/>
+            <a:off x="731520" y="4663440"/>
+            <a:ext cx="2194560" cy="658368"/>
           </a:xfrm>
           <a:prstGeom prst="rect">
             <a:avLst/>
           </a:prstGeom>
           <a:solidFill>
-            <a:srgbClr val="9B59B6"/>
+            <a:srgbClr val="1ABC9C"/>
           </a:solidFill>
           <a:ln>
             <a:noFill/>
@@ -4275,65 +4386,65 @@
       </p:sp>
       <p:sp>
         <p:nvSpPr>
-          <p:cNvPr id="23" name="TextBox 22"/>
-          <p:cNvSpPr txBox="1"/>
-          <p:nvPr/>
-        </p:nvSpPr>
-        <p:spPr>
-          <a:xfrm>
-            <a:off x="914400" y="4754880"/>
-            <a:ext cx="2011680" cy="457200"/>
-          </a:xfrm>
-          <a:prstGeom prst="rect">
-            <a:avLst/>
-          </a:prstGeom>
-          <a:noFill/>
-        </p:spPr>
-        <p:txBody>
-          <a:bodyPr wrap="none">
-            <a:spAutoFit/>
-          </a:bodyPr>
-          <a:lstStyle/>
-          <a:p>
-            <a:pPr algn="ctr"/>
-            <a:r>
-              <a:rPr sz="1600" b="1" i="0">
+          <p:cNvPr id="24" name="TextBox 23"/>
+          <p:cNvSpPr txBox="1"/>
+          <p:nvPr/>
+        </p:nvSpPr>
+        <p:spPr>
+          <a:xfrm>
+            <a:off x="731520" y="4773168"/>
+            <a:ext cx="2194560" cy="457200"/>
+          </a:xfrm>
+          <a:prstGeom prst="rect">
+            <a:avLst/>
+          </a:prstGeom>
+          <a:noFill/>
+        </p:spPr>
+        <p:txBody>
+          <a:bodyPr wrap="none">
+            <a:spAutoFit/>
+          </a:bodyPr>
+          <a:lstStyle/>
+          <a:p>
+            <a:pPr algn="ctr"/>
+            <a:r>
+              <a:rPr sz="1700" b="1" i="0">
                 <a:solidFill>
                   <a:srgbClr val="FFFFFF"/>
                 </a:solidFill>
               </a:rPr>
-              <a:t>📷 Photo</a:t>
-            </a:r>
-          </a:p>
-        </p:txBody>
-      </p:sp>
-      <p:sp>
-        <p:nvSpPr>
-          <p:cNvPr id="24" name="TextBox 23"/>
-          <p:cNvSpPr txBox="1"/>
-          <p:nvPr/>
-        </p:nvSpPr>
-        <p:spPr>
-          <a:xfrm>
-            <a:off x="3017520" y="4754880"/>
-            <a:ext cx="548640" cy="457200"/>
-          </a:xfrm>
-          <a:prstGeom prst="rect">
-            <a:avLst/>
-          </a:prstGeom>
-          <a:noFill/>
-        </p:spPr>
-        <p:txBody>
-          <a:bodyPr wrap="none">
-            <a:spAutoFit/>
-          </a:bodyPr>
-          <a:lstStyle/>
-          <a:p>
-            <a:pPr algn="ctr"/>
-            <a:r>
-              <a:rPr sz="2400" b="1" i="0">
-                <a:solidFill>
-                  <a:srgbClr val="F0C040"/>
+              <a:t>📷  Photo</a:t>
+            </a:r>
+          </a:p>
+        </p:txBody>
+      </p:sp>
+      <p:sp>
+        <p:nvSpPr>
+          <p:cNvPr id="25" name="TextBox 24"/>
+          <p:cNvSpPr txBox="1"/>
+          <p:nvPr/>
+        </p:nvSpPr>
+        <p:spPr>
+          <a:xfrm>
+            <a:off x="2926080" y="4809744"/>
+            <a:ext cx="457200" cy="411480"/>
+          </a:xfrm>
+          <a:prstGeom prst="rect">
+            <a:avLst/>
+          </a:prstGeom>
+          <a:noFill/>
+        </p:spPr>
+        <p:txBody>
+          <a:bodyPr wrap="none">
+            <a:spAutoFit/>
+          </a:bodyPr>
+          <a:lstStyle/>
+          <a:p>
+            <a:pPr algn="ctr"/>
+            <a:r>
+              <a:rPr sz="2200" b="1" i="0">
+                <a:solidFill>
+                  <a:srgbClr val="D4A017"/>
                 </a:solidFill>
               </a:rPr>
               <a:t>→</a:t>
@@ -4343,20 +4454,20 @@
       </p:sp>
       <p:sp>
         <p:nvSpPr>
-          <p:cNvPr id="25" name="Rectangle 24"/>
+          <p:cNvPr id="26" name="Rectangle 25"/>
           <p:cNvSpPr/>
           <p:nvPr/>
         </p:nvSpPr>
         <p:spPr>
           <a:xfrm>
-            <a:off x="3657600" y="4663440"/>
-            <a:ext cx="2011680" cy="640080"/>
+            <a:off x="3566160" y="4663440"/>
+            <a:ext cx="2194560" cy="658368"/>
           </a:xfrm>
           <a:prstGeom prst="rect">
             <a:avLst/>
           </a:prstGeom>
           <a:solidFill>
-            <a:srgbClr val="9B59B6"/>
+            <a:srgbClr val="1ABC9C"/>
           </a:solidFill>
           <a:ln>
             <a:noFill/>
@@ -4386,65 +4497,65 @@
       </p:sp>
       <p:sp>
         <p:nvSpPr>
-          <p:cNvPr id="26" name="TextBox 25"/>
-          <p:cNvSpPr txBox="1"/>
-          <p:nvPr/>
-        </p:nvSpPr>
-        <p:spPr>
-          <a:xfrm>
-            <a:off x="3657600" y="4754880"/>
-            <a:ext cx="2011680" cy="457200"/>
-          </a:xfrm>
-          <a:prstGeom prst="rect">
-            <a:avLst/>
-          </a:prstGeom>
-          <a:noFill/>
-        </p:spPr>
-        <p:txBody>
-          <a:bodyPr wrap="none">
-            <a:spAutoFit/>
-          </a:bodyPr>
-          <a:lstStyle/>
-          <a:p>
-            <a:pPr algn="ctr"/>
-            <a:r>
-              <a:rPr sz="1600" b="1" i="0">
+          <p:cNvPr id="27" name="TextBox 26"/>
+          <p:cNvSpPr txBox="1"/>
+          <p:nvPr/>
+        </p:nvSpPr>
+        <p:spPr>
+          <a:xfrm>
+            <a:off x="3566160" y="4773168"/>
+            <a:ext cx="2194560" cy="457200"/>
+          </a:xfrm>
+          <a:prstGeom prst="rect">
+            <a:avLst/>
+          </a:prstGeom>
+          <a:noFill/>
+        </p:spPr>
+        <p:txBody>
+          <a:bodyPr wrap="none">
+            <a:spAutoFit/>
+          </a:bodyPr>
+          <a:lstStyle/>
+          <a:p>
+            <a:pPr algn="ctr"/>
+            <a:r>
+              <a:rPr sz="1700" b="1" i="0">
                 <a:solidFill>
                   <a:srgbClr val="FFFFFF"/>
                 </a:solidFill>
               </a:rPr>
-              <a:t>🤖 AI Model</a:t>
-            </a:r>
-          </a:p>
-        </p:txBody>
-      </p:sp>
-      <p:sp>
-        <p:nvSpPr>
-          <p:cNvPr id="27" name="TextBox 26"/>
-          <p:cNvSpPr txBox="1"/>
-          <p:nvPr/>
-        </p:nvSpPr>
-        <p:spPr>
-          <a:xfrm>
-            <a:off x="5760720" y="4754880"/>
-            <a:ext cx="548640" cy="457200"/>
-          </a:xfrm>
-          <a:prstGeom prst="rect">
-            <a:avLst/>
-          </a:prstGeom>
-          <a:noFill/>
-        </p:spPr>
-        <p:txBody>
-          <a:bodyPr wrap="none">
-            <a:spAutoFit/>
-          </a:bodyPr>
-          <a:lstStyle/>
-          <a:p>
-            <a:pPr algn="ctr"/>
-            <a:r>
-              <a:rPr sz="2400" b="1" i="0">
-                <a:solidFill>
-                  <a:srgbClr val="F0C040"/>
+              <a:t>🤖  AI Model</a:t>
+            </a:r>
+          </a:p>
+        </p:txBody>
+      </p:sp>
+      <p:sp>
+        <p:nvSpPr>
+          <p:cNvPr id="28" name="TextBox 27"/>
+          <p:cNvSpPr txBox="1"/>
+          <p:nvPr/>
+        </p:nvSpPr>
+        <p:spPr>
+          <a:xfrm>
+            <a:off x="5760720" y="4809744"/>
+            <a:ext cx="457200" cy="411480"/>
+          </a:xfrm>
+          <a:prstGeom prst="rect">
+            <a:avLst/>
+          </a:prstGeom>
+          <a:noFill/>
+        </p:spPr>
+        <p:txBody>
+          <a:bodyPr wrap="none">
+            <a:spAutoFit/>
+          </a:bodyPr>
+          <a:lstStyle/>
+          <a:p>
+            <a:pPr algn="ctr"/>
+            <a:r>
+              <a:rPr sz="2200" b="1" i="0">
+                <a:solidFill>
+                  <a:srgbClr val="D4A017"/>
                 </a:solidFill>
               </a:rPr>
               <a:t>→</a:t>
@@ -4454,20 +4565,20 @@
       </p:sp>
       <p:sp>
         <p:nvSpPr>
-          <p:cNvPr id="28" name="Rectangle 27"/>
+          <p:cNvPr id="29" name="Rectangle 28"/>
           <p:cNvSpPr/>
           <p:nvPr/>
         </p:nvSpPr>
         <p:spPr>
           <a:xfrm>
             <a:off x="6400800" y="4663440"/>
-            <a:ext cx="2011680" cy="640080"/>
+            <a:ext cx="2194560" cy="658368"/>
           </a:xfrm>
           <a:prstGeom prst="rect">
             <a:avLst/>
           </a:prstGeom>
           <a:solidFill>
-            <a:srgbClr val="9B59B6"/>
+            <a:srgbClr val="1ABC9C"/>
           </a:solidFill>
           <a:ln>
             <a:noFill/>
@@ -4497,65 +4608,65 @@
       </p:sp>
       <p:sp>
         <p:nvSpPr>
-          <p:cNvPr id="29" name="TextBox 28"/>
-          <p:cNvSpPr txBox="1"/>
-          <p:nvPr/>
-        </p:nvSpPr>
-        <p:spPr>
-          <a:xfrm>
-            <a:off x="6400800" y="4754880"/>
-            <a:ext cx="2011680" cy="457200"/>
-          </a:xfrm>
-          <a:prstGeom prst="rect">
-            <a:avLst/>
-          </a:prstGeom>
-          <a:noFill/>
-        </p:spPr>
-        <p:txBody>
-          <a:bodyPr wrap="none">
-            <a:spAutoFit/>
-          </a:bodyPr>
-          <a:lstStyle/>
-          <a:p>
-            <a:pPr algn="ctr"/>
-            <a:r>
-              <a:rPr sz="1600" b="1" i="0">
+          <p:cNvPr id="30" name="TextBox 29"/>
+          <p:cNvSpPr txBox="1"/>
+          <p:nvPr/>
+        </p:nvSpPr>
+        <p:spPr>
+          <a:xfrm>
+            <a:off x="6400800" y="4773168"/>
+            <a:ext cx="2194560" cy="457200"/>
+          </a:xfrm>
+          <a:prstGeom prst="rect">
+            <a:avLst/>
+          </a:prstGeom>
+          <a:noFill/>
+        </p:spPr>
+        <p:txBody>
+          <a:bodyPr wrap="none">
+            <a:spAutoFit/>
+          </a:bodyPr>
+          <a:lstStyle/>
+          <a:p>
+            <a:pPr algn="ctr"/>
+            <a:r>
+              <a:rPr sz="1700" b="1" i="0">
                 <a:solidFill>
                   <a:srgbClr val="FFFFFF"/>
                 </a:solidFill>
               </a:rPr>
-              <a:t>🃏 Card ID</a:t>
-            </a:r>
-          </a:p>
-        </p:txBody>
-      </p:sp>
-      <p:sp>
-        <p:nvSpPr>
-          <p:cNvPr id="30" name="TextBox 29"/>
-          <p:cNvSpPr txBox="1"/>
-          <p:nvPr/>
-        </p:nvSpPr>
-        <p:spPr>
-          <a:xfrm>
-            <a:off x="8503920" y="4754880"/>
-            <a:ext cx="548640" cy="457200"/>
-          </a:xfrm>
-          <a:prstGeom prst="rect">
-            <a:avLst/>
-          </a:prstGeom>
-          <a:noFill/>
-        </p:spPr>
-        <p:txBody>
-          <a:bodyPr wrap="none">
-            <a:spAutoFit/>
-          </a:bodyPr>
-          <a:lstStyle/>
-          <a:p>
-            <a:pPr algn="ctr"/>
-            <a:r>
-              <a:rPr sz="2400" b="1" i="0">
-                <a:solidFill>
-                  <a:srgbClr val="F0C040"/>
+              <a:t>🃏  Card ID</a:t>
+            </a:r>
+          </a:p>
+        </p:txBody>
+      </p:sp>
+      <p:sp>
+        <p:nvSpPr>
+          <p:cNvPr id="31" name="TextBox 30"/>
+          <p:cNvSpPr txBox="1"/>
+          <p:nvPr/>
+        </p:nvSpPr>
+        <p:spPr>
+          <a:xfrm>
+            <a:off x="8595360" y="4809744"/>
+            <a:ext cx="457200" cy="411480"/>
+          </a:xfrm>
+          <a:prstGeom prst="rect">
+            <a:avLst/>
+          </a:prstGeom>
+          <a:noFill/>
+        </p:spPr>
+        <p:txBody>
+          <a:bodyPr wrap="none">
+            <a:spAutoFit/>
+          </a:bodyPr>
+          <a:lstStyle/>
+          <a:p>
+            <a:pPr algn="ctr"/>
+            <a:r>
+              <a:rPr sz="2200" b="1" i="0">
+                <a:solidFill>
+                  <a:srgbClr val="D4A017"/>
                 </a:solidFill>
               </a:rPr>
               <a:t>→</a:t>
@@ -4565,20 +4676,20 @@
       </p:sp>
       <p:sp>
         <p:nvSpPr>
-          <p:cNvPr id="31" name="Rectangle 30"/>
+          <p:cNvPr id="32" name="Rectangle 31"/>
           <p:cNvSpPr/>
           <p:nvPr/>
         </p:nvSpPr>
         <p:spPr>
           <a:xfrm>
-            <a:off x="9144000" y="4663440"/>
-            <a:ext cx="2286000" cy="640080"/>
+            <a:off x="9235440" y="4663440"/>
+            <a:ext cx="2194560" cy="658368"/>
           </a:xfrm>
           <a:prstGeom prst="rect">
             <a:avLst/>
           </a:prstGeom>
           <a:solidFill>
-            <a:srgbClr val="F0C040"/>
+            <a:srgbClr val="D4A017"/>
           </a:solidFill>
           <a:ln>
             <a:noFill/>
@@ -4608,34 +4719,34 @@
       </p:sp>
       <p:sp>
         <p:nvSpPr>
-          <p:cNvPr id="32" name="TextBox 31"/>
-          <p:cNvSpPr txBox="1"/>
-          <p:nvPr/>
-        </p:nvSpPr>
-        <p:spPr>
-          <a:xfrm>
-            <a:off x="9144000" y="4754880"/>
-            <a:ext cx="2286000" cy="457200"/>
-          </a:xfrm>
-          <a:prstGeom prst="rect">
-            <a:avLst/>
-          </a:prstGeom>
-          <a:noFill/>
-        </p:spPr>
-        <p:txBody>
-          <a:bodyPr wrap="none">
-            <a:spAutoFit/>
-          </a:bodyPr>
-          <a:lstStyle/>
-          <a:p>
-            <a:pPr algn="ctr"/>
-            <a:r>
-              <a:rPr sz="1600" b="1" i="0">
-                <a:solidFill>
-                  <a:srgbClr val="0D0D2B"/>
-                </a:solidFill>
-              </a:rPr>
-              <a:t>🔮 Fortune</a:t>
+          <p:cNvPr id="33" name="TextBox 32"/>
+          <p:cNvSpPr txBox="1"/>
+          <p:nvPr/>
+        </p:nvSpPr>
+        <p:spPr>
+          <a:xfrm>
+            <a:off x="9235440" y="4773168"/>
+            <a:ext cx="2194560" cy="457200"/>
+          </a:xfrm>
+          <a:prstGeom prst="rect">
+            <a:avLst/>
+          </a:prstGeom>
+          <a:noFill/>
+        </p:spPr>
+        <p:txBody>
+          <a:bodyPr wrap="none">
+            <a:spAutoFit/>
+          </a:bodyPr>
+          <a:lstStyle/>
+          <a:p>
+            <a:pPr algn="ctr"/>
+            <a:r>
+              <a:rPr sz="1700" b="1" i="0">
+                <a:solidFill>
+                  <a:srgbClr val="141414"/>
+                </a:solidFill>
+              </a:rPr>
+              <a:t>🔮  Fortune</a:t>
             </a:r>
           </a:p>
         </p:txBody>
@@ -4654,7 +4765,7 @@
     <p:bg>
       <p:bgPr>
         <a:solidFill>
-          <a:srgbClr val="0D0D2B"/>
+          <a:srgbClr val="141414"/>
         </a:solidFill>
         <a:effectLst/>
       </p:bgPr>
@@ -4675,13 +4786,13 @@
         <p:spPr>
           <a:xfrm>
             <a:off x="0" y="0"/>
-            <a:ext cx="12188952" cy="109728"/>
+            <a:ext cx="12188952" cy="91440"/>
           </a:xfrm>
           <a:prstGeom prst="rect">
             <a:avLst/>
           </a:prstGeom>
           <a:solidFill>
-            <a:srgbClr val="F0C040"/>
+            <a:srgbClr val="D4A017"/>
           </a:solidFill>
           <a:ln>
             <a:noFill/>
@@ -4717,14 +4828,14 @@
         </p:nvSpPr>
         <p:spPr>
           <a:xfrm>
-            <a:off x="0" y="6748272"/>
-            <a:ext cx="12188952" cy="109728"/>
+            <a:off x="0" y="6766560"/>
+            <a:ext cx="12188952" cy="91440"/>
           </a:xfrm>
           <a:prstGeom prst="rect">
             <a:avLst/>
           </a:prstGeom>
           <a:solidFill>
-            <a:srgbClr val="9B59B6"/>
+            <a:srgbClr val="1ABC9C"/>
           </a:solidFill>
           <a:ln>
             <a:noFill/>
@@ -4754,20 +4865,54 @@
       </p:sp>
       <p:sp>
         <p:nvSpPr>
-          <p:cNvPr id="4" name="Rectangle 3"/>
+          <p:cNvPr id="4" name="TextBox 3"/>
+          <p:cNvSpPr txBox="1"/>
+          <p:nvPr/>
+        </p:nvSpPr>
+        <p:spPr>
+          <a:xfrm>
+            <a:off x="0" y="6766560"/>
+            <a:ext cx="12188952" cy="91440"/>
+          </a:xfrm>
+          <a:prstGeom prst="rect">
+            <a:avLst/>
+          </a:prstGeom>
+          <a:noFill/>
+        </p:spPr>
+        <p:txBody>
+          <a:bodyPr wrap="none">
+            <a:spAutoFit/>
+          </a:bodyPr>
+          <a:lstStyle/>
+          <a:p>
+            <a:pPr algn="ctr"/>
+            <a:r>
+              <a:rPr sz="900" b="0" i="0">
+                <a:solidFill>
+                  <a:srgbClr val="888888"/>
+                </a:solidFill>
+              </a:rPr>
+              <a:t>Fortune Teller  ·  AI Tarot Card Recognition  ·  2026</a:t>
+            </a:r>
+          </a:p>
+        </p:txBody>
+      </p:sp>
+      <p:sp>
+        <p:nvSpPr>
+          <p:cNvPr id="5" name="Rectangle 4"/>
           <p:cNvSpPr/>
           <p:nvPr/>
         </p:nvSpPr>
         <p:spPr>
           <a:xfrm>
-            <a:off x="457200" y="228600"/>
-            <a:ext cx="1645920" cy="292608"/>
+            <a:off x="457200" y="201168"/>
+            <a:ext cx="2167128" cy="301752"/>
           </a:xfrm>
           <a:prstGeom prst="rect">
             <a:avLst/>
           </a:prstGeom>
           <a:solidFill>
-            <a:srgbClr val="9B59B6"/>
+            <a:srgbClr val="1ABC9C"/>
           </a:solidFill>
           <a:ln>
             <a:noFill/>
@@ -4797,67 +4942,67 @@
       </p:sp>
       <p:sp>
         <p:nvSpPr>
-          <p:cNvPr id="5" name="TextBox 4"/>
-          <p:cNvSpPr txBox="1"/>
-          <p:nvPr/>
-        </p:nvSpPr>
-        <p:spPr>
-          <a:xfrm>
-            <a:off x="502920" y="246888"/>
-            <a:ext cx="1554480" cy="274320"/>
-          </a:xfrm>
-          <a:prstGeom prst="rect">
-            <a:avLst/>
-          </a:prstGeom>
-          <a:noFill/>
-        </p:spPr>
-        <p:txBody>
-          <a:bodyPr wrap="none">
-            <a:spAutoFit/>
-          </a:bodyPr>
-          <a:lstStyle/>
-          <a:p>
-            <a:pPr algn="ctr"/>
-            <a:r>
-              <a:rPr sz="1000" b="1" i="0">
+          <p:cNvPr id="6" name="TextBox 5"/>
+          <p:cNvSpPr txBox="1"/>
+          <p:nvPr/>
+        </p:nvSpPr>
+        <p:spPr>
+          <a:xfrm>
+            <a:off x="530352" y="237744"/>
+            <a:ext cx="2029968" cy="256032"/>
+          </a:xfrm>
+          <a:prstGeom prst="rect">
+            <a:avLst/>
+          </a:prstGeom>
+          <a:noFill/>
+        </p:spPr>
+        <p:txBody>
+          <a:bodyPr wrap="none">
+            <a:spAutoFit/>
+          </a:bodyPr>
+          <a:lstStyle/>
+          <a:p>
+            <a:pPr algn="l"/>
+            <a:r>
+              <a:rPr sz="1100" b="1" i="0">
+                <a:solidFill>
+                  <a:srgbClr val="141414"/>
+                </a:solidFill>
+              </a:rPr>
+              <a:t>PROBLEM &amp; SOLUTION</a:t>
+            </a:r>
+          </a:p>
+        </p:txBody>
+      </p:sp>
+      <p:sp>
+        <p:nvSpPr>
+          <p:cNvPr id="7" name="TextBox 6"/>
+          <p:cNvSpPr txBox="1"/>
+          <p:nvPr/>
+        </p:nvSpPr>
+        <p:spPr>
+          <a:xfrm>
+            <a:off x="457200" y="594360"/>
+            <a:ext cx="10972800" cy="685800"/>
+          </a:xfrm>
+          <a:prstGeom prst="rect">
+            <a:avLst/>
+          </a:prstGeom>
+          <a:noFill/>
+        </p:spPr>
+        <p:txBody>
+          <a:bodyPr wrap="none">
+            <a:spAutoFit/>
+          </a:bodyPr>
+          <a:lstStyle/>
+          <a:p>
+            <a:pPr algn="l"/>
+            <a:r>
+              <a:rPr sz="3400" b="1" i="0">
                 <a:solidFill>
                   <a:srgbClr val="FFFFFF"/>
                 </a:solidFill>
               </a:rPr>
-              <a:t>PROBLEM &amp; SOLUTION</a:t>
-            </a:r>
-          </a:p>
-        </p:txBody>
-      </p:sp>
-      <p:sp>
-        <p:nvSpPr>
-          <p:cNvPr id="6" name="TextBox 5"/>
-          <p:cNvSpPr txBox="1"/>
-          <p:nvPr/>
-        </p:nvSpPr>
-        <p:spPr>
-          <a:xfrm>
-            <a:off x="457200" y="640080"/>
-            <a:ext cx="9144000" cy="640080"/>
-          </a:xfrm>
-          <a:prstGeom prst="rect">
-            <a:avLst/>
-          </a:prstGeom>
-          <a:noFill/>
-        </p:spPr>
-        <p:txBody>
-          <a:bodyPr wrap="none">
-            <a:spAutoFit/>
-          </a:bodyPr>
-          <a:lstStyle/>
-          <a:p>
-            <a:pPr algn="l"/>
-            <a:r>
-              <a:rPr sz="3200" b="1" i="0">
-                <a:solidFill>
-                  <a:srgbClr val="F0C040"/>
-                </a:solidFill>
-              </a:rPr>
               <a:t>Challenge &amp; Approach</a:t>
             </a:r>
           </a:p>
@@ -4865,20 +5010,20 @@
       </p:sp>
       <p:sp>
         <p:nvSpPr>
-          <p:cNvPr id="7" name="Rectangle 6"/>
+          <p:cNvPr id="8" name="Rectangle 7"/>
           <p:cNvSpPr/>
           <p:nvPr/>
         </p:nvSpPr>
         <p:spPr>
           <a:xfrm>
-            <a:off x="457200" y="1371600"/>
+            <a:off x="457200" y="1389888"/>
             <a:ext cx="11274552" cy="36576"/>
           </a:xfrm>
           <a:prstGeom prst="rect">
             <a:avLst/>
           </a:prstGeom>
           <a:solidFill>
-            <a:srgbClr val="9B59B6"/>
+            <a:srgbClr val="1ABC9C"/>
           </a:solidFill>
           <a:ln>
             <a:noFill/>
@@ -4908,20 +5053,20 @@
       </p:sp>
       <p:sp>
         <p:nvSpPr>
-          <p:cNvPr id="8" name="Rectangle 7"/>
+          <p:cNvPr id="9" name="Rectangle 8"/>
           <p:cNvSpPr/>
           <p:nvPr/>
         </p:nvSpPr>
         <p:spPr>
           <a:xfrm>
             <a:off x="457200" y="1554480"/>
-            <a:ext cx="5212080" cy="3474720"/>
+            <a:ext cx="5303520" cy="3749039"/>
           </a:xfrm>
           <a:prstGeom prst="rect">
             <a:avLst/>
           </a:prstGeom>
           <a:solidFill>
-            <a:srgbClr val="1A1A3E"/>
+            <a:srgbClr val="222222"/>
           </a:solidFill>
           <a:ln>
             <a:noFill/>
@@ -4951,14 +5096,14 @@
       </p:sp>
       <p:sp>
         <p:nvSpPr>
-          <p:cNvPr id="9" name="Rectangle 8"/>
+          <p:cNvPr id="10" name="Rectangle 9"/>
           <p:cNvSpPr/>
           <p:nvPr/>
         </p:nvSpPr>
         <p:spPr>
           <a:xfrm>
             <a:off x="457200" y="1554480"/>
-            <a:ext cx="73152" cy="3474720"/>
+            <a:ext cx="54864" cy="3749039"/>
           </a:xfrm>
           <a:prstGeom prst="rect">
             <a:avLst/>
@@ -4994,14 +5139,14 @@
       </p:sp>
       <p:sp>
         <p:nvSpPr>
-          <p:cNvPr id="10" name="TextBox 9"/>
-          <p:cNvSpPr txBox="1"/>
-          <p:nvPr/>
-        </p:nvSpPr>
-        <p:spPr>
-          <a:xfrm>
-            <a:off x="685800" y="1645920"/>
-            <a:ext cx="4754880" cy="457200"/>
+          <p:cNvPr id="11" name="TextBox 10"/>
+          <p:cNvSpPr txBox="1"/>
+          <p:nvPr/>
+        </p:nvSpPr>
+        <p:spPr>
+          <a:xfrm>
+            <a:off x="658368" y="1627632"/>
+            <a:ext cx="4846320" cy="475488"/>
           </a:xfrm>
           <a:prstGeom prst="rect">
             <a:avLst/>
@@ -5016,26 +5161,26 @@
           <a:p>
             <a:pPr algn="l"/>
             <a:r>
-              <a:rPr sz="1800" b="1" i="0">
+              <a:rPr sz="2000" b="1" i="0">
                 <a:solidFill>
                   <a:srgbClr val="E74C3C"/>
                 </a:solidFill>
               </a:rPr>
-              <a:t>❌  Problem</a:t>
-            </a:r>
-          </a:p>
-        </p:txBody>
-      </p:sp>
-      <p:sp>
-        <p:nvSpPr>
-          <p:cNvPr id="11" name="TextBox 10"/>
-          <p:cNvSpPr txBox="1"/>
-          <p:nvPr/>
-        </p:nvSpPr>
-        <p:spPr>
-          <a:xfrm>
-            <a:off x="594360" y="2148840"/>
-            <a:ext cx="9144000" cy="365760"/>
+              <a:t>Problem</a:t>
+            </a:r>
+          </a:p>
+        </p:txBody>
+      </p:sp>
+      <p:sp>
+        <p:nvSpPr>
+          <p:cNvPr id="12" name="TextBox 11"/>
+          <p:cNvSpPr txBox="1"/>
+          <p:nvPr/>
+        </p:nvSpPr>
+        <p:spPr>
+          <a:xfrm>
+            <a:off x="594360" y="2176272"/>
+            <a:ext cx="10058400" cy="384048"/>
           </a:xfrm>
           <a:prstGeom prst="rect">
             <a:avLst/>
@@ -5050,26 +5195,26 @@
           <a:p>
             <a:pPr algn="l"/>
             <a:r>
-              <a:rPr sz="1500" b="0" i="0">
-                <a:solidFill>
-                  <a:srgbClr val="CCCCFF"/>
-                </a:solidFill>
-              </a:rPr>
-              <a:t>  ▸  78 visually distinct tarot cards</a:t>
-            </a:r>
-          </a:p>
-        </p:txBody>
-      </p:sp>
-      <p:sp>
-        <p:nvSpPr>
-          <p:cNvPr id="12" name="TextBox 11"/>
-          <p:cNvSpPr txBox="1"/>
-          <p:nvPr/>
-        </p:nvSpPr>
-        <p:spPr>
-          <a:xfrm>
-            <a:off x="594360" y="2514600"/>
-            <a:ext cx="9144000" cy="365760"/>
+              <a:rPr sz="1600" b="0" i="0">
+                <a:solidFill>
+                  <a:srgbClr val="CCCCCC"/>
+                </a:solidFill>
+              </a:rPr>
+              <a:t>▸   78 visually distinct tarot cards</a:t>
+            </a:r>
+          </a:p>
+        </p:txBody>
+      </p:sp>
+      <p:sp>
+        <p:nvSpPr>
+          <p:cNvPr id="13" name="TextBox 12"/>
+          <p:cNvSpPr txBox="1"/>
+          <p:nvPr/>
+        </p:nvSpPr>
+        <p:spPr>
+          <a:xfrm>
+            <a:off x="594360" y="2651760"/>
+            <a:ext cx="10058400" cy="384048"/>
           </a:xfrm>
           <a:prstGeom prst="rect">
             <a:avLst/>
@@ -5084,26 +5229,26 @@
           <a:p>
             <a:pPr algn="l"/>
             <a:r>
-              <a:rPr sz="1500" b="0" i="0">
-                <a:solidFill>
-                  <a:srgbClr val="CCCCFF"/>
-                </a:solidFill>
-              </a:rPr>
-              <a:t>  ▸  Complex symbols, figures, colors</a:t>
-            </a:r>
-          </a:p>
-        </p:txBody>
-      </p:sp>
-      <p:sp>
-        <p:nvSpPr>
-          <p:cNvPr id="13" name="TextBox 12"/>
-          <p:cNvSpPr txBox="1"/>
-          <p:nvPr/>
-        </p:nvSpPr>
-        <p:spPr>
-          <a:xfrm>
-            <a:off x="594360" y="2880360"/>
-            <a:ext cx="9144000" cy="365760"/>
+              <a:rPr sz="1600" b="0" i="0">
+                <a:solidFill>
+                  <a:srgbClr val="CCCCCC"/>
+                </a:solidFill>
+              </a:rPr>
+              <a:t>▸   Complex symbols, figures, and colors</a:t>
+            </a:r>
+          </a:p>
+        </p:txBody>
+      </p:sp>
+      <p:sp>
+        <p:nvSpPr>
+          <p:cNvPr id="14" name="TextBox 13"/>
+          <p:cNvSpPr txBox="1"/>
+          <p:nvPr/>
+        </p:nvSpPr>
+        <p:spPr>
+          <a:xfrm>
+            <a:off x="594360" y="3127248"/>
+            <a:ext cx="10058400" cy="384048"/>
           </a:xfrm>
           <a:prstGeom prst="rect">
             <a:avLst/>
@@ -5118,26 +5263,26 @@
           <a:p>
             <a:pPr algn="l"/>
             <a:r>
-              <a:rPr sz="1500" b="0" i="0">
-                <a:solidFill>
-                  <a:srgbClr val="CCCCFF"/>
-                </a:solidFill>
-              </a:rPr>
-              <a:t>  ▸  Small dataset (~30 photos/card)</a:t>
-            </a:r>
-          </a:p>
-        </p:txBody>
-      </p:sp>
-      <p:sp>
-        <p:nvSpPr>
-          <p:cNvPr id="14" name="TextBox 13"/>
-          <p:cNvSpPr txBox="1"/>
-          <p:nvPr/>
-        </p:nvSpPr>
-        <p:spPr>
-          <a:xfrm>
-            <a:off x="594360" y="3246120"/>
-            <a:ext cx="9144000" cy="365760"/>
+              <a:rPr sz="1600" b="0" i="0">
+                <a:solidFill>
+                  <a:srgbClr val="CCCCCC"/>
+                </a:solidFill>
+              </a:rPr>
+              <a:t>▸   Small dataset  (~30 photos per card)</a:t>
+            </a:r>
+          </a:p>
+        </p:txBody>
+      </p:sp>
+      <p:sp>
+        <p:nvSpPr>
+          <p:cNvPr id="15" name="TextBox 14"/>
+          <p:cNvSpPr txBox="1"/>
+          <p:nvPr/>
+        </p:nvSpPr>
+        <p:spPr>
+          <a:xfrm>
+            <a:off x="594360" y="3602736"/>
+            <a:ext cx="10058400" cy="384048"/>
           </a:xfrm>
           <a:prstGeom prst="rect">
             <a:avLst/>
@@ -5152,26 +5297,26 @@
           <a:p>
             <a:pPr algn="l"/>
             <a:r>
-              <a:rPr sz="1500" b="0" i="0">
-                <a:solidFill>
-                  <a:srgbClr val="CCCCFF"/>
-                </a:solidFill>
-              </a:rPr>
-              <a:t>  ▸  Varied lighting &amp; angles in photos</a:t>
-            </a:r>
-          </a:p>
-        </p:txBody>
-      </p:sp>
-      <p:sp>
-        <p:nvSpPr>
-          <p:cNvPr id="15" name="TextBox 14"/>
-          <p:cNvSpPr txBox="1"/>
-          <p:nvPr/>
-        </p:nvSpPr>
-        <p:spPr>
-          <a:xfrm>
-            <a:off x="594360" y="3611880"/>
-            <a:ext cx="9144000" cy="365760"/>
+              <a:rPr sz="1600" b="0" i="0">
+                <a:solidFill>
+                  <a:srgbClr val="CCCCCC"/>
+                </a:solidFill>
+              </a:rPr>
+              <a:t>▸   Varied lighting and shooting angles</a:t>
+            </a:r>
+          </a:p>
+        </p:txBody>
+      </p:sp>
+      <p:sp>
+        <p:nvSpPr>
+          <p:cNvPr id="16" name="TextBox 15"/>
+          <p:cNvSpPr txBox="1"/>
+          <p:nvPr/>
+        </p:nvSpPr>
+        <p:spPr>
+          <a:xfrm>
+            <a:off x="594360" y="4078224"/>
+            <a:ext cx="10058400" cy="384048"/>
           </a:xfrm>
           <a:prstGeom prst="rect">
             <a:avLst/>
@@ -5186,32 +5331,32 @@
           <a:p>
             <a:pPr algn="l"/>
             <a:r>
-              <a:rPr sz="1500" b="0" i="0">
-                <a:solidFill>
-                  <a:srgbClr val="CCCCFF"/>
-                </a:solidFill>
-              </a:rPr>
-              <a:t>  ▸  Training from scratch = not enough data</a:t>
-            </a:r>
-          </a:p>
-        </p:txBody>
-      </p:sp>
-      <p:sp>
-        <p:nvSpPr>
-          <p:cNvPr id="16" name="Rectangle 15"/>
+              <a:rPr sz="1600" b="0" i="0">
+                <a:solidFill>
+                  <a:srgbClr val="CCCCCC"/>
+                </a:solidFill>
+              </a:rPr>
+              <a:t>▸   Training from scratch needs huge data</a:t>
+            </a:r>
+          </a:p>
+        </p:txBody>
+      </p:sp>
+      <p:sp>
+        <p:nvSpPr>
+          <p:cNvPr id="17" name="Rectangle 16"/>
           <p:cNvSpPr/>
           <p:nvPr/>
         </p:nvSpPr>
         <p:spPr>
           <a:xfrm>
-            <a:off x="6217920" y="1554480"/>
-            <a:ext cx="5394960" cy="3474720"/>
+            <a:off x="6309360" y="1554480"/>
+            <a:ext cx="5394960" cy="3749039"/>
           </a:xfrm>
           <a:prstGeom prst="rect">
             <a:avLst/>
           </a:prstGeom>
           <a:solidFill>
-            <a:srgbClr val="1A1A3E"/>
+            <a:srgbClr val="222222"/>
           </a:solidFill>
           <a:ln>
             <a:noFill/>
@@ -5241,20 +5386,20 @@
       </p:sp>
       <p:sp>
         <p:nvSpPr>
-          <p:cNvPr id="17" name="Rectangle 16"/>
+          <p:cNvPr id="18" name="Rectangle 17"/>
           <p:cNvSpPr/>
           <p:nvPr/>
         </p:nvSpPr>
         <p:spPr>
           <a:xfrm>
-            <a:off x="6217920" y="1554480"/>
-            <a:ext cx="73152" cy="3474720"/>
+            <a:off x="6309360" y="1554480"/>
+            <a:ext cx="54864" cy="3749039"/>
           </a:xfrm>
           <a:prstGeom prst="rect">
             <a:avLst/>
           </a:prstGeom>
           <a:solidFill>
-            <a:srgbClr val="2ECC71"/>
+            <a:srgbClr val="27AE60"/>
           </a:solidFill>
           <a:ln>
             <a:noFill/>
@@ -5284,14 +5429,14 @@
       </p:sp>
       <p:sp>
         <p:nvSpPr>
-          <p:cNvPr id="18" name="TextBox 17"/>
-          <p:cNvSpPr txBox="1"/>
-          <p:nvPr/>
-        </p:nvSpPr>
-        <p:spPr>
-          <a:xfrm>
-            <a:off x="6446520" y="1645920"/>
-            <a:ext cx="4937760" cy="457200"/>
+          <p:cNvPr id="19" name="TextBox 18"/>
+          <p:cNvSpPr txBox="1"/>
+          <p:nvPr/>
+        </p:nvSpPr>
+        <p:spPr>
+          <a:xfrm>
+            <a:off x="6510528" y="1627632"/>
+            <a:ext cx="4937760" cy="475488"/>
           </a:xfrm>
           <a:prstGeom prst="rect">
             <a:avLst/>
@@ -5306,26 +5451,26 @@
           <a:p>
             <a:pPr algn="l"/>
             <a:r>
-              <a:rPr sz="1800" b="1" i="0">
-                <a:solidFill>
-                  <a:srgbClr val="2ECC71"/>
-                </a:solidFill>
-              </a:rPr>
-              <a:t>✅  Solution</a:t>
-            </a:r>
-          </a:p>
-        </p:txBody>
-      </p:sp>
-      <p:sp>
-        <p:nvSpPr>
-          <p:cNvPr id="19" name="TextBox 18"/>
-          <p:cNvSpPr txBox="1"/>
-          <p:nvPr/>
-        </p:nvSpPr>
-        <p:spPr>
-          <a:xfrm>
-            <a:off x="6355080" y="2148840"/>
-            <a:ext cx="9144000" cy="365760"/>
+              <a:rPr sz="2000" b="1" i="0">
+                <a:solidFill>
+                  <a:srgbClr val="27AE60"/>
+                </a:solidFill>
+              </a:rPr>
+              <a:t>Solution</a:t>
+            </a:r>
+          </a:p>
+        </p:txBody>
+      </p:sp>
+      <p:sp>
+        <p:nvSpPr>
+          <p:cNvPr id="20" name="TextBox 19"/>
+          <p:cNvSpPr txBox="1"/>
+          <p:nvPr/>
+        </p:nvSpPr>
+        <p:spPr>
+          <a:xfrm>
+            <a:off x="6446520" y="2176272"/>
+            <a:ext cx="10058400" cy="384048"/>
           </a:xfrm>
           <a:prstGeom prst="rect">
             <a:avLst/>
@@ -5340,26 +5485,26 @@
           <a:p>
             <a:pPr algn="l"/>
             <a:r>
-              <a:rPr sz="1500" b="0" i="0">
-                <a:solidFill>
-                  <a:srgbClr val="CCCCFF"/>
-                </a:solidFill>
-              </a:rPr>
-              <a:t>  ▸  Transfer learning from ImageNet</a:t>
-            </a:r>
-          </a:p>
-        </p:txBody>
-      </p:sp>
-      <p:sp>
-        <p:nvSpPr>
-          <p:cNvPr id="20" name="TextBox 19"/>
-          <p:cNvSpPr txBox="1"/>
-          <p:nvPr/>
-        </p:nvSpPr>
-        <p:spPr>
-          <a:xfrm>
-            <a:off x="6355080" y="2514600"/>
-            <a:ext cx="9144000" cy="365760"/>
+              <a:rPr sz="1600" b="0" i="0">
+                <a:solidFill>
+                  <a:srgbClr val="CCCCCC"/>
+                </a:solidFill>
+              </a:rPr>
+              <a:t>▸   Transfer learning from ImageNet</a:t>
+            </a:r>
+          </a:p>
+        </p:txBody>
+      </p:sp>
+      <p:sp>
+        <p:nvSpPr>
+          <p:cNvPr id="21" name="TextBox 20"/>
+          <p:cNvSpPr txBox="1"/>
+          <p:nvPr/>
+        </p:nvSpPr>
+        <p:spPr>
+          <a:xfrm>
+            <a:off x="6446520" y="2651760"/>
+            <a:ext cx="10058400" cy="384048"/>
           </a:xfrm>
           <a:prstGeom prst="rect">
             <a:avLst/>
@@ -5374,26 +5519,26 @@
           <a:p>
             <a:pPr algn="l"/>
             <a:r>
-              <a:rPr sz="1500" b="0" i="0">
-                <a:solidFill>
-                  <a:srgbClr val="CCCCFF"/>
-                </a:solidFill>
-              </a:rPr>
-              <a:t>  ▸  EfficientNet-B0 as feature extractor</a:t>
-            </a:r>
-          </a:p>
-        </p:txBody>
-      </p:sp>
-      <p:sp>
-        <p:nvSpPr>
-          <p:cNvPr id="21" name="TextBox 20"/>
-          <p:cNvSpPr txBox="1"/>
-          <p:nvPr/>
-        </p:nvSpPr>
-        <p:spPr>
-          <a:xfrm>
-            <a:off x="6355080" y="2880360"/>
-            <a:ext cx="9144000" cy="365760"/>
+              <a:rPr sz="1600" b="0" i="0">
+                <a:solidFill>
+                  <a:srgbClr val="CCCCCC"/>
+                </a:solidFill>
+              </a:rPr>
+              <a:t>▸   EfficientNet-B0 as feature extractor</a:t>
+            </a:r>
+          </a:p>
+        </p:txBody>
+      </p:sp>
+      <p:sp>
+        <p:nvSpPr>
+          <p:cNvPr id="22" name="TextBox 21"/>
+          <p:cNvSpPr txBox="1"/>
+          <p:nvPr/>
+        </p:nvSpPr>
+        <p:spPr>
+          <a:xfrm>
+            <a:off x="6446520" y="3127248"/>
+            <a:ext cx="10058400" cy="384048"/>
           </a:xfrm>
           <a:prstGeom prst="rect">
             <a:avLst/>
@@ -5408,26 +5553,26 @@
           <a:p>
             <a:pPr algn="l"/>
             <a:r>
-              <a:rPr sz="1500" b="0" i="0">
-                <a:solidFill>
-                  <a:srgbClr val="CCCCFF"/>
-                </a:solidFill>
-              </a:rPr>
-              <a:t>  ▸  Data augmentation (flip, rotate, jitter)</a:t>
-            </a:r>
-          </a:p>
-        </p:txBody>
-      </p:sp>
-      <p:sp>
-        <p:nvSpPr>
-          <p:cNvPr id="22" name="TextBox 21"/>
-          <p:cNvSpPr txBox="1"/>
-          <p:nvPr/>
-        </p:nvSpPr>
-        <p:spPr>
-          <a:xfrm>
-            <a:off x="6355080" y="3246120"/>
-            <a:ext cx="9144000" cy="365760"/>
+              <a:rPr sz="1600" b="0" i="0">
+                <a:solidFill>
+                  <a:srgbClr val="CCCCCC"/>
+                </a:solidFill>
+              </a:rPr>
+              <a:t>▸   Data augmentation (flip, rotate, jitter)</a:t>
+            </a:r>
+          </a:p>
+        </p:txBody>
+      </p:sp>
+      <p:sp>
+        <p:nvSpPr>
+          <p:cNvPr id="23" name="TextBox 22"/>
+          <p:cNvSpPr txBox="1"/>
+          <p:nvPr/>
+        </p:nvSpPr>
+        <p:spPr>
+          <a:xfrm>
+            <a:off x="6446520" y="3602736"/>
+            <a:ext cx="10058400" cy="384048"/>
           </a:xfrm>
           <a:prstGeom prst="rect">
             <a:avLst/>
@@ -5442,26 +5587,26 @@
           <a:p>
             <a:pPr algn="l"/>
             <a:r>
-              <a:rPr sz="1500" b="0" i="0">
-                <a:solidFill>
-                  <a:srgbClr val="CCCCFF"/>
-                </a:solidFill>
-              </a:rPr>
-              <a:t>  ▸  2-phase training (freeze → unfreeze)</a:t>
-            </a:r>
-          </a:p>
-        </p:txBody>
-      </p:sp>
-      <p:sp>
-        <p:nvSpPr>
-          <p:cNvPr id="23" name="TextBox 22"/>
-          <p:cNvSpPr txBox="1"/>
-          <p:nvPr/>
-        </p:nvSpPr>
-        <p:spPr>
-          <a:xfrm>
-            <a:off x="6355080" y="3611880"/>
-            <a:ext cx="9144000" cy="365760"/>
+              <a:rPr sz="1600" b="0" i="0">
+                <a:solidFill>
+                  <a:srgbClr val="CCCCCC"/>
+                </a:solidFill>
+              </a:rPr>
+              <a:t>▸   2-phase training  (freeze → unfreeze)</a:t>
+            </a:r>
+          </a:p>
+        </p:txBody>
+      </p:sp>
+      <p:sp>
+        <p:nvSpPr>
+          <p:cNvPr id="24" name="TextBox 23"/>
+          <p:cNvSpPr txBox="1"/>
+          <p:nvPr/>
+        </p:nvSpPr>
+        <p:spPr>
+          <a:xfrm>
+            <a:off x="6446520" y="4078224"/>
+            <a:ext cx="10058400" cy="384048"/>
           </a:xfrm>
           <a:prstGeom prst="rect">
             <a:avLst/>
@@ -5476,46 +5621,89 @@
           <a:p>
             <a:pPr algn="l"/>
             <a:r>
-              <a:rPr sz="1500" b="0" i="0">
-                <a:solidFill>
-                  <a:srgbClr val="CCCCFF"/>
-                </a:solidFill>
-              </a:rPr>
-              <a:t>  ▸  Good accuracy with small dataset</a:t>
-            </a:r>
-          </a:p>
-        </p:txBody>
-      </p:sp>
-      <p:sp>
-        <p:nvSpPr>
-          <p:cNvPr id="24" name="TextBox 23"/>
-          <p:cNvSpPr txBox="1"/>
-          <p:nvPr/>
-        </p:nvSpPr>
-        <p:spPr>
-          <a:xfrm>
-            <a:off x="457200" y="5394960"/>
-            <a:ext cx="11247120" cy="548640"/>
-          </a:xfrm>
-          <a:prstGeom prst="rect">
-            <a:avLst/>
-          </a:prstGeom>
-          <a:noFill/>
-        </p:spPr>
-        <p:txBody>
-          <a:bodyPr wrap="none">
-            <a:spAutoFit/>
-          </a:bodyPr>
-          <a:lstStyle/>
-          <a:p>
-            <a:pPr algn="ctr"/>
-            <a:r>
-              <a:rPr sz="1500" b="0" i="1">
-                <a:solidFill>
-                  <a:srgbClr val="F0C040"/>
-                </a:solidFill>
-              </a:rPr>
-              <a:t>Key Insight: Borrow knowledge from 1.2M ImageNet images → apply to 78 tarot cards</a:t>
+              <a:rPr sz="1600" b="0" i="0">
+                <a:solidFill>
+                  <a:srgbClr val="CCCCCC"/>
+                </a:solidFill>
+              </a:rPr>
+              <a:t>▸   Good accuracy with small dataset</a:t>
+            </a:r>
+          </a:p>
+        </p:txBody>
+      </p:sp>
+      <p:sp>
+        <p:nvSpPr>
+          <p:cNvPr id="25" name="Rectangle 24"/>
+          <p:cNvSpPr/>
+          <p:nvPr/>
+        </p:nvSpPr>
+        <p:spPr>
+          <a:xfrm>
+            <a:off x="457200" y="5532120"/>
+            <a:ext cx="11274552" cy="502920"/>
+          </a:xfrm>
+          <a:prstGeom prst="rect">
+            <a:avLst/>
+          </a:prstGeom>
+          <a:solidFill>
+            <a:srgbClr val="1E1E1E"/>
+          </a:solidFill>
+          <a:ln>
+            <a:noFill/>
+          </a:ln>
+        </p:spPr>
+        <p:style>
+          <a:lnRef idx="1">
+            <a:schemeClr val="accent1"/>
+          </a:lnRef>
+          <a:fillRef idx="3">
+            <a:schemeClr val="accent1"/>
+          </a:fillRef>
+          <a:effectRef idx="2">
+            <a:schemeClr val="accent1"/>
+          </a:effectRef>
+          <a:fontRef idx="minor">
+            <a:schemeClr val="lt1"/>
+          </a:fontRef>
+        </p:style>
+        <p:txBody>
+          <a:bodyPr rtlCol="0" anchor="ctr"/>
+          <a:lstStyle/>
+          <a:p>
+            <a:pPr algn="ctr"/>
+          </a:p>
+        </p:txBody>
+      </p:sp>
+      <p:sp>
+        <p:nvSpPr>
+          <p:cNvPr id="26" name="TextBox 25"/>
+          <p:cNvSpPr txBox="1"/>
+          <p:nvPr/>
+        </p:nvSpPr>
+        <p:spPr>
+          <a:xfrm>
+            <a:off x="548640" y="5577840"/>
+            <a:ext cx="11064240" cy="411480"/>
+          </a:xfrm>
+          <a:prstGeom prst="rect">
+            <a:avLst/>
+          </a:prstGeom>
+          <a:noFill/>
+        </p:spPr>
+        <p:txBody>
+          <a:bodyPr wrap="none">
+            <a:spAutoFit/>
+          </a:bodyPr>
+          <a:lstStyle/>
+          <a:p>
+            <a:pPr algn="ctr"/>
+            <a:r>
+              <a:rPr sz="1600" b="0" i="1">
+                <a:solidFill>
+                  <a:srgbClr val="D4A017"/>
+                </a:solidFill>
+              </a:rPr>
+              <a:t>Key Insight:  Borrow knowledge from 1.2M ImageNet images  →  apply to 78 tarot cards</a:t>
             </a:r>
           </a:p>
         </p:txBody>
@@ -5534,7 +5722,7 @@
     <p:bg>
       <p:bgPr>
         <a:solidFill>
-          <a:srgbClr val="0D0D2B"/>
+          <a:srgbClr val="141414"/>
         </a:solidFill>
         <a:effectLst/>
       </p:bgPr>
@@ -5555,13 +5743,13 @@
         <p:spPr>
           <a:xfrm>
             <a:off x="0" y="0"/>
-            <a:ext cx="12188952" cy="109728"/>
+            <a:ext cx="12188952" cy="91440"/>
           </a:xfrm>
           <a:prstGeom prst="rect">
             <a:avLst/>
           </a:prstGeom>
           <a:solidFill>
-            <a:srgbClr val="F0C040"/>
+            <a:srgbClr val="D4A017"/>
           </a:solidFill>
           <a:ln>
             <a:noFill/>
@@ -5597,14 +5785,14 @@
         </p:nvSpPr>
         <p:spPr>
           <a:xfrm>
-            <a:off x="0" y="6748272"/>
-            <a:ext cx="12188952" cy="109728"/>
+            <a:off x="0" y="6766560"/>
+            <a:ext cx="12188952" cy="91440"/>
           </a:xfrm>
           <a:prstGeom prst="rect">
             <a:avLst/>
           </a:prstGeom>
           <a:solidFill>
-            <a:srgbClr val="9B59B6"/>
+            <a:srgbClr val="1ABC9C"/>
           </a:solidFill>
           <a:ln>
             <a:noFill/>
@@ -5634,20 +5822,54 @@
       </p:sp>
       <p:sp>
         <p:nvSpPr>
-          <p:cNvPr id="4" name="Rectangle 3"/>
+          <p:cNvPr id="4" name="TextBox 3"/>
+          <p:cNvSpPr txBox="1"/>
+          <p:nvPr/>
+        </p:nvSpPr>
+        <p:spPr>
+          <a:xfrm>
+            <a:off x="0" y="6766560"/>
+            <a:ext cx="12188952" cy="91440"/>
+          </a:xfrm>
+          <a:prstGeom prst="rect">
+            <a:avLst/>
+          </a:prstGeom>
+          <a:noFill/>
+        </p:spPr>
+        <p:txBody>
+          <a:bodyPr wrap="none">
+            <a:spAutoFit/>
+          </a:bodyPr>
+          <a:lstStyle/>
+          <a:p>
+            <a:pPr algn="ctr"/>
+            <a:r>
+              <a:rPr sz="900" b="0" i="0">
+                <a:solidFill>
+                  <a:srgbClr val="888888"/>
+                </a:solidFill>
+              </a:rPr>
+              <a:t>Fortune Teller  ·  AI Tarot Card Recognition  ·  2026</a:t>
+            </a:r>
+          </a:p>
+        </p:txBody>
+      </p:sp>
+      <p:sp>
+        <p:nvSpPr>
+          <p:cNvPr id="5" name="Rectangle 4"/>
           <p:cNvSpPr/>
           <p:nvPr/>
         </p:nvSpPr>
         <p:spPr>
           <a:xfrm>
-            <a:off x="457200" y="228600"/>
-            <a:ext cx="1645920" cy="292608"/>
+            <a:off x="457200" y="201168"/>
+            <a:ext cx="2167128" cy="301752"/>
           </a:xfrm>
           <a:prstGeom prst="rect">
             <a:avLst/>
           </a:prstGeom>
           <a:solidFill>
-            <a:srgbClr val="9B59B6"/>
+            <a:srgbClr val="1ABC9C"/>
           </a:solidFill>
           <a:ln>
             <a:noFill/>
@@ -5677,67 +5899,67 @@
       </p:sp>
       <p:sp>
         <p:nvSpPr>
-          <p:cNvPr id="5" name="TextBox 4"/>
-          <p:cNvSpPr txBox="1"/>
-          <p:nvPr/>
-        </p:nvSpPr>
-        <p:spPr>
-          <a:xfrm>
-            <a:off x="502920" y="246888"/>
-            <a:ext cx="1554480" cy="274320"/>
-          </a:xfrm>
-          <a:prstGeom prst="rect">
-            <a:avLst/>
-          </a:prstGeom>
-          <a:noFill/>
-        </p:spPr>
-        <p:txBody>
-          <a:bodyPr wrap="none">
-            <a:spAutoFit/>
-          </a:bodyPr>
-          <a:lstStyle/>
-          <a:p>
-            <a:pPr algn="ctr"/>
-            <a:r>
-              <a:rPr sz="1000" b="1" i="0">
+          <p:cNvPr id="6" name="TextBox 5"/>
+          <p:cNvSpPr txBox="1"/>
+          <p:nvPr/>
+        </p:nvSpPr>
+        <p:spPr>
+          <a:xfrm>
+            <a:off x="530352" y="237744"/>
+            <a:ext cx="2029968" cy="256032"/>
+          </a:xfrm>
+          <a:prstGeom prst="rect">
+            <a:avLst/>
+          </a:prstGeom>
+          <a:noFill/>
+        </p:spPr>
+        <p:txBody>
+          <a:bodyPr wrap="none">
+            <a:spAutoFit/>
+          </a:bodyPr>
+          <a:lstStyle/>
+          <a:p>
+            <a:pPr algn="l"/>
+            <a:r>
+              <a:rPr sz="1100" b="1" i="0">
+                <a:solidFill>
+                  <a:srgbClr val="141414"/>
+                </a:solidFill>
+              </a:rPr>
+              <a:t>MODEL ARCHITECTURE</a:t>
+            </a:r>
+          </a:p>
+        </p:txBody>
+      </p:sp>
+      <p:sp>
+        <p:nvSpPr>
+          <p:cNvPr id="7" name="TextBox 6"/>
+          <p:cNvSpPr txBox="1"/>
+          <p:nvPr/>
+        </p:nvSpPr>
+        <p:spPr>
+          <a:xfrm>
+            <a:off x="457200" y="594360"/>
+            <a:ext cx="10972800" cy="685800"/>
+          </a:xfrm>
+          <a:prstGeom prst="rect">
+            <a:avLst/>
+          </a:prstGeom>
+          <a:noFill/>
+        </p:spPr>
+        <p:txBody>
+          <a:bodyPr wrap="none">
+            <a:spAutoFit/>
+          </a:bodyPr>
+          <a:lstStyle/>
+          <a:p>
+            <a:pPr algn="l"/>
+            <a:r>
+              <a:rPr sz="3400" b="1" i="0">
                 <a:solidFill>
                   <a:srgbClr val="FFFFFF"/>
                 </a:solidFill>
               </a:rPr>
-              <a:t>ARCHITECTURE</a:t>
-            </a:r>
-          </a:p>
-        </p:txBody>
-      </p:sp>
-      <p:sp>
-        <p:nvSpPr>
-          <p:cNvPr id="6" name="TextBox 5"/>
-          <p:cNvSpPr txBox="1"/>
-          <p:nvPr/>
-        </p:nvSpPr>
-        <p:spPr>
-          <a:xfrm>
-            <a:off x="457200" y="640080"/>
-            <a:ext cx="9144000" cy="640080"/>
-          </a:xfrm>
-          <a:prstGeom prst="rect">
-            <a:avLst/>
-          </a:prstGeom>
-          <a:noFill/>
-        </p:spPr>
-        <p:txBody>
-          <a:bodyPr wrap="none">
-            <a:spAutoFit/>
-          </a:bodyPr>
-          <a:lstStyle/>
-          <a:p>
-            <a:pPr algn="l"/>
-            <a:r>
-              <a:rPr sz="3200" b="1" i="0">
-                <a:solidFill>
-                  <a:srgbClr val="F0C040"/>
-                </a:solidFill>
-              </a:rPr>
               <a:t>Model Architecture</a:t>
             </a:r>
           </a:p>
@@ -5745,20 +5967,20 @@
       </p:sp>
       <p:sp>
         <p:nvSpPr>
-          <p:cNvPr id="7" name="Rectangle 6"/>
+          <p:cNvPr id="8" name="Rectangle 7"/>
           <p:cNvSpPr/>
           <p:nvPr/>
         </p:nvSpPr>
         <p:spPr>
           <a:xfrm>
-            <a:off x="457200" y="1371600"/>
+            <a:off x="457200" y="1389888"/>
             <a:ext cx="11274552" cy="36576"/>
           </a:xfrm>
           <a:prstGeom prst="rect">
             <a:avLst/>
           </a:prstGeom>
           <a:solidFill>
-            <a:srgbClr val="9B59B6"/>
+            <a:srgbClr val="1ABC9C"/>
           </a:solidFill>
           <a:ln>
             <a:noFill/>
@@ -5788,20 +6010,20 @@
       </p:sp>
       <p:sp>
         <p:nvSpPr>
-          <p:cNvPr id="8" name="Rectangle 7"/>
+          <p:cNvPr id="9" name="Rectangle 8"/>
           <p:cNvSpPr/>
           <p:nvPr/>
         </p:nvSpPr>
         <p:spPr>
           <a:xfrm>
-            <a:off x="365760" y="1828800"/>
-            <a:ext cx="1737360" cy="1463040"/>
+            <a:off x="320040" y="1737360"/>
+            <a:ext cx="2011680" cy="1554480"/>
           </a:xfrm>
           <a:prstGeom prst="rect">
             <a:avLst/>
           </a:prstGeom>
           <a:solidFill>
-            <a:srgbClr val="9B59B6"/>
+            <a:srgbClr val="1ABC9C"/>
           </a:solidFill>
           <a:ln>
             <a:noFill/>
@@ -5831,29 +6053,29 @@
       </p:sp>
       <p:sp>
         <p:nvSpPr>
-          <p:cNvPr id="9" name="TextBox 8"/>
-          <p:cNvSpPr txBox="1"/>
-          <p:nvPr/>
-        </p:nvSpPr>
-        <p:spPr>
-          <a:xfrm>
-            <a:off x="365760" y="1920240"/>
-            <a:ext cx="1737360" cy="1280160"/>
-          </a:xfrm>
-          <a:prstGeom prst="rect">
-            <a:avLst/>
-          </a:prstGeom>
-          <a:noFill/>
-        </p:spPr>
-        <p:txBody>
-          <a:bodyPr wrap="none">
-            <a:spAutoFit/>
-          </a:bodyPr>
-          <a:lstStyle/>
-          <a:p>
-            <a:pPr algn="ctr"/>
-            <a:r>
-              <a:rPr sz="1200" b="1" i="0">
+          <p:cNvPr id="10" name="TextBox 9"/>
+          <p:cNvSpPr txBox="1"/>
+          <p:nvPr/>
+        </p:nvSpPr>
+        <p:spPr>
+          <a:xfrm>
+            <a:off x="365759" y="2057400"/>
+            <a:ext cx="1920240" cy="1188719"/>
+          </a:xfrm>
+          <a:prstGeom prst="rect">
+            <a:avLst/>
+          </a:prstGeom>
+          <a:noFill/>
+        </p:spPr>
+        <p:txBody>
+          <a:bodyPr wrap="none">
+            <a:spAutoFit/>
+          </a:bodyPr>
+          <a:lstStyle/>
+          <a:p>
+            <a:pPr algn="ctr"/>
+            <a:r>
+              <a:rPr sz="1400" b="1" i="0">
                 <a:solidFill>
                   <a:srgbClr val="FFFFFF"/>
                 </a:solidFill>
@@ -5866,31 +6088,31 @@
       </p:sp>
       <p:sp>
         <p:nvSpPr>
-          <p:cNvPr id="10" name="TextBox 9"/>
-          <p:cNvSpPr txBox="1"/>
-          <p:nvPr/>
-        </p:nvSpPr>
-        <p:spPr>
-          <a:xfrm>
-            <a:off x="2103120" y="2331720"/>
-            <a:ext cx="365760" cy="548640"/>
-          </a:xfrm>
-          <a:prstGeom prst="rect">
-            <a:avLst/>
-          </a:prstGeom>
-          <a:noFill/>
-        </p:spPr>
-        <p:txBody>
-          <a:bodyPr wrap="none">
-            <a:spAutoFit/>
-          </a:bodyPr>
-          <a:lstStyle/>
-          <a:p>
-            <a:pPr algn="ctr"/>
-            <a:r>
-              <a:rPr sz="2000" b="1" i="0">
-                <a:solidFill>
-                  <a:srgbClr val="F0C040"/>
+          <p:cNvPr id="11" name="TextBox 10"/>
+          <p:cNvSpPr txBox="1"/>
+          <p:nvPr/>
+        </p:nvSpPr>
+        <p:spPr>
+          <a:xfrm>
+            <a:off x="2331720" y="2240280"/>
+            <a:ext cx="411480" cy="548640"/>
+          </a:xfrm>
+          <a:prstGeom prst="rect">
+            <a:avLst/>
+          </a:prstGeom>
+          <a:noFill/>
+        </p:spPr>
+        <p:txBody>
+          <a:bodyPr wrap="none">
+            <a:spAutoFit/>
+          </a:bodyPr>
+          <a:lstStyle/>
+          <a:p>
+            <a:pPr algn="ctr"/>
+            <a:r>
+              <a:rPr sz="2200" b="1" i="0">
+                <a:solidFill>
+                  <a:srgbClr val="D4A017"/>
                 </a:solidFill>
               </a:rPr>
               <a:t>→</a:t>
@@ -5900,20 +6122,20 @@
       </p:sp>
       <p:sp>
         <p:nvSpPr>
-          <p:cNvPr id="11" name="Rectangle 10"/>
+          <p:cNvPr id="12" name="Rectangle 11"/>
           <p:cNvSpPr/>
           <p:nvPr/>
         </p:nvSpPr>
         <p:spPr>
           <a:xfrm>
-            <a:off x="2468879" y="1828800"/>
-            <a:ext cx="1737360" cy="1463040"/>
+            <a:off x="2743200" y="1737360"/>
+            <a:ext cx="2011680" cy="1554480"/>
           </a:xfrm>
           <a:prstGeom prst="rect">
             <a:avLst/>
           </a:prstGeom>
           <a:solidFill>
-            <a:srgbClr val="2C3E7A"/>
+            <a:srgbClr val="2C506E"/>
           </a:solidFill>
           <a:ln>
             <a:noFill/>
@@ -5943,67 +6165,66 @@
       </p:sp>
       <p:sp>
         <p:nvSpPr>
-          <p:cNvPr id="12" name="TextBox 11"/>
-          <p:cNvSpPr txBox="1"/>
-          <p:nvPr/>
-        </p:nvSpPr>
-        <p:spPr>
-          <a:xfrm>
-            <a:off x="2468879" y="1920240"/>
-            <a:ext cx="1737360" cy="1280160"/>
-          </a:xfrm>
-          <a:prstGeom prst="rect">
-            <a:avLst/>
-          </a:prstGeom>
-          <a:noFill/>
-        </p:spPr>
-        <p:txBody>
-          <a:bodyPr wrap="none">
-            <a:spAutoFit/>
-          </a:bodyPr>
-          <a:lstStyle/>
-          <a:p>
-            <a:pPr algn="ctr"/>
-            <a:r>
-              <a:rPr sz="1200" b="1" i="0">
+          <p:cNvPr id="13" name="TextBox 12"/>
+          <p:cNvSpPr txBox="1"/>
+          <p:nvPr/>
+        </p:nvSpPr>
+        <p:spPr>
+          <a:xfrm>
+            <a:off x="2788920" y="2057400"/>
+            <a:ext cx="1920240" cy="1188719"/>
+          </a:xfrm>
+          <a:prstGeom prst="rect">
+            <a:avLst/>
+          </a:prstGeom>
+          <a:noFill/>
+        </p:spPr>
+        <p:txBody>
+          <a:bodyPr wrap="none">
+            <a:spAutoFit/>
+          </a:bodyPr>
+          <a:lstStyle/>
+          <a:p>
+            <a:pPr algn="ctr"/>
+            <a:r>
+              <a:rPr sz="1400" b="1" i="0">
                 <a:solidFill>
                   <a:srgbClr val="FFFFFF"/>
                 </a:solidFill>
               </a:rPr>
               <a:t>EfficientNet-B0
-Backbone
-(frozen Phase 1)</a:t>
-            </a:r>
-          </a:p>
-        </p:txBody>
-      </p:sp>
-      <p:sp>
-        <p:nvSpPr>
-          <p:cNvPr id="13" name="TextBox 12"/>
-          <p:cNvSpPr txBox="1"/>
-          <p:nvPr/>
-        </p:nvSpPr>
-        <p:spPr>
-          <a:xfrm>
-            <a:off x="4206240" y="2331720"/>
-            <a:ext cx="365760" cy="548640"/>
-          </a:xfrm>
-          <a:prstGeom prst="rect">
-            <a:avLst/>
-          </a:prstGeom>
-          <a:noFill/>
-        </p:spPr>
-        <p:txBody>
-          <a:bodyPr wrap="none">
-            <a:spAutoFit/>
-          </a:bodyPr>
-          <a:lstStyle/>
-          <a:p>
-            <a:pPr algn="ctr"/>
-            <a:r>
-              <a:rPr sz="2000" b="1" i="0">
-                <a:solidFill>
-                  <a:srgbClr val="F0C040"/>
+Backbone</a:t>
+            </a:r>
+          </a:p>
+        </p:txBody>
+      </p:sp>
+      <p:sp>
+        <p:nvSpPr>
+          <p:cNvPr id="14" name="TextBox 13"/>
+          <p:cNvSpPr txBox="1"/>
+          <p:nvPr/>
+        </p:nvSpPr>
+        <p:spPr>
+          <a:xfrm>
+            <a:off x="4754880" y="2240280"/>
+            <a:ext cx="411480" cy="548640"/>
+          </a:xfrm>
+          <a:prstGeom prst="rect">
+            <a:avLst/>
+          </a:prstGeom>
+          <a:noFill/>
+        </p:spPr>
+        <p:txBody>
+          <a:bodyPr wrap="none">
+            <a:spAutoFit/>
+          </a:bodyPr>
+          <a:lstStyle/>
+          <a:p>
+            <a:pPr algn="ctr"/>
+            <a:r>
+              <a:rPr sz="2200" b="1" i="0">
+                <a:solidFill>
+                  <a:srgbClr val="D4A017"/>
                 </a:solidFill>
               </a:rPr>
               <a:t>→</a:t>
@@ -6013,20 +6234,20 @@
       </p:sp>
       <p:sp>
         <p:nvSpPr>
-          <p:cNvPr id="14" name="Rectangle 13"/>
+          <p:cNvPr id="15" name="Rectangle 14"/>
           <p:cNvSpPr/>
           <p:nvPr/>
         </p:nvSpPr>
         <p:spPr>
           <a:xfrm>
-            <a:off x="4572000" y="1828800"/>
-            <a:ext cx="1737360" cy="1463040"/>
+            <a:off x="5166360" y="1737360"/>
+            <a:ext cx="2011680" cy="1554480"/>
           </a:xfrm>
           <a:prstGeom prst="rect">
             <a:avLst/>
           </a:prstGeom>
           <a:solidFill>
-            <a:srgbClr val="2C3E7A"/>
+            <a:srgbClr val="2C506E"/>
           </a:solidFill>
           <a:ln>
             <a:noFill/>
@@ -6056,67 +6277,66 @@
       </p:sp>
       <p:sp>
         <p:nvSpPr>
-          <p:cNvPr id="15" name="TextBox 14"/>
-          <p:cNvSpPr txBox="1"/>
-          <p:nvPr/>
-        </p:nvSpPr>
-        <p:spPr>
-          <a:xfrm>
-            <a:off x="4572000" y="1920240"/>
-            <a:ext cx="1737360" cy="1280160"/>
-          </a:xfrm>
-          <a:prstGeom prst="rect">
-            <a:avLst/>
-          </a:prstGeom>
-          <a:noFill/>
-        </p:spPr>
-        <p:txBody>
-          <a:bodyPr wrap="none">
-            <a:spAutoFit/>
-          </a:bodyPr>
-          <a:lstStyle/>
-          <a:p>
-            <a:pPr algn="ctr"/>
-            <a:r>
-              <a:rPr sz="1200" b="1" i="0">
+          <p:cNvPr id="16" name="TextBox 15"/>
+          <p:cNvSpPr txBox="1"/>
+          <p:nvPr/>
+        </p:nvSpPr>
+        <p:spPr>
+          <a:xfrm>
+            <a:off x="5212080" y="2057400"/>
+            <a:ext cx="1920240" cy="1188719"/>
+          </a:xfrm>
+          <a:prstGeom prst="rect">
+            <a:avLst/>
+          </a:prstGeom>
+          <a:noFill/>
+        </p:spPr>
+        <p:txBody>
+          <a:bodyPr wrap="none">
+            <a:spAutoFit/>
+          </a:bodyPr>
+          <a:lstStyle/>
+          <a:p>
+            <a:pPr algn="ctr"/>
+            <a:r>
+              <a:rPr sz="1400" b="1" i="0">
                 <a:solidFill>
                   <a:srgbClr val="FFFFFF"/>
                 </a:solidFill>
               </a:rPr>
               <a:t>Global Avg
-Pooling
-1280 features</a:t>
-            </a:r>
-          </a:p>
-        </p:txBody>
-      </p:sp>
-      <p:sp>
-        <p:nvSpPr>
-          <p:cNvPr id="16" name="TextBox 15"/>
-          <p:cNvSpPr txBox="1"/>
-          <p:nvPr/>
-        </p:nvSpPr>
-        <p:spPr>
-          <a:xfrm>
-            <a:off x="6309360" y="2331720"/>
-            <a:ext cx="365760" cy="548640"/>
-          </a:xfrm>
-          <a:prstGeom prst="rect">
-            <a:avLst/>
-          </a:prstGeom>
-          <a:noFill/>
-        </p:spPr>
-        <p:txBody>
-          <a:bodyPr wrap="none">
-            <a:spAutoFit/>
-          </a:bodyPr>
-          <a:lstStyle/>
-          <a:p>
-            <a:pPr algn="ctr"/>
-            <a:r>
-              <a:rPr sz="2000" b="1" i="0">
-                <a:solidFill>
-                  <a:srgbClr val="F0C040"/>
+Pooling  1280</a:t>
+            </a:r>
+          </a:p>
+        </p:txBody>
+      </p:sp>
+      <p:sp>
+        <p:nvSpPr>
+          <p:cNvPr id="17" name="TextBox 16"/>
+          <p:cNvSpPr txBox="1"/>
+          <p:nvPr/>
+        </p:nvSpPr>
+        <p:spPr>
+          <a:xfrm>
+            <a:off x="7178040" y="2240280"/>
+            <a:ext cx="411480" cy="548640"/>
+          </a:xfrm>
+          <a:prstGeom prst="rect">
+            <a:avLst/>
+          </a:prstGeom>
+          <a:noFill/>
+        </p:spPr>
+        <p:txBody>
+          <a:bodyPr wrap="none">
+            <a:spAutoFit/>
+          </a:bodyPr>
+          <a:lstStyle/>
+          <a:p>
+            <a:pPr algn="ctr"/>
+            <a:r>
+              <a:rPr sz="2200" b="1" i="0">
+                <a:solidFill>
+                  <a:srgbClr val="D4A017"/>
                 </a:solidFill>
               </a:rPr>
               <a:t>→</a:t>
@@ -6126,20 +6346,20 @@
       </p:sp>
       <p:sp>
         <p:nvSpPr>
-          <p:cNvPr id="17" name="Rectangle 16"/>
+          <p:cNvPr id="18" name="Rectangle 17"/>
           <p:cNvSpPr/>
           <p:nvPr/>
         </p:nvSpPr>
         <p:spPr>
           <a:xfrm>
-            <a:off x="6675120" y="1828800"/>
-            <a:ext cx="1737360" cy="1463040"/>
+            <a:off x="7589520" y="1737360"/>
+            <a:ext cx="2011680" cy="1554480"/>
           </a:xfrm>
           <a:prstGeom prst="rect">
             <a:avLst/>
           </a:prstGeom>
           <a:solidFill>
-            <a:srgbClr val="6C358A"/>
+            <a:srgbClr val="1E5C4A"/>
           </a:solidFill>
           <a:ln>
             <a:noFill/>
@@ -6169,67 +6389,67 @@
       </p:sp>
       <p:sp>
         <p:nvSpPr>
-          <p:cNvPr id="18" name="TextBox 17"/>
-          <p:cNvSpPr txBox="1"/>
-          <p:nvPr/>
-        </p:nvSpPr>
-        <p:spPr>
-          <a:xfrm>
-            <a:off x="6675120" y="1920240"/>
-            <a:ext cx="1737360" cy="1280160"/>
-          </a:xfrm>
-          <a:prstGeom prst="rect">
-            <a:avLst/>
-          </a:prstGeom>
-          <a:noFill/>
-        </p:spPr>
-        <p:txBody>
-          <a:bodyPr wrap="none">
-            <a:spAutoFit/>
-          </a:bodyPr>
-          <a:lstStyle/>
-          <a:p>
-            <a:pPr algn="ctr"/>
-            <a:r>
-              <a:rPr sz="1200" b="1" i="0">
+          <p:cNvPr id="19" name="TextBox 18"/>
+          <p:cNvSpPr txBox="1"/>
+          <p:nvPr/>
+        </p:nvSpPr>
+        <p:spPr>
+          <a:xfrm>
+            <a:off x="7635240" y="2057400"/>
+            <a:ext cx="1920240" cy="1188719"/>
+          </a:xfrm>
+          <a:prstGeom prst="rect">
+            <a:avLst/>
+          </a:prstGeom>
+          <a:noFill/>
+        </p:spPr>
+        <p:txBody>
+          <a:bodyPr wrap="none">
+            <a:spAutoFit/>
+          </a:bodyPr>
+          <a:lstStyle/>
+          <a:p>
+            <a:pPr algn="ctr"/>
+            <a:r>
+              <a:rPr sz="1400" b="1" i="0">
                 <a:solidFill>
                   <a:srgbClr val="FFFFFF"/>
                 </a:solidFill>
               </a:rPr>
               <a:t>Dropout
-+Linear
-→512</a:t>
-            </a:r>
-          </a:p>
-        </p:txBody>
-      </p:sp>
-      <p:sp>
-        <p:nvSpPr>
-          <p:cNvPr id="19" name="TextBox 18"/>
-          <p:cNvSpPr txBox="1"/>
-          <p:nvPr/>
-        </p:nvSpPr>
-        <p:spPr>
-          <a:xfrm>
-            <a:off x="8412480" y="2331720"/>
-            <a:ext cx="365760" cy="548640"/>
-          </a:xfrm>
-          <a:prstGeom prst="rect">
-            <a:avLst/>
-          </a:prstGeom>
-          <a:noFill/>
-        </p:spPr>
-        <p:txBody>
-          <a:bodyPr wrap="none">
-            <a:spAutoFit/>
-          </a:bodyPr>
-          <a:lstStyle/>
-          <a:p>
-            <a:pPr algn="ctr"/>
-            <a:r>
-              <a:rPr sz="2000" b="1" i="0">
-                <a:solidFill>
-                  <a:srgbClr val="F0C040"/>
+Linear → 512
+ReLU</a:t>
+            </a:r>
+          </a:p>
+        </p:txBody>
+      </p:sp>
+      <p:sp>
+        <p:nvSpPr>
+          <p:cNvPr id="20" name="TextBox 19"/>
+          <p:cNvSpPr txBox="1"/>
+          <p:nvPr/>
+        </p:nvSpPr>
+        <p:spPr>
+          <a:xfrm>
+            <a:off x="9601200" y="2240280"/>
+            <a:ext cx="411480" cy="548640"/>
+          </a:xfrm>
+          <a:prstGeom prst="rect">
+            <a:avLst/>
+          </a:prstGeom>
+          <a:noFill/>
+        </p:spPr>
+        <p:txBody>
+          <a:bodyPr wrap="none">
+            <a:spAutoFit/>
+          </a:bodyPr>
+          <a:lstStyle/>
+          <a:p>
+            <a:pPr algn="ctr"/>
+            <a:r>
+              <a:rPr sz="2200" b="1" i="0">
+                <a:solidFill>
+                  <a:srgbClr val="D4A017"/>
                 </a:solidFill>
               </a:rPr>
               <a:t>→</a:t>
@@ -6239,20 +6459,20 @@
       </p:sp>
       <p:sp>
         <p:nvSpPr>
-          <p:cNvPr id="20" name="Rectangle 19"/>
+          <p:cNvPr id="21" name="Rectangle 20"/>
           <p:cNvSpPr/>
           <p:nvPr/>
         </p:nvSpPr>
         <p:spPr>
           <a:xfrm>
-            <a:off x="8778240" y="1828800"/>
-            <a:ext cx="1737360" cy="1463040"/>
+            <a:off x="10012680" y="1737360"/>
+            <a:ext cx="2011680" cy="1554480"/>
           </a:xfrm>
           <a:prstGeom prst="rect">
             <a:avLst/>
           </a:prstGeom>
           <a:solidFill>
-            <a:srgbClr val="6C358A"/>
+            <a:srgbClr val="D4A017"/>
           </a:solidFill>
           <a:ln>
             <a:noFill/>
@@ -6282,89 +6502,228 @@
       </p:sp>
       <p:sp>
         <p:nvSpPr>
-          <p:cNvPr id="21" name="TextBox 20"/>
-          <p:cNvSpPr txBox="1"/>
-          <p:nvPr/>
-        </p:nvSpPr>
-        <p:spPr>
-          <a:xfrm>
-            <a:off x="8778240" y="1920240"/>
-            <a:ext cx="1737360" cy="1280160"/>
-          </a:xfrm>
-          <a:prstGeom prst="rect">
-            <a:avLst/>
-          </a:prstGeom>
-          <a:noFill/>
-        </p:spPr>
-        <p:txBody>
-          <a:bodyPr wrap="none">
-            <a:spAutoFit/>
-          </a:bodyPr>
-          <a:lstStyle/>
-          <a:p>
-            <a:pPr algn="ctr"/>
-            <a:r>
-              <a:rPr sz="1200" b="1" i="0">
-                <a:solidFill>
-                  <a:srgbClr val="FFFFFF"/>
-                </a:solidFill>
-              </a:rPr>
-              <a:t>ReLU
-+Dropout</a:t>
-            </a:r>
-          </a:p>
-        </p:txBody>
-      </p:sp>
-      <p:sp>
-        <p:nvSpPr>
           <p:cNvPr id="22" name="TextBox 21"/>
           <p:cNvSpPr txBox="1"/>
           <p:nvPr/>
         </p:nvSpPr>
         <p:spPr>
           <a:xfrm>
-            <a:off x="10515600" y="2331720"/>
-            <a:ext cx="365760" cy="548640"/>
-          </a:xfrm>
-          <a:prstGeom prst="rect">
-            <a:avLst/>
-          </a:prstGeom>
-          <a:noFill/>
-        </p:spPr>
-        <p:txBody>
-          <a:bodyPr wrap="none">
-            <a:spAutoFit/>
-          </a:bodyPr>
-          <a:lstStyle/>
-          <a:p>
-            <a:pPr algn="ctr"/>
-            <a:r>
-              <a:rPr sz="2000" b="1" i="0">
-                <a:solidFill>
-                  <a:srgbClr val="F0C040"/>
-                </a:solidFill>
-              </a:rPr>
-              <a:t>→</a:t>
-            </a:r>
-          </a:p>
-        </p:txBody>
-      </p:sp>
-      <p:sp>
-        <p:nvSpPr>
-          <p:cNvPr id="23" name="Rectangle 22"/>
+            <a:off x="10058400" y="2057400"/>
+            <a:ext cx="1920240" cy="1188719"/>
+          </a:xfrm>
+          <a:prstGeom prst="rect">
+            <a:avLst/>
+          </a:prstGeom>
+          <a:noFill/>
+        </p:spPr>
+        <p:txBody>
+          <a:bodyPr wrap="none">
+            <a:spAutoFit/>
+          </a:bodyPr>
+          <a:lstStyle/>
+          <a:p>
+            <a:pPr algn="ctr"/>
+            <a:r>
+              <a:rPr sz="1400" b="1" i="0">
+                <a:solidFill>
+                  <a:srgbClr val="141414"/>
+                </a:solidFill>
+              </a:rPr>
+              <a:t>Dropout
+Linear → 78
+Softmax</a:t>
+            </a:r>
+          </a:p>
+        </p:txBody>
+      </p:sp>
+      <p:sp>
+        <p:nvSpPr>
+          <p:cNvPr id="23" name="TextBox 22"/>
+          <p:cNvSpPr txBox="1"/>
+          <p:nvPr/>
+        </p:nvSpPr>
+        <p:spPr>
+          <a:xfrm>
+            <a:off x="320040" y="3383279"/>
+            <a:ext cx="2011680" cy="502920"/>
+          </a:xfrm>
+          <a:prstGeom prst="rect">
+            <a:avLst/>
+          </a:prstGeom>
+          <a:noFill/>
+        </p:spPr>
+        <p:txBody>
+          <a:bodyPr wrap="none">
+            <a:spAutoFit/>
+          </a:bodyPr>
+          <a:lstStyle/>
+          <a:p>
+            <a:pPr algn="ctr"/>
+            <a:r>
+              <a:rPr sz="1100" b="0" i="1">
+                <a:solidFill>
+                  <a:srgbClr val="888888"/>
+                </a:solidFill>
+              </a:rPr>
+              <a:t>Image Input</a:t>
+            </a:r>
+          </a:p>
+        </p:txBody>
+      </p:sp>
+      <p:sp>
+        <p:nvSpPr>
+          <p:cNvPr id="24" name="TextBox 23"/>
+          <p:cNvSpPr txBox="1"/>
+          <p:nvPr/>
+        </p:nvSpPr>
+        <p:spPr>
+          <a:xfrm>
+            <a:off x="2743200" y="3383279"/>
+            <a:ext cx="2011680" cy="502920"/>
+          </a:xfrm>
+          <a:prstGeom prst="rect">
+            <a:avLst/>
+          </a:prstGeom>
+          <a:noFill/>
+        </p:spPr>
+        <p:txBody>
+          <a:bodyPr wrap="none">
+            <a:spAutoFit/>
+          </a:bodyPr>
+          <a:lstStyle/>
+          <a:p>
+            <a:pPr algn="ctr"/>
+            <a:r>
+              <a:rPr sz="1100" b="0" i="1">
+                <a:solidFill>
+                  <a:srgbClr val="888888"/>
+                </a:solidFill>
+              </a:rPr>
+              <a:t>Feature Extraction
+(ImageNet weights)</a:t>
+            </a:r>
+          </a:p>
+        </p:txBody>
+      </p:sp>
+      <p:sp>
+        <p:nvSpPr>
+          <p:cNvPr id="25" name="TextBox 24"/>
+          <p:cNvSpPr txBox="1"/>
+          <p:nvPr/>
+        </p:nvSpPr>
+        <p:spPr>
+          <a:xfrm>
+            <a:off x="5166360" y="3383279"/>
+            <a:ext cx="2011680" cy="502920"/>
+          </a:xfrm>
+          <a:prstGeom prst="rect">
+            <a:avLst/>
+          </a:prstGeom>
+          <a:noFill/>
+        </p:spPr>
+        <p:txBody>
+          <a:bodyPr wrap="none">
+            <a:spAutoFit/>
+          </a:bodyPr>
+          <a:lstStyle/>
+          <a:p>
+            <a:pPr algn="ctr"/>
+            <a:r>
+              <a:rPr sz="1100" b="0" i="1">
+                <a:solidFill>
+                  <a:srgbClr val="888888"/>
+                </a:solidFill>
+              </a:rPr>
+              <a:t>Feature Vector</a:t>
+            </a:r>
+          </a:p>
+        </p:txBody>
+      </p:sp>
+      <p:sp>
+        <p:nvSpPr>
+          <p:cNvPr id="26" name="TextBox 25"/>
+          <p:cNvSpPr txBox="1"/>
+          <p:nvPr/>
+        </p:nvSpPr>
+        <p:spPr>
+          <a:xfrm>
+            <a:off x="7589520" y="3383279"/>
+            <a:ext cx="2011680" cy="502920"/>
+          </a:xfrm>
+          <a:prstGeom prst="rect">
+            <a:avLst/>
+          </a:prstGeom>
+          <a:noFill/>
+        </p:spPr>
+        <p:txBody>
+          <a:bodyPr wrap="none">
+            <a:spAutoFit/>
+          </a:bodyPr>
+          <a:lstStyle/>
+          <a:p>
+            <a:pPr algn="ctr"/>
+            <a:r>
+              <a:rPr sz="1100" b="0" i="1">
+                <a:solidFill>
+                  <a:srgbClr val="888888"/>
+                </a:solidFill>
+              </a:rPr>
+              <a:t>Custom Head
+(Phase 1 frozen)</a:t>
+            </a:r>
+          </a:p>
+        </p:txBody>
+      </p:sp>
+      <p:sp>
+        <p:nvSpPr>
+          <p:cNvPr id="27" name="TextBox 26"/>
+          <p:cNvSpPr txBox="1"/>
+          <p:nvPr/>
+        </p:nvSpPr>
+        <p:spPr>
+          <a:xfrm>
+            <a:off x="10012680" y="3383279"/>
+            <a:ext cx="2011680" cy="502920"/>
+          </a:xfrm>
+          <a:prstGeom prst="rect">
+            <a:avLst/>
+          </a:prstGeom>
+          <a:noFill/>
+        </p:spPr>
+        <p:txBody>
+          <a:bodyPr wrap="none">
+            <a:spAutoFit/>
+          </a:bodyPr>
+          <a:lstStyle/>
+          <a:p>
+            <a:pPr algn="ctr"/>
+            <a:r>
+              <a:rPr sz="1100" b="0" i="1">
+                <a:solidFill>
+                  <a:srgbClr val="888888"/>
+                </a:solidFill>
+              </a:rPr>
+              <a:t>78-Class Output</a:t>
+            </a:r>
+          </a:p>
+        </p:txBody>
+      </p:sp>
+      <p:sp>
+        <p:nvSpPr>
+          <p:cNvPr id="28" name="Rectangle 27"/>
           <p:cNvSpPr/>
           <p:nvPr/>
         </p:nvSpPr>
         <p:spPr>
           <a:xfrm>
-            <a:off x="10881359" y="1828800"/>
-            <a:ext cx="1737360" cy="1463040"/>
+            <a:off x="457200" y="3977639"/>
+            <a:ext cx="3840480" cy="365760"/>
           </a:xfrm>
           <a:prstGeom prst="rect">
             <a:avLst/>
           </a:prstGeom>
           <a:solidFill>
-            <a:srgbClr val="F0C040"/>
+            <a:srgbClr val="1ABC9C"/>
           </a:solidFill>
           <a:ln>
             <a:noFill/>
@@ -6394,56 +6753,20 @@
       </p:sp>
       <p:sp>
         <p:nvSpPr>
-          <p:cNvPr id="24" name="TextBox 23"/>
-          <p:cNvSpPr txBox="1"/>
-          <p:nvPr/>
-        </p:nvSpPr>
-        <p:spPr>
-          <a:xfrm>
-            <a:off x="10881359" y="1920240"/>
-            <a:ext cx="1737360" cy="1280160"/>
-          </a:xfrm>
-          <a:prstGeom prst="rect">
-            <a:avLst/>
-          </a:prstGeom>
-          <a:noFill/>
-        </p:spPr>
-        <p:txBody>
-          <a:bodyPr wrap="none">
-            <a:spAutoFit/>
-          </a:bodyPr>
-          <a:lstStyle/>
-          <a:p>
-            <a:pPr algn="ctr"/>
-            <a:r>
-              <a:rPr sz="1200" b="1" i="0">
-                <a:solidFill>
-                  <a:srgbClr val="0D0D2B"/>
-                </a:solidFill>
-              </a:rPr>
-              <a:t>Linear
-→78
-(Softmax)</a:t>
-            </a:r>
-          </a:p>
-        </p:txBody>
-      </p:sp>
-      <p:sp>
-        <p:nvSpPr>
-          <p:cNvPr id="25" name="Rectangle 24"/>
+          <p:cNvPr id="29" name="Rectangle 28"/>
           <p:cNvSpPr/>
           <p:nvPr/>
         </p:nvSpPr>
         <p:spPr>
           <a:xfrm>
-            <a:off x="457200" y="3749039"/>
-            <a:ext cx="3200400" cy="347472"/>
+            <a:off x="4572000" y="3977639"/>
+            <a:ext cx="6858000" cy="365760"/>
           </a:xfrm>
           <a:prstGeom prst="rect">
             <a:avLst/>
           </a:prstGeom>
           <a:solidFill>
-            <a:srgbClr val="9B59B6"/>
+            <a:srgbClr val="1ABC9C"/>
           </a:solidFill>
           <a:ln>
             <a:noFill/>
@@ -6473,14 +6796,14 @@
       </p:sp>
       <p:sp>
         <p:nvSpPr>
-          <p:cNvPr id="26" name="TextBox 25"/>
-          <p:cNvSpPr txBox="1"/>
-          <p:nvPr/>
-        </p:nvSpPr>
-        <p:spPr>
-          <a:xfrm>
-            <a:off x="548640" y="3785615"/>
-            <a:ext cx="3200400" cy="347472"/>
+          <p:cNvPr id="30" name="TextBox 29"/>
+          <p:cNvSpPr txBox="1"/>
+          <p:nvPr/>
+        </p:nvSpPr>
+        <p:spPr>
+          <a:xfrm>
+            <a:off x="548640" y="4041648"/>
+            <a:ext cx="3840480" cy="365760"/>
           </a:xfrm>
           <a:prstGeom prst="rect">
             <a:avLst/>
@@ -6495,9 +6818,9 @@
           <a:p>
             <a:pPr algn="l"/>
             <a:r>
-              <a:rPr sz="1300" b="1" i="0">
-                <a:solidFill>
-                  <a:srgbClr val="FFFFFF"/>
+              <a:rPr sz="1400" b="1" i="0">
+                <a:solidFill>
+                  <a:srgbClr val="141414"/>
                 </a:solidFill>
               </a:rPr>
               <a:t>Property</a:t>
@@ -6507,20 +6830,54 @@
       </p:sp>
       <p:sp>
         <p:nvSpPr>
-          <p:cNvPr id="27" name="Rectangle 26"/>
+          <p:cNvPr id="31" name="TextBox 30"/>
+          <p:cNvSpPr txBox="1"/>
+          <p:nvPr/>
+        </p:nvSpPr>
+        <p:spPr>
+          <a:xfrm>
+            <a:off x="4663440" y="4041648"/>
+            <a:ext cx="6858000" cy="365760"/>
+          </a:xfrm>
+          <a:prstGeom prst="rect">
+            <a:avLst/>
+          </a:prstGeom>
+          <a:noFill/>
+        </p:spPr>
+        <p:txBody>
+          <a:bodyPr wrap="none">
+            <a:spAutoFit/>
+          </a:bodyPr>
+          <a:lstStyle/>
+          <a:p>
+            <a:pPr algn="l"/>
+            <a:r>
+              <a:rPr sz="1400" b="1" i="0">
+                <a:solidFill>
+                  <a:srgbClr val="141414"/>
+                </a:solidFill>
+              </a:rPr>
+              <a:t>Value</a:t>
+            </a:r>
+          </a:p>
+        </p:txBody>
+      </p:sp>
+      <p:sp>
+        <p:nvSpPr>
+          <p:cNvPr id="32" name="Rectangle 31"/>
           <p:cNvSpPr/>
           <p:nvPr/>
         </p:nvSpPr>
         <p:spPr>
           <a:xfrm>
-            <a:off x="3840480" y="3749039"/>
-            <a:ext cx="4572000" cy="347472"/>
+            <a:off x="457200" y="4343400"/>
+            <a:ext cx="3840480" cy="365760"/>
           </a:xfrm>
           <a:prstGeom prst="rect">
             <a:avLst/>
           </a:prstGeom>
           <a:solidFill>
-            <a:srgbClr val="9B59B6"/>
+            <a:srgbClr val="222222"/>
           </a:solidFill>
           <a:ln>
             <a:noFill/>
@@ -6550,14 +6907,14 @@
       </p:sp>
       <p:sp>
         <p:nvSpPr>
-          <p:cNvPr id="28" name="TextBox 27"/>
-          <p:cNvSpPr txBox="1"/>
-          <p:nvPr/>
-        </p:nvSpPr>
-        <p:spPr>
-          <a:xfrm>
-            <a:off x="3931920" y="3785615"/>
-            <a:ext cx="4572000" cy="347472"/>
+          <p:cNvPr id="33" name="TextBox 32"/>
+          <p:cNvSpPr txBox="1"/>
+          <p:nvPr/>
+        </p:nvSpPr>
+        <p:spPr>
+          <a:xfrm>
+            <a:off x="566928" y="4407408"/>
+            <a:ext cx="3840480" cy="365760"/>
           </a:xfrm>
           <a:prstGeom prst="rect">
             <a:avLst/>
@@ -6572,32 +6929,32 @@
           <a:p>
             <a:pPr algn="l"/>
             <a:r>
-              <a:rPr sz="1300" b="1" i="0">
-                <a:solidFill>
-                  <a:srgbClr val="FFFFFF"/>
-                </a:solidFill>
-              </a:rPr>
-              <a:t>Value</a:t>
-            </a:r>
-          </a:p>
-        </p:txBody>
-      </p:sp>
-      <p:sp>
-        <p:nvSpPr>
-          <p:cNvPr id="29" name="Rectangle 28"/>
+              <a:rPr sz="1400" b="0" i="0">
+                <a:solidFill>
+                  <a:srgbClr val="CCCCCC"/>
+                </a:solidFill>
+              </a:rPr>
+              <a:t>Parameters</a:t>
+            </a:r>
+          </a:p>
+        </p:txBody>
+      </p:sp>
+      <p:sp>
+        <p:nvSpPr>
+          <p:cNvPr id="34" name="Rectangle 33"/>
           <p:cNvSpPr/>
           <p:nvPr/>
         </p:nvSpPr>
         <p:spPr>
           <a:xfrm>
-            <a:off x="457200" y="4096511"/>
-            <a:ext cx="3200400" cy="347472"/>
+            <a:off x="4572000" y="4343400"/>
+            <a:ext cx="6858000" cy="365760"/>
           </a:xfrm>
           <a:prstGeom prst="rect">
             <a:avLst/>
           </a:prstGeom>
           <a:solidFill>
-            <a:srgbClr val="1A1A3E"/>
+            <a:srgbClr val="222222"/>
           </a:solidFill>
           <a:ln>
             <a:noFill/>
@@ -6627,14 +6984,14 @@
       </p:sp>
       <p:sp>
         <p:nvSpPr>
-          <p:cNvPr id="30" name="TextBox 29"/>
-          <p:cNvSpPr txBox="1"/>
-          <p:nvPr/>
-        </p:nvSpPr>
-        <p:spPr>
-          <a:xfrm>
-            <a:off x="548640" y="4133087"/>
-            <a:ext cx="3200400" cy="347472"/>
+          <p:cNvPr id="35" name="TextBox 34"/>
+          <p:cNvSpPr txBox="1"/>
+          <p:nvPr/>
+        </p:nvSpPr>
+        <p:spPr>
+          <a:xfrm>
+            <a:off x="4681728" y="4407408"/>
+            <a:ext cx="6858000" cy="365760"/>
           </a:xfrm>
           <a:prstGeom prst="rect">
             <a:avLst/>
@@ -6649,32 +7006,32 @@
           <a:p>
             <a:pPr algn="l"/>
             <a:r>
-              <a:rPr sz="1300" b="0" i="0">
-                <a:solidFill>
-                  <a:srgbClr val="CCCCFF"/>
-                </a:solidFill>
-              </a:rPr>
-              <a:t>Parameters</a:t>
-            </a:r>
-          </a:p>
-        </p:txBody>
-      </p:sp>
-      <p:sp>
-        <p:nvSpPr>
-          <p:cNvPr id="31" name="Rectangle 30"/>
+              <a:rPr sz="1400" b="0" i="0">
+                <a:solidFill>
+                  <a:srgbClr val="FFFFFF"/>
+                </a:solidFill>
+              </a:rPr>
+              <a:t>~5.3M</a:t>
+            </a:r>
+          </a:p>
+        </p:txBody>
+      </p:sp>
+      <p:sp>
+        <p:nvSpPr>
+          <p:cNvPr id="36" name="Rectangle 35"/>
           <p:cNvSpPr/>
           <p:nvPr/>
         </p:nvSpPr>
         <p:spPr>
           <a:xfrm>
-            <a:off x="3840480" y="4096511"/>
-            <a:ext cx="4572000" cy="347472"/>
+            <a:off x="457200" y="4709159"/>
+            <a:ext cx="3840480" cy="365760"/>
           </a:xfrm>
           <a:prstGeom prst="rect">
             <a:avLst/>
           </a:prstGeom>
           <a:solidFill>
-            <a:srgbClr val="1A1A3E"/>
+            <a:srgbClr val="1A1A1A"/>
           </a:solidFill>
           <a:ln>
             <a:noFill/>
@@ -6704,14 +7061,14 @@
       </p:sp>
       <p:sp>
         <p:nvSpPr>
-          <p:cNvPr id="32" name="TextBox 31"/>
-          <p:cNvSpPr txBox="1"/>
-          <p:nvPr/>
-        </p:nvSpPr>
-        <p:spPr>
-          <a:xfrm>
-            <a:off x="3931920" y="4133087"/>
-            <a:ext cx="4572000" cy="347472"/>
+          <p:cNvPr id="37" name="TextBox 36"/>
+          <p:cNvSpPr txBox="1"/>
+          <p:nvPr/>
+        </p:nvSpPr>
+        <p:spPr>
+          <a:xfrm>
+            <a:off x="566928" y="4773168"/>
+            <a:ext cx="3840480" cy="365760"/>
           </a:xfrm>
           <a:prstGeom prst="rect">
             <a:avLst/>
@@ -6726,32 +7083,32 @@
           <a:p>
             <a:pPr algn="l"/>
             <a:r>
-              <a:rPr sz="1300" b="0" i="0">
-                <a:solidFill>
-                  <a:srgbClr val="FFFFFF"/>
-                </a:solidFill>
-              </a:rPr>
-              <a:t>~5.3M</a:t>
-            </a:r>
-          </a:p>
-        </p:txBody>
-      </p:sp>
-      <p:sp>
-        <p:nvSpPr>
-          <p:cNvPr id="33" name="Rectangle 32"/>
+              <a:rPr sz="1400" b="0" i="0">
+                <a:solidFill>
+                  <a:srgbClr val="CCCCCC"/>
+                </a:solidFill>
+              </a:rPr>
+              <a:t>Input Size</a:t>
+            </a:r>
+          </a:p>
+        </p:txBody>
+      </p:sp>
+      <p:sp>
+        <p:nvSpPr>
+          <p:cNvPr id="38" name="Rectangle 37"/>
           <p:cNvSpPr/>
           <p:nvPr/>
         </p:nvSpPr>
         <p:spPr>
           <a:xfrm>
-            <a:off x="457200" y="4443983"/>
-            <a:ext cx="3200400" cy="347472"/>
+            <a:off x="4572000" y="4709159"/>
+            <a:ext cx="6858000" cy="365760"/>
           </a:xfrm>
           <a:prstGeom prst="rect">
             <a:avLst/>
           </a:prstGeom>
           <a:solidFill>
-            <a:srgbClr val="141432"/>
+            <a:srgbClr val="1A1A1A"/>
           </a:solidFill>
           <a:ln>
             <a:noFill/>
@@ -6781,14 +7138,14 @@
       </p:sp>
       <p:sp>
         <p:nvSpPr>
-          <p:cNvPr id="34" name="TextBox 33"/>
-          <p:cNvSpPr txBox="1"/>
-          <p:nvPr/>
-        </p:nvSpPr>
-        <p:spPr>
-          <a:xfrm>
-            <a:off x="548640" y="4480559"/>
-            <a:ext cx="3200400" cy="347472"/>
+          <p:cNvPr id="39" name="TextBox 38"/>
+          <p:cNvSpPr txBox="1"/>
+          <p:nvPr/>
+        </p:nvSpPr>
+        <p:spPr>
+          <a:xfrm>
+            <a:off x="4681728" y="4773168"/>
+            <a:ext cx="6858000" cy="365760"/>
           </a:xfrm>
           <a:prstGeom prst="rect">
             <a:avLst/>
@@ -6803,32 +7160,32 @@
           <a:p>
             <a:pPr algn="l"/>
             <a:r>
-              <a:rPr sz="1300" b="0" i="0">
-                <a:solidFill>
-                  <a:srgbClr val="CCCCFF"/>
-                </a:solidFill>
-              </a:rPr>
-              <a:t>Input Size</a:t>
-            </a:r>
-          </a:p>
-        </p:txBody>
-      </p:sp>
-      <p:sp>
-        <p:nvSpPr>
-          <p:cNvPr id="35" name="Rectangle 34"/>
+              <a:rPr sz="1400" b="0" i="0">
+                <a:solidFill>
+                  <a:srgbClr val="FFFFFF"/>
+                </a:solidFill>
+              </a:rPr>
+              <a:t>224 × 224 px</a:t>
+            </a:r>
+          </a:p>
+        </p:txBody>
+      </p:sp>
+      <p:sp>
+        <p:nvSpPr>
+          <p:cNvPr id="40" name="Rectangle 39"/>
           <p:cNvSpPr/>
           <p:nvPr/>
         </p:nvSpPr>
         <p:spPr>
           <a:xfrm>
-            <a:off x="3840480" y="4443983"/>
-            <a:ext cx="4572000" cy="347472"/>
+            <a:off x="457200" y="5074920"/>
+            <a:ext cx="3840480" cy="365760"/>
           </a:xfrm>
           <a:prstGeom prst="rect">
             <a:avLst/>
           </a:prstGeom>
           <a:solidFill>
-            <a:srgbClr val="141432"/>
+            <a:srgbClr val="222222"/>
           </a:solidFill>
           <a:ln>
             <a:noFill/>
@@ -6858,14 +7215,14 @@
       </p:sp>
       <p:sp>
         <p:nvSpPr>
-          <p:cNvPr id="36" name="TextBox 35"/>
-          <p:cNvSpPr txBox="1"/>
-          <p:nvPr/>
-        </p:nvSpPr>
-        <p:spPr>
-          <a:xfrm>
-            <a:off x="3931920" y="4480559"/>
-            <a:ext cx="4572000" cy="347472"/>
+          <p:cNvPr id="41" name="TextBox 40"/>
+          <p:cNvSpPr txBox="1"/>
+          <p:nvPr/>
+        </p:nvSpPr>
+        <p:spPr>
+          <a:xfrm>
+            <a:off x="566928" y="5138928"/>
+            <a:ext cx="3840480" cy="365760"/>
           </a:xfrm>
           <a:prstGeom prst="rect">
             <a:avLst/>
@@ -6880,32 +7237,32 @@
           <a:p>
             <a:pPr algn="l"/>
             <a:r>
-              <a:rPr sz="1300" b="0" i="0">
-                <a:solidFill>
-                  <a:srgbClr val="FFFFFF"/>
-                </a:solidFill>
-              </a:rPr>
-              <a:t>224 × 224 px</a:t>
-            </a:r>
-          </a:p>
-        </p:txBody>
-      </p:sp>
-      <p:sp>
-        <p:nvSpPr>
-          <p:cNvPr id="37" name="Rectangle 36"/>
+              <a:rPr sz="1400" b="0" i="0">
+                <a:solidFill>
+                  <a:srgbClr val="CCCCCC"/>
+                </a:solidFill>
+              </a:rPr>
+              <a:t>Pretrained On</a:t>
+            </a:r>
+          </a:p>
+        </p:txBody>
+      </p:sp>
+      <p:sp>
+        <p:nvSpPr>
+          <p:cNvPr id="42" name="Rectangle 41"/>
           <p:cNvSpPr/>
           <p:nvPr/>
         </p:nvSpPr>
         <p:spPr>
           <a:xfrm>
-            <a:off x="457200" y="4791456"/>
-            <a:ext cx="3200400" cy="347472"/>
+            <a:off x="4572000" y="5074920"/>
+            <a:ext cx="6858000" cy="365760"/>
           </a:xfrm>
           <a:prstGeom prst="rect">
             <a:avLst/>
           </a:prstGeom>
           <a:solidFill>
-            <a:srgbClr val="1A1A3E"/>
+            <a:srgbClr val="222222"/>
           </a:solidFill>
           <a:ln>
             <a:noFill/>
@@ -6935,14 +7292,14 @@
       </p:sp>
       <p:sp>
         <p:nvSpPr>
-          <p:cNvPr id="38" name="TextBox 37"/>
-          <p:cNvSpPr txBox="1"/>
-          <p:nvPr/>
-        </p:nvSpPr>
-        <p:spPr>
-          <a:xfrm>
-            <a:off x="548640" y="4828032"/>
-            <a:ext cx="3200400" cy="347472"/>
+          <p:cNvPr id="43" name="TextBox 42"/>
+          <p:cNvSpPr txBox="1"/>
+          <p:nvPr/>
+        </p:nvSpPr>
+        <p:spPr>
+          <a:xfrm>
+            <a:off x="4681728" y="5138928"/>
+            <a:ext cx="6858000" cy="365760"/>
           </a:xfrm>
           <a:prstGeom prst="rect">
             <a:avLst/>
@@ -6957,32 +7314,32 @@
           <a:p>
             <a:pPr algn="l"/>
             <a:r>
-              <a:rPr sz="1300" b="0" i="0">
-                <a:solidFill>
-                  <a:srgbClr val="CCCCFF"/>
-                </a:solidFill>
-              </a:rPr>
-              <a:t>Pretrained On</a:t>
-            </a:r>
-          </a:p>
-        </p:txBody>
-      </p:sp>
-      <p:sp>
-        <p:nvSpPr>
-          <p:cNvPr id="39" name="Rectangle 38"/>
+              <a:rPr sz="1400" b="0" i="0">
+                <a:solidFill>
+                  <a:srgbClr val="FFFFFF"/>
+                </a:solidFill>
+              </a:rPr>
+              <a:t>ImageNet  (1.2M images)</a:t>
+            </a:r>
+          </a:p>
+        </p:txBody>
+      </p:sp>
+      <p:sp>
+        <p:nvSpPr>
+          <p:cNvPr id="44" name="Rectangle 43"/>
           <p:cNvSpPr/>
           <p:nvPr/>
         </p:nvSpPr>
         <p:spPr>
           <a:xfrm>
-            <a:off x="3840480" y="4791456"/>
-            <a:ext cx="4572000" cy="347472"/>
+            <a:off x="457200" y="5440679"/>
+            <a:ext cx="3840480" cy="365760"/>
           </a:xfrm>
           <a:prstGeom prst="rect">
             <a:avLst/>
           </a:prstGeom>
           <a:solidFill>
-            <a:srgbClr val="1A1A3E"/>
+            <a:srgbClr val="1A1A1A"/>
           </a:solidFill>
           <a:ln>
             <a:noFill/>
@@ -7012,14 +7369,14 @@
       </p:sp>
       <p:sp>
         <p:nvSpPr>
-          <p:cNvPr id="40" name="TextBox 39"/>
-          <p:cNvSpPr txBox="1"/>
-          <p:nvPr/>
-        </p:nvSpPr>
-        <p:spPr>
-          <a:xfrm>
-            <a:off x="3931920" y="4828032"/>
-            <a:ext cx="4572000" cy="347472"/>
+          <p:cNvPr id="45" name="TextBox 44"/>
+          <p:cNvSpPr txBox="1"/>
+          <p:nvPr/>
+        </p:nvSpPr>
+        <p:spPr>
+          <a:xfrm>
+            <a:off x="566928" y="5504688"/>
+            <a:ext cx="3840480" cy="365760"/>
           </a:xfrm>
           <a:prstGeom prst="rect">
             <a:avLst/>
@@ -7034,32 +7391,32 @@
           <a:p>
             <a:pPr algn="l"/>
             <a:r>
-              <a:rPr sz="1300" b="0" i="0">
-                <a:solidFill>
-                  <a:srgbClr val="FFFFFF"/>
-                </a:solidFill>
-              </a:rPr>
-              <a:t>ImageNet (1.2M images)</a:t>
-            </a:r>
-          </a:p>
-        </p:txBody>
-      </p:sp>
-      <p:sp>
-        <p:nvSpPr>
-          <p:cNvPr id="41" name="Rectangle 40"/>
+              <a:rPr sz="1400" b="0" i="0">
+                <a:solidFill>
+                  <a:srgbClr val="CCCCCC"/>
+                </a:solidFill>
+              </a:rPr>
+              <a:t>Output</a:t>
+            </a:r>
+          </a:p>
+        </p:txBody>
+      </p:sp>
+      <p:sp>
+        <p:nvSpPr>
+          <p:cNvPr id="46" name="Rectangle 45"/>
           <p:cNvSpPr/>
           <p:nvPr/>
         </p:nvSpPr>
         <p:spPr>
           <a:xfrm>
-            <a:off x="457200" y="5138927"/>
-            <a:ext cx="3200400" cy="347472"/>
+            <a:off x="4572000" y="5440679"/>
+            <a:ext cx="6858000" cy="365760"/>
           </a:xfrm>
           <a:prstGeom prst="rect">
             <a:avLst/>
           </a:prstGeom>
           <a:solidFill>
-            <a:srgbClr val="141432"/>
+            <a:srgbClr val="1A1A1A"/>
           </a:solidFill>
           <a:ln>
             <a:noFill/>
@@ -7089,14 +7446,14 @@
       </p:sp>
       <p:sp>
         <p:nvSpPr>
-          <p:cNvPr id="42" name="TextBox 41"/>
-          <p:cNvSpPr txBox="1"/>
-          <p:nvPr/>
-        </p:nvSpPr>
-        <p:spPr>
-          <a:xfrm>
-            <a:off x="548640" y="5175503"/>
-            <a:ext cx="3200400" cy="347472"/>
+          <p:cNvPr id="47" name="TextBox 46"/>
+          <p:cNvSpPr txBox="1"/>
+          <p:nvPr/>
+        </p:nvSpPr>
+        <p:spPr>
+          <a:xfrm>
+            <a:off x="4681728" y="5504688"/>
+            <a:ext cx="6858000" cy="365760"/>
           </a:xfrm>
           <a:prstGeom prst="rect">
             <a:avLst/>
@@ -7111,32 +7468,32 @@
           <a:p>
             <a:pPr algn="l"/>
             <a:r>
-              <a:rPr sz="1300" b="0" i="0">
-                <a:solidFill>
-                  <a:srgbClr val="CCCCFF"/>
-                </a:solidFill>
-              </a:rPr>
-              <a:t>Output</a:t>
-            </a:r>
-          </a:p>
-        </p:txBody>
-      </p:sp>
-      <p:sp>
-        <p:nvSpPr>
-          <p:cNvPr id="43" name="Rectangle 42"/>
+              <a:rPr sz="1400" b="0" i="0">
+                <a:solidFill>
+                  <a:srgbClr val="FFFFFF"/>
+                </a:solidFill>
+              </a:rPr>
+              <a:t>78 classes  (tarot cards)</a:t>
+            </a:r>
+          </a:p>
+        </p:txBody>
+      </p:sp>
+      <p:sp>
+        <p:nvSpPr>
+          <p:cNvPr id="48" name="Rectangle 47"/>
           <p:cNvSpPr/>
           <p:nvPr/>
         </p:nvSpPr>
         <p:spPr>
           <a:xfrm>
-            <a:off x="3840480" y="5138927"/>
-            <a:ext cx="4572000" cy="347472"/>
+            <a:off x="457200" y="5806440"/>
+            <a:ext cx="3840480" cy="365760"/>
           </a:xfrm>
           <a:prstGeom prst="rect">
             <a:avLst/>
           </a:prstGeom>
           <a:solidFill>
-            <a:srgbClr val="141432"/>
+            <a:srgbClr val="222222"/>
           </a:solidFill>
           <a:ln>
             <a:noFill/>
@@ -7166,14 +7523,14 @@
       </p:sp>
       <p:sp>
         <p:nvSpPr>
-          <p:cNvPr id="44" name="TextBox 43"/>
-          <p:cNvSpPr txBox="1"/>
-          <p:nvPr/>
-        </p:nvSpPr>
-        <p:spPr>
-          <a:xfrm>
-            <a:off x="3931920" y="5175503"/>
-            <a:ext cx="4572000" cy="347472"/>
+          <p:cNvPr id="49" name="TextBox 48"/>
+          <p:cNvSpPr txBox="1"/>
+          <p:nvPr/>
+        </p:nvSpPr>
+        <p:spPr>
+          <a:xfrm>
+            <a:off x="566928" y="5870448"/>
+            <a:ext cx="3840480" cy="365760"/>
           </a:xfrm>
           <a:prstGeom prst="rect">
             <a:avLst/>
@@ -7188,32 +7545,32 @@
           <a:p>
             <a:pPr algn="l"/>
             <a:r>
-              <a:rPr sz="1300" b="0" i="0">
-                <a:solidFill>
-                  <a:srgbClr val="FFFFFF"/>
-                </a:solidFill>
-              </a:rPr>
-              <a:t>78 classes (tarot cards)</a:t>
-            </a:r>
-          </a:p>
-        </p:txBody>
-      </p:sp>
-      <p:sp>
-        <p:nvSpPr>
-          <p:cNvPr id="45" name="Rectangle 44"/>
+              <a:rPr sz="1400" b="0" i="0">
+                <a:solidFill>
+                  <a:srgbClr val="CCCCCC"/>
+                </a:solidFill>
+              </a:rPr>
+              <a:t>Dropout Rate</a:t>
+            </a:r>
+          </a:p>
+        </p:txBody>
+      </p:sp>
+      <p:sp>
+        <p:nvSpPr>
+          <p:cNvPr id="50" name="Rectangle 49"/>
           <p:cNvSpPr/>
           <p:nvPr/>
         </p:nvSpPr>
         <p:spPr>
           <a:xfrm>
-            <a:off x="457200" y="5486400"/>
-            <a:ext cx="3200400" cy="347472"/>
+            <a:off x="4572000" y="5806440"/>
+            <a:ext cx="6858000" cy="365760"/>
           </a:xfrm>
           <a:prstGeom prst="rect">
             <a:avLst/>
           </a:prstGeom>
           <a:solidFill>
-            <a:srgbClr val="1A1A3E"/>
+            <a:srgbClr val="222222"/>
           </a:solidFill>
           <a:ln>
             <a:noFill/>
@@ -7243,14 +7600,14 @@
       </p:sp>
       <p:sp>
         <p:nvSpPr>
-          <p:cNvPr id="46" name="TextBox 45"/>
-          <p:cNvSpPr txBox="1"/>
-          <p:nvPr/>
-        </p:nvSpPr>
-        <p:spPr>
-          <a:xfrm>
-            <a:off x="548640" y="5522976"/>
-            <a:ext cx="3200400" cy="347472"/>
+          <p:cNvPr id="51" name="TextBox 50"/>
+          <p:cNvSpPr txBox="1"/>
+          <p:nvPr/>
+        </p:nvSpPr>
+        <p:spPr>
+          <a:xfrm>
+            <a:off x="4681728" y="5870448"/>
+            <a:ext cx="6858000" cy="365760"/>
           </a:xfrm>
           <a:prstGeom prst="rect">
             <a:avLst/>
@@ -7265,123 +7622,12 @@
           <a:p>
             <a:pPr algn="l"/>
             <a:r>
-              <a:rPr sz="1300" b="0" i="0">
-                <a:solidFill>
-                  <a:srgbClr val="CCCCFF"/>
-                </a:solidFill>
-              </a:rPr>
-              <a:t>Dropout</a:t>
-            </a:r>
-          </a:p>
-        </p:txBody>
-      </p:sp>
-      <p:sp>
-        <p:nvSpPr>
-          <p:cNvPr id="47" name="Rectangle 46"/>
-          <p:cNvSpPr/>
-          <p:nvPr/>
-        </p:nvSpPr>
-        <p:spPr>
-          <a:xfrm>
-            <a:off x="3840480" y="5486400"/>
-            <a:ext cx="4572000" cy="347472"/>
-          </a:xfrm>
-          <a:prstGeom prst="rect">
-            <a:avLst/>
-          </a:prstGeom>
-          <a:solidFill>
-            <a:srgbClr val="1A1A3E"/>
-          </a:solidFill>
-          <a:ln>
-            <a:noFill/>
-          </a:ln>
-        </p:spPr>
-        <p:style>
-          <a:lnRef idx="1">
-            <a:schemeClr val="accent1"/>
-          </a:lnRef>
-          <a:fillRef idx="3">
-            <a:schemeClr val="accent1"/>
-          </a:fillRef>
-          <a:effectRef idx="2">
-            <a:schemeClr val="accent1"/>
-          </a:effectRef>
-          <a:fontRef idx="minor">
-            <a:schemeClr val="lt1"/>
-          </a:fontRef>
-        </p:style>
-        <p:txBody>
-          <a:bodyPr rtlCol="0" anchor="ctr"/>
-          <a:lstStyle/>
-          <a:p>
-            <a:pPr algn="ctr"/>
-          </a:p>
-        </p:txBody>
-      </p:sp>
-      <p:sp>
-        <p:nvSpPr>
-          <p:cNvPr id="48" name="TextBox 47"/>
-          <p:cNvSpPr txBox="1"/>
-          <p:nvPr/>
-        </p:nvSpPr>
-        <p:spPr>
-          <a:xfrm>
-            <a:off x="3931920" y="5522976"/>
-            <a:ext cx="4572000" cy="347472"/>
-          </a:xfrm>
-          <a:prstGeom prst="rect">
-            <a:avLst/>
-          </a:prstGeom>
-          <a:noFill/>
-        </p:spPr>
-        <p:txBody>
-          <a:bodyPr wrap="none">
-            <a:spAutoFit/>
-          </a:bodyPr>
-          <a:lstStyle/>
-          <a:p>
-            <a:pPr algn="l"/>
-            <a:r>
-              <a:rPr sz="1300" b="0" i="0">
+              <a:rPr sz="1400" b="0" i="0">
                 <a:solidFill>
                   <a:srgbClr val="FFFFFF"/>
                 </a:solidFill>
               </a:rPr>
-              <a:t>0.3 (both layers)</a:t>
-            </a:r>
-          </a:p>
-        </p:txBody>
-      </p:sp>
-      <p:sp>
-        <p:nvSpPr>
-          <p:cNvPr id="49" name="TextBox 48"/>
-          <p:cNvSpPr txBox="1"/>
-          <p:nvPr/>
-        </p:nvSpPr>
-        <p:spPr>
-          <a:xfrm>
-            <a:off x="457200" y="6309360"/>
-            <a:ext cx="11247120" cy="411480"/>
-          </a:xfrm>
-          <a:prstGeom prst="rect">
-            <a:avLst/>
-          </a:prstGeom>
-          <a:noFill/>
-        </p:spPr>
-        <p:txBody>
-          <a:bodyPr wrap="none">
-            <a:spAutoFit/>
-          </a:bodyPr>
-          <a:lstStyle/>
-          <a:p>
-            <a:pPr algn="l"/>
-            <a:r>
-              <a:rPr sz="1300" b="0" i="1">
-                <a:solidFill>
-                  <a:srgbClr val="F0C040"/>
-                </a:solidFill>
-              </a:rPr>
-              <a:t>Why EfficientNet-B0?  Scales depth + width + resolution together → best accuracy per parameter</a:t>
+              <a:t>0.3  (applied twice)</a:t>
             </a:r>
           </a:p>
         </p:txBody>
@@ -7400,7 +7646,7 @@
     <p:bg>
       <p:bgPr>
         <a:solidFill>
-          <a:srgbClr val="0D0D2B"/>
+          <a:srgbClr val="141414"/>
         </a:solidFill>
         <a:effectLst/>
       </p:bgPr>
@@ -7421,13 +7667,13 @@
         <p:spPr>
           <a:xfrm>
             <a:off x="0" y="0"/>
-            <a:ext cx="12188952" cy="109728"/>
+            <a:ext cx="12188952" cy="91440"/>
           </a:xfrm>
           <a:prstGeom prst="rect">
             <a:avLst/>
           </a:prstGeom>
           <a:solidFill>
-            <a:srgbClr val="F0C040"/>
+            <a:srgbClr val="D4A017"/>
           </a:solidFill>
           <a:ln>
             <a:noFill/>
@@ -7463,14 +7709,14 @@
         </p:nvSpPr>
         <p:spPr>
           <a:xfrm>
-            <a:off x="0" y="6748272"/>
-            <a:ext cx="12188952" cy="109728"/>
+            <a:off x="0" y="6766560"/>
+            <a:ext cx="12188952" cy="91440"/>
           </a:xfrm>
           <a:prstGeom prst="rect">
             <a:avLst/>
           </a:prstGeom>
           <a:solidFill>
-            <a:srgbClr val="9B59B6"/>
+            <a:srgbClr val="1ABC9C"/>
           </a:solidFill>
           <a:ln>
             <a:noFill/>
@@ -7500,20 +7746,54 @@
       </p:sp>
       <p:sp>
         <p:nvSpPr>
-          <p:cNvPr id="4" name="Rectangle 3"/>
+          <p:cNvPr id="4" name="TextBox 3"/>
+          <p:cNvSpPr txBox="1"/>
+          <p:nvPr/>
+        </p:nvSpPr>
+        <p:spPr>
+          <a:xfrm>
+            <a:off x="0" y="6766560"/>
+            <a:ext cx="12188952" cy="91440"/>
+          </a:xfrm>
+          <a:prstGeom prst="rect">
+            <a:avLst/>
+          </a:prstGeom>
+          <a:noFill/>
+        </p:spPr>
+        <p:txBody>
+          <a:bodyPr wrap="none">
+            <a:spAutoFit/>
+          </a:bodyPr>
+          <a:lstStyle/>
+          <a:p>
+            <a:pPr algn="ctr"/>
+            <a:r>
+              <a:rPr sz="900" b="0" i="0">
+                <a:solidFill>
+                  <a:srgbClr val="888888"/>
+                </a:solidFill>
+              </a:rPr>
+              <a:t>Fortune Teller  ·  AI Tarot Card Recognition  ·  2026</a:t>
+            </a:r>
+          </a:p>
+        </p:txBody>
+      </p:sp>
+      <p:sp>
+        <p:nvSpPr>
+          <p:cNvPr id="5" name="Rectangle 4"/>
           <p:cNvSpPr/>
           <p:nvPr/>
         </p:nvSpPr>
         <p:spPr>
           <a:xfrm>
-            <a:off x="457200" y="228600"/>
-            <a:ext cx="1645920" cy="292608"/>
+            <a:off x="457200" y="201168"/>
+            <a:ext cx="2061972" cy="301752"/>
           </a:xfrm>
           <a:prstGeom prst="rect">
             <a:avLst/>
           </a:prstGeom>
           <a:solidFill>
-            <a:srgbClr val="9B59B6"/>
+            <a:srgbClr val="1ABC9C"/>
           </a:solidFill>
           <a:ln>
             <a:noFill/>
@@ -7543,67 +7823,67 @@
       </p:sp>
       <p:sp>
         <p:nvSpPr>
-          <p:cNvPr id="5" name="TextBox 4"/>
-          <p:cNvSpPr txBox="1"/>
-          <p:nvPr/>
-        </p:nvSpPr>
-        <p:spPr>
-          <a:xfrm>
-            <a:off x="502920" y="246888"/>
-            <a:ext cx="1554480" cy="274320"/>
-          </a:xfrm>
-          <a:prstGeom prst="rect">
-            <a:avLst/>
-          </a:prstGeom>
-          <a:noFill/>
-        </p:spPr>
-        <p:txBody>
-          <a:bodyPr wrap="none">
-            <a:spAutoFit/>
-          </a:bodyPr>
-          <a:lstStyle/>
-          <a:p>
-            <a:pPr algn="ctr"/>
-            <a:r>
-              <a:rPr sz="1000" b="1" i="0">
+          <p:cNvPr id="6" name="TextBox 5"/>
+          <p:cNvSpPr txBox="1"/>
+          <p:nvPr/>
+        </p:nvSpPr>
+        <p:spPr>
+          <a:xfrm>
+            <a:off x="530352" y="237744"/>
+            <a:ext cx="1924812" cy="256032"/>
+          </a:xfrm>
+          <a:prstGeom prst="rect">
+            <a:avLst/>
+          </a:prstGeom>
+          <a:noFill/>
+        </p:spPr>
+        <p:txBody>
+          <a:bodyPr wrap="none">
+            <a:spAutoFit/>
+          </a:bodyPr>
+          <a:lstStyle/>
+          <a:p>
+            <a:pPr algn="l"/>
+            <a:r>
+              <a:rPr sz="1100" b="1" i="0">
+                <a:solidFill>
+                  <a:srgbClr val="141414"/>
+                </a:solidFill>
+              </a:rPr>
+              <a:t>TRAINING PIPELINE</a:t>
+            </a:r>
+          </a:p>
+        </p:txBody>
+      </p:sp>
+      <p:sp>
+        <p:nvSpPr>
+          <p:cNvPr id="7" name="TextBox 6"/>
+          <p:cNvSpPr txBox="1"/>
+          <p:nvPr/>
+        </p:nvSpPr>
+        <p:spPr>
+          <a:xfrm>
+            <a:off x="457200" y="594360"/>
+            <a:ext cx="10972800" cy="685800"/>
+          </a:xfrm>
+          <a:prstGeom prst="rect">
+            <a:avLst/>
+          </a:prstGeom>
+          <a:noFill/>
+        </p:spPr>
+        <p:txBody>
+          <a:bodyPr wrap="none">
+            <a:spAutoFit/>
+          </a:bodyPr>
+          <a:lstStyle/>
+          <a:p>
+            <a:pPr algn="l"/>
+            <a:r>
+              <a:rPr sz="3400" b="1" i="0">
                 <a:solidFill>
                   <a:srgbClr val="FFFFFF"/>
                 </a:solidFill>
               </a:rPr>
-              <a:t>TRAINING PIPELINE</a:t>
-            </a:r>
-          </a:p>
-        </p:txBody>
-      </p:sp>
-      <p:sp>
-        <p:nvSpPr>
-          <p:cNvPr id="6" name="TextBox 5"/>
-          <p:cNvSpPr txBox="1"/>
-          <p:nvPr/>
-        </p:nvSpPr>
-        <p:spPr>
-          <a:xfrm>
-            <a:off x="457200" y="640080"/>
-            <a:ext cx="9144000" cy="640080"/>
-          </a:xfrm>
-          <a:prstGeom prst="rect">
-            <a:avLst/>
-          </a:prstGeom>
-          <a:noFill/>
-        </p:spPr>
-        <p:txBody>
-          <a:bodyPr wrap="none">
-            <a:spAutoFit/>
-          </a:bodyPr>
-          <a:lstStyle/>
-          <a:p>
-            <a:pPr algn="l"/>
-            <a:r>
-              <a:rPr sz="3200" b="1" i="0">
-                <a:solidFill>
-                  <a:srgbClr val="F0C040"/>
-                </a:solidFill>
-              </a:rPr>
               <a:t>Training Pipeline</a:t>
             </a:r>
           </a:p>
@@ -7611,20 +7891,20 @@
       </p:sp>
       <p:sp>
         <p:nvSpPr>
-          <p:cNvPr id="7" name="Rectangle 6"/>
+          <p:cNvPr id="8" name="Rectangle 7"/>
           <p:cNvSpPr/>
           <p:nvPr/>
         </p:nvSpPr>
         <p:spPr>
           <a:xfrm>
-            <a:off x="457200" y="1371600"/>
+            <a:off x="457200" y="1389888"/>
             <a:ext cx="11274552" cy="36576"/>
           </a:xfrm>
           <a:prstGeom prst="rect">
             <a:avLst/>
           </a:prstGeom>
           <a:solidFill>
-            <a:srgbClr val="9B59B6"/>
+            <a:srgbClr val="1ABC9C"/>
           </a:solidFill>
           <a:ln>
             <a:noFill/>
@@ -7654,20 +7934,20 @@
       </p:sp>
       <p:sp>
         <p:nvSpPr>
-          <p:cNvPr id="8" name="Rectangle 7"/>
+          <p:cNvPr id="9" name="Rectangle 8"/>
           <p:cNvSpPr/>
           <p:nvPr/>
         </p:nvSpPr>
         <p:spPr>
           <a:xfrm>
             <a:off x="457200" y="1554480"/>
-            <a:ext cx="3383280" cy="4114800"/>
+            <a:ext cx="3657600" cy="4206240"/>
           </a:xfrm>
           <a:prstGeom prst="rect">
             <a:avLst/>
           </a:prstGeom>
           <a:solidFill>
-            <a:srgbClr val="1A1A3E"/>
+            <a:srgbClr val="222222"/>
           </a:solidFill>
           <a:ln>
             <a:noFill/>
@@ -7697,20 +7977,20 @@
       </p:sp>
       <p:sp>
         <p:nvSpPr>
-          <p:cNvPr id="9" name="Rectangle 8"/>
+          <p:cNvPr id="10" name="Rectangle 9"/>
           <p:cNvSpPr/>
           <p:nvPr/>
         </p:nvSpPr>
         <p:spPr>
           <a:xfrm>
             <a:off x="457200" y="1554480"/>
-            <a:ext cx="73152" cy="4114800"/>
+            <a:ext cx="54864" cy="4206240"/>
           </a:xfrm>
           <a:prstGeom prst="rect">
             <a:avLst/>
           </a:prstGeom>
           <a:solidFill>
-            <a:srgbClr val="F0C040"/>
+            <a:srgbClr val="D4A017"/>
           </a:solidFill>
           <a:ln>
             <a:noFill/>
@@ -7740,14 +8020,14 @@
       </p:sp>
       <p:sp>
         <p:nvSpPr>
-          <p:cNvPr id="10" name="TextBox 9"/>
-          <p:cNvSpPr txBox="1"/>
-          <p:nvPr/>
-        </p:nvSpPr>
-        <p:spPr>
-          <a:xfrm>
-            <a:off x="685800" y="1645920"/>
-            <a:ext cx="3017520" cy="411480"/>
+          <p:cNvPr id="11" name="TextBox 10"/>
+          <p:cNvSpPr txBox="1"/>
+          <p:nvPr/>
+        </p:nvSpPr>
+        <p:spPr>
+          <a:xfrm>
+            <a:off x="640080" y="1627632"/>
+            <a:ext cx="3383280" cy="475488"/>
           </a:xfrm>
           <a:prstGeom prst="rect">
             <a:avLst/>
@@ -7762,168 +8042,32 @@
           <a:p>
             <a:pPr algn="l"/>
             <a:r>
-              <a:rPr sz="1500" b="1" i="0">
-                <a:solidFill>
-                  <a:srgbClr val="F0C040"/>
-                </a:solidFill>
-              </a:rPr>
-              <a:t>Data Prep</a:t>
-            </a:r>
-          </a:p>
-        </p:txBody>
-      </p:sp>
-      <p:sp>
-        <p:nvSpPr>
-          <p:cNvPr id="11" name="TextBox 10"/>
-          <p:cNvSpPr txBox="1"/>
-          <p:nvPr/>
-        </p:nvSpPr>
-        <p:spPr>
-          <a:xfrm>
-            <a:off x="594360" y="2148840"/>
-            <a:ext cx="3200400" cy="365760"/>
-          </a:xfrm>
-          <a:prstGeom prst="rect">
-            <a:avLst/>
-          </a:prstGeom>
-          <a:noFill/>
-        </p:spPr>
-        <p:txBody>
-          <a:bodyPr wrap="none">
-            <a:spAutoFit/>
-          </a:bodyPr>
-          <a:lstStyle/>
-          <a:p>
-            <a:pPr algn="l"/>
-            <a:r>
-              <a:rPr sz="1400" b="0" i="0">
-                <a:solidFill>
-                  <a:srgbClr val="CCCCFF"/>
-                </a:solidFill>
-              </a:rPr>
-              <a:t>  ▸  78 card classes</a:t>
-            </a:r>
-          </a:p>
-        </p:txBody>
-      </p:sp>
-      <p:sp>
-        <p:nvSpPr>
-          <p:cNvPr id="12" name="TextBox 11"/>
-          <p:cNvSpPr txBox="1"/>
-          <p:nvPr/>
-        </p:nvSpPr>
-        <p:spPr>
-          <a:xfrm>
-            <a:off x="594360" y="2560320"/>
-            <a:ext cx="3200400" cy="365760"/>
-          </a:xfrm>
-          <a:prstGeom prst="rect">
-            <a:avLst/>
-          </a:prstGeom>
-          <a:noFill/>
-        </p:spPr>
-        <p:txBody>
-          <a:bodyPr wrap="none">
-            <a:spAutoFit/>
-          </a:bodyPr>
-          <a:lstStyle/>
-          <a:p>
-            <a:pPr algn="l"/>
-            <a:r>
-              <a:rPr sz="1400" b="0" i="0">
-                <a:solidFill>
-                  <a:srgbClr val="CCCCFF"/>
-                </a:solidFill>
-              </a:rPr>
-              <a:t>  ▸  ~30 photos / card</a:t>
-            </a:r>
-          </a:p>
-        </p:txBody>
-      </p:sp>
-      <p:sp>
-        <p:nvSpPr>
-          <p:cNvPr id="13" name="TextBox 12"/>
-          <p:cNvSpPr txBox="1"/>
-          <p:nvPr/>
-        </p:nvSpPr>
-        <p:spPr>
-          <a:xfrm>
-            <a:off x="594360" y="2971800"/>
-            <a:ext cx="3200400" cy="365760"/>
-          </a:xfrm>
-          <a:prstGeom prst="rect">
-            <a:avLst/>
-          </a:prstGeom>
-          <a:noFill/>
-        </p:spPr>
-        <p:txBody>
-          <a:bodyPr wrap="none">
-            <a:spAutoFit/>
-          </a:bodyPr>
-          <a:lstStyle/>
-          <a:p>
-            <a:pPr algn="l"/>
-            <a:r>
-              <a:rPr sz="1400" b="0" i="0">
-                <a:solidFill>
-                  <a:srgbClr val="CCCCFF"/>
-                </a:solidFill>
-              </a:rPr>
-              <a:t>  ▸  HEIC / JPG / PNG</a:t>
-            </a:r>
-          </a:p>
-        </p:txBody>
-      </p:sp>
-      <p:sp>
-        <p:nvSpPr>
-          <p:cNvPr id="14" name="TextBox 13"/>
-          <p:cNvSpPr txBox="1"/>
-          <p:nvPr/>
-        </p:nvSpPr>
-        <p:spPr>
-          <a:xfrm>
-            <a:off x="594360" y="3383280"/>
-            <a:ext cx="3200400" cy="365760"/>
-          </a:xfrm>
-          <a:prstGeom prst="rect">
-            <a:avLst/>
-          </a:prstGeom>
-          <a:noFill/>
-        </p:spPr>
-        <p:txBody>
-          <a:bodyPr wrap="none">
-            <a:spAutoFit/>
-          </a:bodyPr>
-          <a:lstStyle/>
-          <a:p>
-            <a:pPr algn="l"/>
-            <a:r>
-              <a:rPr sz="1400" b="0" i="0">
-                <a:solidFill>
-                  <a:srgbClr val="CCCCFF"/>
-                </a:solidFill>
-              </a:rPr>
-              <a:t>  ▸  Split 75/15/10%</a:t>
-            </a:r>
-          </a:p>
-        </p:txBody>
-      </p:sp>
-      <p:sp>
-        <p:nvSpPr>
-          <p:cNvPr id="15" name="Rectangle 14"/>
+              <a:rPr sz="1700" b="1" i="0">
+                <a:solidFill>
+                  <a:srgbClr val="D4A017"/>
+                </a:solidFill>
+              </a:rPr>
+              <a:t>Data Preparation</a:t>
+            </a:r>
+          </a:p>
+        </p:txBody>
+      </p:sp>
+      <p:sp>
+        <p:nvSpPr>
+          <p:cNvPr id="12" name="Rectangle 11"/>
           <p:cNvSpPr/>
           <p:nvPr/>
         </p:nvSpPr>
         <p:spPr>
           <a:xfrm>
-            <a:off x="4114800" y="1554480"/>
-            <a:ext cx="3474720" cy="4114800"/>
+            <a:off x="640080" y="2148840"/>
+            <a:ext cx="3291840" cy="36576"/>
           </a:xfrm>
           <a:prstGeom prst="rect">
             <a:avLst/>
           </a:prstGeom>
           <a:solidFill>
-            <a:srgbClr val="1A1A3E"/>
+            <a:srgbClr val="333333"/>
           </a:solidFill>
           <a:ln>
             <a:noFill/>
@@ -7953,20 +8097,190 @@
       </p:sp>
       <p:sp>
         <p:nvSpPr>
-          <p:cNvPr id="16" name="Rectangle 15"/>
+          <p:cNvPr id="13" name="TextBox 12"/>
+          <p:cNvSpPr txBox="1"/>
+          <p:nvPr/>
+        </p:nvSpPr>
+        <p:spPr>
+          <a:xfrm>
+            <a:off x="548640" y="2267712"/>
+            <a:ext cx="3383280" cy="384048"/>
+          </a:xfrm>
+          <a:prstGeom prst="rect">
+            <a:avLst/>
+          </a:prstGeom>
+          <a:noFill/>
+        </p:spPr>
+        <p:txBody>
+          <a:bodyPr wrap="none">
+            <a:spAutoFit/>
+          </a:bodyPr>
+          <a:lstStyle/>
+          <a:p>
+            <a:pPr algn="l"/>
+            <a:r>
+              <a:rPr sz="1500" b="0" i="0">
+                <a:solidFill>
+                  <a:srgbClr val="CCCCCC"/>
+                </a:solidFill>
+              </a:rPr>
+              <a:t>▸   78 card classes (tarot deck)</a:t>
+            </a:r>
+          </a:p>
+        </p:txBody>
+      </p:sp>
+      <p:sp>
+        <p:nvSpPr>
+          <p:cNvPr id="14" name="TextBox 13"/>
+          <p:cNvSpPr txBox="1"/>
+          <p:nvPr/>
+        </p:nvSpPr>
+        <p:spPr>
+          <a:xfrm>
+            <a:off x="548640" y="2743200"/>
+            <a:ext cx="3383280" cy="384048"/>
+          </a:xfrm>
+          <a:prstGeom prst="rect">
+            <a:avLst/>
+          </a:prstGeom>
+          <a:noFill/>
+        </p:spPr>
+        <p:txBody>
+          <a:bodyPr wrap="none">
+            <a:spAutoFit/>
+          </a:bodyPr>
+          <a:lstStyle/>
+          <a:p>
+            <a:pPr algn="l"/>
+            <a:r>
+              <a:rPr sz="1500" b="0" i="0">
+                <a:solidFill>
+                  <a:srgbClr val="CCCCCC"/>
+                </a:solidFill>
+              </a:rPr>
+              <a:t>▸   ~30 photos per card</a:t>
+            </a:r>
+          </a:p>
+        </p:txBody>
+      </p:sp>
+      <p:sp>
+        <p:nvSpPr>
+          <p:cNvPr id="15" name="TextBox 14"/>
+          <p:cNvSpPr txBox="1"/>
+          <p:nvPr/>
+        </p:nvSpPr>
+        <p:spPr>
+          <a:xfrm>
+            <a:off x="548640" y="3218688"/>
+            <a:ext cx="3383280" cy="384048"/>
+          </a:xfrm>
+          <a:prstGeom prst="rect">
+            <a:avLst/>
+          </a:prstGeom>
+          <a:noFill/>
+        </p:spPr>
+        <p:txBody>
+          <a:bodyPr wrap="none">
+            <a:spAutoFit/>
+          </a:bodyPr>
+          <a:lstStyle/>
+          <a:p>
+            <a:pPr algn="l"/>
+            <a:r>
+              <a:rPr sz="1500" b="0" i="0">
+                <a:solidFill>
+                  <a:srgbClr val="CCCCCC"/>
+                </a:solidFill>
+              </a:rPr>
+              <a:t>▸   HEIC / JPG / PNG formats</a:t>
+            </a:r>
+          </a:p>
+        </p:txBody>
+      </p:sp>
+      <p:sp>
+        <p:nvSpPr>
+          <p:cNvPr id="16" name="TextBox 15"/>
+          <p:cNvSpPr txBox="1"/>
+          <p:nvPr/>
+        </p:nvSpPr>
+        <p:spPr>
+          <a:xfrm>
+            <a:off x="548640" y="3694176"/>
+            <a:ext cx="3383280" cy="384048"/>
+          </a:xfrm>
+          <a:prstGeom prst="rect">
+            <a:avLst/>
+          </a:prstGeom>
+          <a:noFill/>
+        </p:spPr>
+        <p:txBody>
+          <a:bodyPr wrap="none">
+            <a:spAutoFit/>
+          </a:bodyPr>
+          <a:lstStyle/>
+          <a:p>
+            <a:pPr algn="l"/>
+            <a:r>
+              <a:rPr sz="1500" b="0" i="0">
+                <a:solidFill>
+                  <a:srgbClr val="CCCCCC"/>
+                </a:solidFill>
+              </a:rPr>
+              <a:t>▸   Split:  75% / 15% / 10%</a:t>
+            </a:r>
+          </a:p>
+        </p:txBody>
+      </p:sp>
+      <p:sp>
+        <p:nvSpPr>
+          <p:cNvPr id="17" name="TextBox 16"/>
+          <p:cNvSpPr txBox="1"/>
+          <p:nvPr/>
+        </p:nvSpPr>
+        <p:spPr>
+          <a:xfrm>
+            <a:off x="548640" y="4169664"/>
+            <a:ext cx="3383280" cy="384048"/>
+          </a:xfrm>
+          <a:prstGeom prst="rect">
+            <a:avLst/>
+          </a:prstGeom>
+          <a:noFill/>
+        </p:spPr>
+        <p:txBody>
+          <a:bodyPr wrap="none">
+            <a:spAutoFit/>
+          </a:bodyPr>
+          <a:lstStyle/>
+          <a:p>
+            <a:pPr algn="l"/>
+            <a:r>
+              <a:rPr sz="1500" b="0" i="0">
+                <a:solidFill>
+                  <a:srgbClr val="CCCCCC"/>
+                </a:solidFill>
+              </a:rPr>
+              <a:t>▸   Stored in Google Drive</a:t>
+            </a:r>
+          </a:p>
+        </p:txBody>
+      </p:sp>
+      <p:sp>
+        <p:nvSpPr>
+          <p:cNvPr id="18" name="Rectangle 17"/>
           <p:cNvSpPr/>
           <p:nvPr/>
         </p:nvSpPr>
         <p:spPr>
           <a:xfrm>
-            <a:off x="4114800" y="1554480"/>
-            <a:ext cx="73152" cy="4114800"/>
+            <a:off x="4517136" y="1554480"/>
+            <a:ext cx="3657600" cy="4206240"/>
           </a:xfrm>
           <a:prstGeom prst="rect">
             <a:avLst/>
           </a:prstGeom>
           <a:solidFill>
-            <a:srgbClr val="9B59B6"/>
+            <a:srgbClr val="222222"/>
           </a:solidFill>
           <a:ln>
             <a:noFill/>
@@ -7996,224 +8310,20 @@
       </p:sp>
       <p:sp>
         <p:nvSpPr>
-          <p:cNvPr id="17" name="TextBox 16"/>
-          <p:cNvSpPr txBox="1"/>
-          <p:nvPr/>
-        </p:nvSpPr>
-        <p:spPr>
-          <a:xfrm>
-            <a:off x="4343400" y="1645920"/>
-            <a:ext cx="3108960" cy="411480"/>
-          </a:xfrm>
-          <a:prstGeom prst="rect">
-            <a:avLst/>
-          </a:prstGeom>
-          <a:noFill/>
-        </p:spPr>
-        <p:txBody>
-          <a:bodyPr wrap="none">
-            <a:spAutoFit/>
-          </a:bodyPr>
-          <a:lstStyle/>
-          <a:p>
-            <a:pPr algn="l"/>
-            <a:r>
-              <a:rPr sz="1500" b="1" i="0">
-                <a:solidFill>
-                  <a:srgbClr val="9B59B6"/>
-                </a:solidFill>
-              </a:rPr>
-              <a:t>Phase 1  (10 epochs)</a:t>
-            </a:r>
-          </a:p>
-        </p:txBody>
-      </p:sp>
-      <p:sp>
-        <p:nvSpPr>
-          <p:cNvPr id="18" name="TextBox 17"/>
-          <p:cNvSpPr txBox="1"/>
-          <p:nvPr/>
-        </p:nvSpPr>
-        <p:spPr>
-          <a:xfrm>
-            <a:off x="4251960" y="2148840"/>
-            <a:ext cx="3291840" cy="365760"/>
-          </a:xfrm>
-          <a:prstGeom prst="rect">
-            <a:avLst/>
-          </a:prstGeom>
-          <a:noFill/>
-        </p:spPr>
-        <p:txBody>
-          <a:bodyPr wrap="none">
-            <a:spAutoFit/>
-          </a:bodyPr>
-          <a:lstStyle/>
-          <a:p>
-            <a:pPr algn="l"/>
-            <a:r>
-              <a:rPr sz="1400" b="0" i="0">
-                <a:solidFill>
-                  <a:srgbClr val="CCCCFF"/>
-                </a:solidFill>
-              </a:rPr>
-              <a:t>  ▸  Backbone frozen</a:t>
-            </a:r>
-          </a:p>
-        </p:txBody>
-      </p:sp>
-      <p:sp>
-        <p:nvSpPr>
-          <p:cNvPr id="19" name="TextBox 18"/>
-          <p:cNvSpPr txBox="1"/>
-          <p:nvPr/>
-        </p:nvSpPr>
-        <p:spPr>
-          <a:xfrm>
-            <a:off x="4251960" y="2560320"/>
-            <a:ext cx="3291840" cy="365760"/>
-          </a:xfrm>
-          <a:prstGeom prst="rect">
-            <a:avLst/>
-          </a:prstGeom>
-          <a:noFill/>
-        </p:spPr>
-        <p:txBody>
-          <a:bodyPr wrap="none">
-            <a:spAutoFit/>
-          </a:bodyPr>
-          <a:lstStyle/>
-          <a:p>
-            <a:pPr algn="l"/>
-            <a:r>
-              <a:rPr sz="1400" b="0" i="0">
-                <a:solidFill>
-                  <a:srgbClr val="CCCCFF"/>
-                </a:solidFill>
-              </a:rPr>
-              <a:t>  ▸  Train head only</a:t>
-            </a:r>
-          </a:p>
-        </p:txBody>
-      </p:sp>
-      <p:sp>
-        <p:nvSpPr>
-          <p:cNvPr id="20" name="TextBox 19"/>
-          <p:cNvSpPr txBox="1"/>
-          <p:nvPr/>
-        </p:nvSpPr>
-        <p:spPr>
-          <a:xfrm>
-            <a:off x="4251960" y="2971800"/>
-            <a:ext cx="3291840" cy="365760"/>
-          </a:xfrm>
-          <a:prstGeom prst="rect">
-            <a:avLst/>
-          </a:prstGeom>
-          <a:noFill/>
-        </p:spPr>
-        <p:txBody>
-          <a:bodyPr wrap="none">
-            <a:spAutoFit/>
-          </a:bodyPr>
-          <a:lstStyle/>
-          <a:p>
-            <a:pPr algn="l"/>
-            <a:r>
-              <a:rPr sz="1400" b="0" i="0">
-                <a:solidFill>
-                  <a:srgbClr val="CCCCFF"/>
-                </a:solidFill>
-              </a:rPr>
-              <a:t>  ▸  LR = 1e-3</a:t>
-            </a:r>
-          </a:p>
-        </p:txBody>
-      </p:sp>
-      <p:sp>
-        <p:nvSpPr>
-          <p:cNvPr id="21" name="TextBox 20"/>
-          <p:cNvSpPr txBox="1"/>
-          <p:nvPr/>
-        </p:nvSpPr>
-        <p:spPr>
-          <a:xfrm>
-            <a:off x="4251960" y="3383280"/>
-            <a:ext cx="3291840" cy="365760"/>
-          </a:xfrm>
-          <a:prstGeom prst="rect">
-            <a:avLst/>
-          </a:prstGeom>
-          <a:noFill/>
-        </p:spPr>
-        <p:txBody>
-          <a:bodyPr wrap="none">
-            <a:spAutoFit/>
-          </a:bodyPr>
-          <a:lstStyle/>
-          <a:p>
-            <a:pPr algn="l"/>
-            <a:r>
-              <a:rPr sz="1400" b="0" i="0">
-                <a:solidFill>
-                  <a:srgbClr val="CCCCFF"/>
-                </a:solidFill>
-              </a:rPr>
-              <a:t>  ▸  CosineAnnealingLR</a:t>
-            </a:r>
-          </a:p>
-        </p:txBody>
-      </p:sp>
-      <p:sp>
-        <p:nvSpPr>
-          <p:cNvPr id="22" name="TextBox 21"/>
-          <p:cNvSpPr txBox="1"/>
-          <p:nvPr/>
-        </p:nvSpPr>
-        <p:spPr>
-          <a:xfrm>
-            <a:off x="4251960" y="3794760"/>
-            <a:ext cx="3291840" cy="365760"/>
-          </a:xfrm>
-          <a:prstGeom prst="rect">
-            <a:avLst/>
-          </a:prstGeom>
-          <a:noFill/>
-        </p:spPr>
-        <p:txBody>
-          <a:bodyPr wrap="none">
-            <a:spAutoFit/>
-          </a:bodyPr>
-          <a:lstStyle/>
-          <a:p>
-            <a:pPr algn="l"/>
-            <a:r>
-              <a:rPr sz="1400" b="0" i="0">
-                <a:solidFill>
-                  <a:srgbClr val="CCCCFF"/>
-                </a:solidFill>
-              </a:rPr>
-              <a:t>  ▸  Fast convergence</a:t>
-            </a:r>
-          </a:p>
-        </p:txBody>
-      </p:sp>
-      <p:sp>
-        <p:nvSpPr>
-          <p:cNvPr id="23" name="Rectangle 22"/>
+          <p:cNvPr id="19" name="Rectangle 18"/>
           <p:cNvSpPr/>
           <p:nvPr/>
         </p:nvSpPr>
         <p:spPr>
           <a:xfrm>
-            <a:off x="7863840" y="1554480"/>
-            <a:ext cx="3840480" cy="4114800"/>
+            <a:off x="4517136" y="1554480"/>
+            <a:ext cx="54864" cy="4206240"/>
           </a:xfrm>
           <a:prstGeom prst="rect">
             <a:avLst/>
           </a:prstGeom>
           <a:solidFill>
-            <a:srgbClr val="1A1A3E"/>
+            <a:srgbClr val="1ABC9C"/>
           </a:solidFill>
           <a:ln>
             <a:noFill/>
@@ -8243,20 +8353,54 @@
       </p:sp>
       <p:sp>
         <p:nvSpPr>
-          <p:cNvPr id="24" name="Rectangle 23"/>
+          <p:cNvPr id="20" name="TextBox 19"/>
+          <p:cNvSpPr txBox="1"/>
+          <p:nvPr/>
+        </p:nvSpPr>
+        <p:spPr>
+          <a:xfrm>
+            <a:off x="4700016" y="1627632"/>
+            <a:ext cx="3383280" cy="475488"/>
+          </a:xfrm>
+          <a:prstGeom prst="rect">
+            <a:avLst/>
+          </a:prstGeom>
+          <a:noFill/>
+        </p:spPr>
+        <p:txBody>
+          <a:bodyPr wrap="none">
+            <a:spAutoFit/>
+          </a:bodyPr>
+          <a:lstStyle/>
+          <a:p>
+            <a:pPr algn="l"/>
+            <a:r>
+              <a:rPr sz="1700" b="1" i="0">
+                <a:solidFill>
+                  <a:srgbClr val="1ABC9C"/>
+                </a:solidFill>
+              </a:rPr>
+              <a:t>Phase 1  —  10 Epochs</a:t>
+            </a:r>
+          </a:p>
+        </p:txBody>
+      </p:sp>
+      <p:sp>
+        <p:nvSpPr>
+          <p:cNvPr id="21" name="Rectangle 20"/>
           <p:cNvSpPr/>
           <p:nvPr/>
         </p:nvSpPr>
         <p:spPr>
           <a:xfrm>
-            <a:off x="7863840" y="1554480"/>
-            <a:ext cx="73152" cy="4114800"/>
+            <a:off x="4700016" y="2148840"/>
+            <a:ext cx="3291840" cy="36576"/>
           </a:xfrm>
           <a:prstGeom prst="rect">
             <a:avLst/>
           </a:prstGeom>
           <a:solidFill>
-            <a:srgbClr val="2ECC71"/>
+            <a:srgbClr val="333333"/>
           </a:solidFill>
           <a:ln>
             <a:noFill/>
@@ -8286,14 +8430,116 @@
       </p:sp>
       <p:sp>
         <p:nvSpPr>
+          <p:cNvPr id="22" name="TextBox 21"/>
+          <p:cNvSpPr txBox="1"/>
+          <p:nvPr/>
+        </p:nvSpPr>
+        <p:spPr>
+          <a:xfrm>
+            <a:off x="4608576" y="2267712"/>
+            <a:ext cx="3383280" cy="384048"/>
+          </a:xfrm>
+          <a:prstGeom prst="rect">
+            <a:avLst/>
+          </a:prstGeom>
+          <a:noFill/>
+        </p:spPr>
+        <p:txBody>
+          <a:bodyPr wrap="none">
+            <a:spAutoFit/>
+          </a:bodyPr>
+          <a:lstStyle/>
+          <a:p>
+            <a:pPr algn="l"/>
+            <a:r>
+              <a:rPr sz="1500" b="0" i="0">
+                <a:solidFill>
+                  <a:srgbClr val="CCCCCC"/>
+                </a:solidFill>
+              </a:rPr>
+              <a:t>▸   Backbone layers frozen</a:t>
+            </a:r>
+          </a:p>
+        </p:txBody>
+      </p:sp>
+      <p:sp>
+        <p:nvSpPr>
+          <p:cNvPr id="23" name="TextBox 22"/>
+          <p:cNvSpPr txBox="1"/>
+          <p:nvPr/>
+        </p:nvSpPr>
+        <p:spPr>
+          <a:xfrm>
+            <a:off x="4608576" y="2743200"/>
+            <a:ext cx="3383280" cy="384048"/>
+          </a:xfrm>
+          <a:prstGeom prst="rect">
+            <a:avLst/>
+          </a:prstGeom>
+          <a:noFill/>
+        </p:spPr>
+        <p:txBody>
+          <a:bodyPr wrap="none">
+            <a:spAutoFit/>
+          </a:bodyPr>
+          <a:lstStyle/>
+          <a:p>
+            <a:pPr algn="l"/>
+            <a:r>
+              <a:rPr sz="1500" b="0" i="0">
+                <a:solidFill>
+                  <a:srgbClr val="CCCCCC"/>
+                </a:solidFill>
+              </a:rPr>
+              <a:t>▸   Train classifier head only</a:t>
+            </a:r>
+          </a:p>
+        </p:txBody>
+      </p:sp>
+      <p:sp>
+        <p:nvSpPr>
+          <p:cNvPr id="24" name="TextBox 23"/>
+          <p:cNvSpPr txBox="1"/>
+          <p:nvPr/>
+        </p:nvSpPr>
+        <p:spPr>
+          <a:xfrm>
+            <a:off x="4608576" y="3218688"/>
+            <a:ext cx="3383280" cy="384048"/>
+          </a:xfrm>
+          <a:prstGeom prst="rect">
+            <a:avLst/>
+          </a:prstGeom>
+          <a:noFill/>
+        </p:spPr>
+        <p:txBody>
+          <a:bodyPr wrap="none">
+            <a:spAutoFit/>
+          </a:bodyPr>
+          <a:lstStyle/>
+          <a:p>
+            <a:pPr algn="l"/>
+            <a:r>
+              <a:rPr sz="1500" b="0" i="0">
+                <a:solidFill>
+                  <a:srgbClr val="CCCCCC"/>
+                </a:solidFill>
+              </a:rPr>
+              <a:t>▸   Learning rate:  1e-3</a:t>
+            </a:r>
+          </a:p>
+        </p:txBody>
+      </p:sp>
+      <p:sp>
+        <p:nvSpPr>
           <p:cNvPr id="25" name="TextBox 24"/>
           <p:cNvSpPr txBox="1"/>
           <p:nvPr/>
         </p:nvSpPr>
         <p:spPr>
           <a:xfrm>
-            <a:off x="8092440" y="1645920"/>
-            <a:ext cx="3474720" cy="411480"/>
+            <a:off x="4608576" y="3694176"/>
+            <a:ext cx="3383280" cy="384048"/>
           </a:xfrm>
           <a:prstGeom prst="rect">
             <a:avLst/>
@@ -8308,12 +8554,12 @@
           <a:p>
             <a:pPr algn="l"/>
             <a:r>
-              <a:rPr sz="1500" b="1" i="0">
-                <a:solidFill>
-                  <a:srgbClr val="2ECC71"/>
-                </a:solidFill>
-              </a:rPr>
-              <a:t>Phase 2  (20 epochs)</a:t>
+              <a:rPr sz="1500" b="0" i="0">
+                <a:solidFill>
+                  <a:srgbClr val="CCCCCC"/>
+                </a:solidFill>
+              </a:rPr>
+              <a:t>▸   Optimizer:  Adam</a:t>
             </a:r>
           </a:p>
         </p:txBody>
@@ -8326,8 +8572,8 @@
         </p:nvSpPr>
         <p:spPr>
           <a:xfrm>
-            <a:off x="8001000" y="2148840"/>
-            <a:ext cx="3566160" cy="365760"/>
+            <a:off x="4608576" y="4169664"/>
+            <a:ext cx="3383280" cy="384048"/>
           </a:xfrm>
           <a:prstGeom prst="rect">
             <a:avLst/>
@@ -8342,26 +8588,112 @@
           <a:p>
             <a:pPr algn="l"/>
             <a:r>
-              <a:rPr sz="1400" b="0" i="0">
-                <a:solidFill>
-                  <a:srgbClr val="CCCCFF"/>
-                </a:solidFill>
-              </a:rPr>
-              <a:t>  ▸  Backbone unfrozen</a:t>
-            </a:r>
-          </a:p>
-        </p:txBody>
-      </p:sp>
-      <p:sp>
-        <p:nvSpPr>
-          <p:cNvPr id="27" name="TextBox 26"/>
-          <p:cNvSpPr txBox="1"/>
-          <p:nvPr/>
-        </p:nvSpPr>
-        <p:spPr>
-          <a:xfrm>
-            <a:off x="8001000" y="2560320"/>
-            <a:ext cx="3566160" cy="365760"/>
+              <a:rPr sz="1500" b="0" i="0">
+                <a:solidFill>
+                  <a:srgbClr val="CCCCCC"/>
+                </a:solidFill>
+              </a:rPr>
+              <a:t>▸   Scheduler:  CosineAnnealing</a:t>
+            </a:r>
+          </a:p>
+        </p:txBody>
+      </p:sp>
+      <p:sp>
+        <p:nvSpPr>
+          <p:cNvPr id="27" name="Rectangle 26"/>
+          <p:cNvSpPr/>
+          <p:nvPr/>
+        </p:nvSpPr>
+        <p:spPr>
+          <a:xfrm>
+            <a:off x="8577072" y="1554480"/>
+            <a:ext cx="3657600" cy="4206240"/>
+          </a:xfrm>
+          <a:prstGeom prst="rect">
+            <a:avLst/>
+          </a:prstGeom>
+          <a:solidFill>
+            <a:srgbClr val="222222"/>
+          </a:solidFill>
+          <a:ln>
+            <a:noFill/>
+          </a:ln>
+        </p:spPr>
+        <p:style>
+          <a:lnRef idx="1">
+            <a:schemeClr val="accent1"/>
+          </a:lnRef>
+          <a:fillRef idx="3">
+            <a:schemeClr val="accent1"/>
+          </a:fillRef>
+          <a:effectRef idx="2">
+            <a:schemeClr val="accent1"/>
+          </a:effectRef>
+          <a:fontRef idx="minor">
+            <a:schemeClr val="lt1"/>
+          </a:fontRef>
+        </p:style>
+        <p:txBody>
+          <a:bodyPr rtlCol="0" anchor="ctr"/>
+          <a:lstStyle/>
+          <a:p>
+            <a:pPr algn="ctr"/>
+          </a:p>
+        </p:txBody>
+      </p:sp>
+      <p:sp>
+        <p:nvSpPr>
+          <p:cNvPr id="28" name="Rectangle 27"/>
+          <p:cNvSpPr/>
+          <p:nvPr/>
+        </p:nvSpPr>
+        <p:spPr>
+          <a:xfrm>
+            <a:off x="8577072" y="1554480"/>
+            <a:ext cx="54864" cy="4206240"/>
+          </a:xfrm>
+          <a:prstGeom prst="rect">
+            <a:avLst/>
+          </a:prstGeom>
+          <a:solidFill>
+            <a:srgbClr val="27AE60"/>
+          </a:solidFill>
+          <a:ln>
+            <a:noFill/>
+          </a:ln>
+        </p:spPr>
+        <p:style>
+          <a:lnRef idx="1">
+            <a:schemeClr val="accent1"/>
+          </a:lnRef>
+          <a:fillRef idx="3">
+            <a:schemeClr val="accent1"/>
+          </a:fillRef>
+          <a:effectRef idx="2">
+            <a:schemeClr val="accent1"/>
+          </a:effectRef>
+          <a:fontRef idx="minor">
+            <a:schemeClr val="lt1"/>
+          </a:fontRef>
+        </p:style>
+        <p:txBody>
+          <a:bodyPr rtlCol="0" anchor="ctr"/>
+          <a:lstStyle/>
+          <a:p>
+            <a:pPr algn="ctr"/>
+          </a:p>
+        </p:txBody>
+      </p:sp>
+      <p:sp>
+        <p:nvSpPr>
+          <p:cNvPr id="29" name="TextBox 28"/>
+          <p:cNvSpPr txBox="1"/>
+          <p:nvPr/>
+        </p:nvSpPr>
+        <p:spPr>
+          <a:xfrm>
+            <a:off x="8759952" y="1627632"/>
+            <a:ext cx="3383280" cy="475488"/>
           </a:xfrm>
           <a:prstGeom prst="rect">
             <a:avLst/>
@@ -8376,26 +8708,69 @@
           <a:p>
             <a:pPr algn="l"/>
             <a:r>
-              <a:rPr sz="1400" b="0" i="0">
-                <a:solidFill>
-                  <a:srgbClr val="CCCCFF"/>
-                </a:solidFill>
-              </a:rPr>
-              <a:t>  ▸  Fine-tune all layers</a:t>
-            </a:r>
-          </a:p>
-        </p:txBody>
-      </p:sp>
-      <p:sp>
-        <p:nvSpPr>
-          <p:cNvPr id="28" name="TextBox 27"/>
-          <p:cNvSpPr txBox="1"/>
-          <p:nvPr/>
-        </p:nvSpPr>
-        <p:spPr>
-          <a:xfrm>
-            <a:off x="8001000" y="2971800"/>
-            <a:ext cx="3566160" cy="365760"/>
+              <a:rPr sz="1700" b="1" i="0">
+                <a:solidFill>
+                  <a:srgbClr val="27AE60"/>
+                </a:solidFill>
+              </a:rPr>
+              <a:t>Phase 2  —  20 Epochs</a:t>
+            </a:r>
+          </a:p>
+        </p:txBody>
+      </p:sp>
+      <p:sp>
+        <p:nvSpPr>
+          <p:cNvPr id="30" name="Rectangle 29"/>
+          <p:cNvSpPr/>
+          <p:nvPr/>
+        </p:nvSpPr>
+        <p:spPr>
+          <a:xfrm>
+            <a:off x="8759952" y="2148840"/>
+            <a:ext cx="3291840" cy="36576"/>
+          </a:xfrm>
+          <a:prstGeom prst="rect">
+            <a:avLst/>
+          </a:prstGeom>
+          <a:solidFill>
+            <a:srgbClr val="333333"/>
+          </a:solidFill>
+          <a:ln>
+            <a:noFill/>
+          </a:ln>
+        </p:spPr>
+        <p:style>
+          <a:lnRef idx="1">
+            <a:schemeClr val="accent1"/>
+          </a:lnRef>
+          <a:fillRef idx="3">
+            <a:schemeClr val="accent1"/>
+          </a:fillRef>
+          <a:effectRef idx="2">
+            <a:schemeClr val="accent1"/>
+          </a:effectRef>
+          <a:fontRef idx="minor">
+            <a:schemeClr val="lt1"/>
+          </a:fontRef>
+        </p:style>
+        <p:txBody>
+          <a:bodyPr rtlCol="0" anchor="ctr"/>
+          <a:lstStyle/>
+          <a:p>
+            <a:pPr algn="ctr"/>
+          </a:p>
+        </p:txBody>
+      </p:sp>
+      <p:sp>
+        <p:nvSpPr>
+          <p:cNvPr id="31" name="TextBox 30"/>
+          <p:cNvSpPr txBox="1"/>
+          <p:nvPr/>
+        </p:nvSpPr>
+        <p:spPr>
+          <a:xfrm>
+            <a:off x="8668512" y="2267712"/>
+            <a:ext cx="3383280" cy="384048"/>
           </a:xfrm>
           <a:prstGeom prst="rect">
             <a:avLst/>
@@ -8410,26 +8785,26 @@
           <a:p>
             <a:pPr algn="l"/>
             <a:r>
-              <a:rPr sz="1400" b="0" i="0">
-                <a:solidFill>
-                  <a:srgbClr val="CCCCFF"/>
-                </a:solidFill>
-              </a:rPr>
-              <a:t>  ▸  LR = 1e-4</a:t>
-            </a:r>
-          </a:p>
-        </p:txBody>
-      </p:sp>
-      <p:sp>
-        <p:nvSpPr>
-          <p:cNvPr id="29" name="TextBox 28"/>
-          <p:cNvSpPr txBox="1"/>
-          <p:nvPr/>
-        </p:nvSpPr>
-        <p:spPr>
-          <a:xfrm>
-            <a:off x="8001000" y="3383280"/>
-            <a:ext cx="3566160" cy="365760"/>
+              <a:rPr sz="1500" b="0" i="0">
+                <a:solidFill>
+                  <a:srgbClr val="CCCCCC"/>
+                </a:solidFill>
+              </a:rPr>
+              <a:t>▸   All layers unfrozen</a:t>
+            </a:r>
+          </a:p>
+        </p:txBody>
+      </p:sp>
+      <p:sp>
+        <p:nvSpPr>
+          <p:cNvPr id="32" name="TextBox 31"/>
+          <p:cNvSpPr txBox="1"/>
+          <p:nvPr/>
+        </p:nvSpPr>
+        <p:spPr>
+          <a:xfrm>
+            <a:off x="8668512" y="2743200"/>
+            <a:ext cx="3383280" cy="384048"/>
           </a:xfrm>
           <a:prstGeom prst="rect">
             <a:avLst/>
@@ -8444,26 +8819,26 @@
           <a:p>
             <a:pPr algn="l"/>
             <a:r>
-              <a:rPr sz="1400" b="0" i="0">
-                <a:solidFill>
-                  <a:srgbClr val="CCCCFF"/>
-                </a:solidFill>
-              </a:rPr>
-              <a:t>  ▸  Weight decay 1e-4</a:t>
-            </a:r>
-          </a:p>
-        </p:txBody>
-      </p:sp>
-      <p:sp>
-        <p:nvSpPr>
-          <p:cNvPr id="30" name="TextBox 29"/>
-          <p:cNvSpPr txBox="1"/>
-          <p:nvPr/>
-        </p:nvSpPr>
-        <p:spPr>
-          <a:xfrm>
-            <a:off x="8001000" y="3794760"/>
-            <a:ext cx="3566160" cy="365760"/>
+              <a:rPr sz="1500" b="0" i="0">
+                <a:solidFill>
+                  <a:srgbClr val="CCCCCC"/>
+                </a:solidFill>
+              </a:rPr>
+              <a:t>▸   Fine-tune full network</a:t>
+            </a:r>
+          </a:p>
+        </p:txBody>
+      </p:sp>
+      <p:sp>
+        <p:nvSpPr>
+          <p:cNvPr id="33" name="TextBox 32"/>
+          <p:cNvSpPr txBox="1"/>
+          <p:nvPr/>
+        </p:nvSpPr>
+        <p:spPr>
+          <a:xfrm>
+            <a:off x="8668512" y="3218688"/>
+            <a:ext cx="3383280" cy="384048"/>
           </a:xfrm>
           <a:prstGeom prst="rect">
             <a:avLst/>
@@ -8478,26 +8853,26 @@
           <a:p>
             <a:pPr algn="l"/>
             <a:r>
-              <a:rPr sz="1400" b="0" i="0">
-                <a:solidFill>
-                  <a:srgbClr val="CCCCFF"/>
-                </a:solidFill>
-              </a:rPr>
-              <a:t>  ▸  Best model saved</a:t>
-            </a:r>
-          </a:p>
-        </p:txBody>
-      </p:sp>
-      <p:sp>
-        <p:nvSpPr>
-          <p:cNvPr id="31" name="TextBox 30"/>
-          <p:cNvSpPr txBox="1"/>
-          <p:nvPr/>
-        </p:nvSpPr>
-        <p:spPr>
-          <a:xfrm>
-            <a:off x="457200" y="5943600"/>
-            <a:ext cx="11247120" cy="411480"/>
+              <a:rPr sz="1500" b="0" i="0">
+                <a:solidFill>
+                  <a:srgbClr val="CCCCCC"/>
+                </a:solidFill>
+              </a:rPr>
+              <a:t>▸   Learning rate:  1e-4</a:t>
+            </a:r>
+          </a:p>
+        </p:txBody>
+      </p:sp>
+      <p:sp>
+        <p:nvSpPr>
+          <p:cNvPr id="34" name="TextBox 33"/>
+          <p:cNvSpPr txBox="1"/>
+          <p:nvPr/>
+        </p:nvSpPr>
+        <p:spPr>
+          <a:xfrm>
+            <a:off x="8668512" y="3694176"/>
+            <a:ext cx="3383280" cy="384048"/>
           </a:xfrm>
           <a:prstGeom prst="rect">
             <a:avLst/>
@@ -8512,12 +8887,123 @@
           <a:p>
             <a:pPr algn="l"/>
             <a:r>
-              <a:rPr sz="1300" b="0" i="1">
-                <a:solidFill>
-                  <a:srgbClr val="F0C040"/>
-                </a:solidFill>
-              </a:rPr>
-              <a:t>Augmentation: Resize → RandomCrop → Flip → Rotate ±15° → ColorJitter → Normalize</a:t>
+              <a:rPr sz="1500" b="0" i="0">
+                <a:solidFill>
+                  <a:srgbClr val="CCCCCC"/>
+                </a:solidFill>
+              </a:rPr>
+              <a:t>▸   Weight decay:  1e-4</a:t>
+            </a:r>
+          </a:p>
+        </p:txBody>
+      </p:sp>
+      <p:sp>
+        <p:nvSpPr>
+          <p:cNvPr id="35" name="TextBox 34"/>
+          <p:cNvSpPr txBox="1"/>
+          <p:nvPr/>
+        </p:nvSpPr>
+        <p:spPr>
+          <a:xfrm>
+            <a:off x="8668512" y="4169664"/>
+            <a:ext cx="3383280" cy="384048"/>
+          </a:xfrm>
+          <a:prstGeom prst="rect">
+            <a:avLst/>
+          </a:prstGeom>
+          <a:noFill/>
+        </p:spPr>
+        <p:txBody>
+          <a:bodyPr wrap="none">
+            <a:spAutoFit/>
+          </a:bodyPr>
+          <a:lstStyle/>
+          <a:p>
+            <a:pPr algn="l"/>
+            <a:r>
+              <a:rPr sz="1500" b="0" i="0">
+                <a:solidFill>
+                  <a:srgbClr val="CCCCCC"/>
+                </a:solidFill>
+              </a:rPr>
+              <a:t>▸   Best model auto-saved</a:t>
+            </a:r>
+          </a:p>
+        </p:txBody>
+      </p:sp>
+      <p:sp>
+        <p:nvSpPr>
+          <p:cNvPr id="36" name="Rectangle 35"/>
+          <p:cNvSpPr/>
+          <p:nvPr/>
+        </p:nvSpPr>
+        <p:spPr>
+          <a:xfrm>
+            <a:off x="457200" y="5989320"/>
+            <a:ext cx="11274552" cy="548640"/>
+          </a:xfrm>
+          <a:prstGeom prst="rect">
+            <a:avLst/>
+          </a:prstGeom>
+          <a:solidFill>
+            <a:srgbClr val="222222"/>
+          </a:solidFill>
+          <a:ln>
+            <a:noFill/>
+          </a:ln>
+        </p:spPr>
+        <p:style>
+          <a:lnRef idx="1">
+            <a:schemeClr val="accent1"/>
+          </a:lnRef>
+          <a:fillRef idx="3">
+            <a:schemeClr val="accent1"/>
+          </a:fillRef>
+          <a:effectRef idx="2">
+            <a:schemeClr val="accent1"/>
+          </a:effectRef>
+          <a:fontRef idx="minor">
+            <a:schemeClr val="lt1"/>
+          </a:fontRef>
+        </p:style>
+        <p:txBody>
+          <a:bodyPr rtlCol="0" anchor="ctr"/>
+          <a:lstStyle/>
+          <a:p>
+            <a:pPr algn="ctr"/>
+          </a:p>
+        </p:txBody>
+      </p:sp>
+      <p:sp>
+        <p:nvSpPr>
+          <p:cNvPr id="37" name="TextBox 36"/>
+          <p:cNvSpPr txBox="1"/>
+          <p:nvPr/>
+        </p:nvSpPr>
+        <p:spPr>
+          <a:xfrm>
+            <a:off x="640080" y="6035040"/>
+            <a:ext cx="10881360" cy="457200"/>
+          </a:xfrm>
+          <a:prstGeom prst="rect">
+            <a:avLst/>
+          </a:prstGeom>
+          <a:noFill/>
+        </p:spPr>
+        <p:txBody>
+          <a:bodyPr wrap="none">
+            <a:spAutoFit/>
+          </a:bodyPr>
+          <a:lstStyle/>
+          <a:p>
+            <a:pPr algn="ctr"/>
+            <a:r>
+              <a:rPr sz="1500" b="0" i="0">
+                <a:solidFill>
+                  <a:srgbClr val="1ABC9C"/>
+                </a:solidFill>
+              </a:rPr>
+              <a:t>Augmentation:   Resize  →  RandomCrop  →  Horizontal Flip  →  Rotate ±15°  →  ColorJitter  →  Normalize</a:t>
             </a:r>
           </a:p>
         </p:txBody>
@@ -8536,7 +9022,7 @@
     <p:bg>
       <p:bgPr>
         <a:solidFill>
-          <a:srgbClr val="0D0D2B"/>
+          <a:srgbClr val="141414"/>
         </a:solidFill>
         <a:effectLst/>
       </p:bgPr>
@@ -8557,13 +9043,13 @@
         <p:spPr>
           <a:xfrm>
             <a:off x="0" y="0"/>
-            <a:ext cx="12188952" cy="109728"/>
+            <a:ext cx="12188952" cy="91440"/>
           </a:xfrm>
           <a:prstGeom prst="rect">
             <a:avLst/>
           </a:prstGeom>
           <a:solidFill>
-            <a:srgbClr val="F0C040"/>
+            <a:srgbClr val="D4A017"/>
           </a:solidFill>
           <a:ln>
             <a:noFill/>
@@ -8599,14 +9085,14 @@
         </p:nvSpPr>
         <p:spPr>
           <a:xfrm>
-            <a:off x="0" y="6748272"/>
-            <a:ext cx="12188952" cy="109728"/>
+            <a:off x="0" y="6766560"/>
+            <a:ext cx="12188952" cy="91440"/>
           </a:xfrm>
           <a:prstGeom prst="rect">
             <a:avLst/>
           </a:prstGeom>
           <a:solidFill>
-            <a:srgbClr val="9B59B6"/>
+            <a:srgbClr val="1ABC9C"/>
           </a:solidFill>
           <a:ln>
             <a:noFill/>
@@ -8636,20 +9122,54 @@
       </p:sp>
       <p:sp>
         <p:nvSpPr>
-          <p:cNvPr id="4" name="Rectangle 3"/>
+          <p:cNvPr id="4" name="TextBox 3"/>
+          <p:cNvSpPr txBox="1"/>
+          <p:nvPr/>
+        </p:nvSpPr>
+        <p:spPr>
+          <a:xfrm>
+            <a:off x="0" y="6766560"/>
+            <a:ext cx="12188952" cy="91440"/>
+          </a:xfrm>
+          <a:prstGeom prst="rect">
+            <a:avLst/>
+          </a:prstGeom>
+          <a:noFill/>
+        </p:spPr>
+        <p:txBody>
+          <a:bodyPr wrap="none">
+            <a:spAutoFit/>
+          </a:bodyPr>
+          <a:lstStyle/>
+          <a:p>
+            <a:pPr algn="ctr"/>
+            <a:r>
+              <a:rPr sz="900" b="0" i="0">
+                <a:solidFill>
+                  <a:srgbClr val="888888"/>
+                </a:solidFill>
+              </a:rPr>
+              <a:t>Fortune Teller  ·  AI Tarot Card Recognition  ·  2026</a:t>
+            </a:r>
+          </a:p>
+        </p:txBody>
+      </p:sp>
+      <p:sp>
+        <p:nvSpPr>
+          <p:cNvPr id="5" name="Rectangle 4"/>
           <p:cNvSpPr/>
           <p:nvPr/>
         </p:nvSpPr>
         <p:spPr>
           <a:xfrm>
-            <a:off x="457200" y="228600"/>
-            <a:ext cx="1645920" cy="292608"/>
+            <a:off x="457200" y="201168"/>
+            <a:ext cx="1010412" cy="301752"/>
           </a:xfrm>
           <a:prstGeom prst="rect">
             <a:avLst/>
           </a:prstGeom>
           <a:solidFill>
-            <a:srgbClr val="9B59B6"/>
+            <a:srgbClr val="1ABC9C"/>
           </a:solidFill>
           <a:ln>
             <a:noFill/>
@@ -8679,67 +9199,67 @@
       </p:sp>
       <p:sp>
         <p:nvSpPr>
-          <p:cNvPr id="5" name="TextBox 4"/>
-          <p:cNvSpPr txBox="1"/>
-          <p:nvPr/>
-        </p:nvSpPr>
-        <p:spPr>
-          <a:xfrm>
-            <a:off x="502920" y="246888"/>
-            <a:ext cx="1554480" cy="274320"/>
-          </a:xfrm>
-          <a:prstGeom prst="rect">
-            <a:avLst/>
-          </a:prstGeom>
-          <a:noFill/>
-        </p:spPr>
-        <p:txBody>
-          <a:bodyPr wrap="none">
-            <a:spAutoFit/>
-          </a:bodyPr>
-          <a:lstStyle/>
-          <a:p>
-            <a:pPr algn="ctr"/>
-            <a:r>
-              <a:rPr sz="1000" b="1" i="0">
+          <p:cNvPr id="6" name="TextBox 5"/>
+          <p:cNvSpPr txBox="1"/>
+          <p:nvPr/>
+        </p:nvSpPr>
+        <p:spPr>
+          <a:xfrm>
+            <a:off x="530352" y="237744"/>
+            <a:ext cx="873252" cy="256032"/>
+          </a:xfrm>
+          <a:prstGeom prst="rect">
+            <a:avLst/>
+          </a:prstGeom>
+          <a:noFill/>
+        </p:spPr>
+        <p:txBody>
+          <a:bodyPr wrap="none">
+            <a:spAutoFit/>
+          </a:bodyPr>
+          <a:lstStyle/>
+          <a:p>
+            <a:pPr algn="l"/>
+            <a:r>
+              <a:rPr sz="1100" b="1" i="0">
+                <a:solidFill>
+                  <a:srgbClr val="141414"/>
+                </a:solidFill>
+              </a:rPr>
+              <a:t>ROADMAP</a:t>
+            </a:r>
+          </a:p>
+        </p:txBody>
+      </p:sp>
+      <p:sp>
+        <p:nvSpPr>
+          <p:cNvPr id="7" name="TextBox 6"/>
+          <p:cNvSpPr txBox="1"/>
+          <p:nvPr/>
+        </p:nvSpPr>
+        <p:spPr>
+          <a:xfrm>
+            <a:off x="457200" y="594360"/>
+            <a:ext cx="10972800" cy="685800"/>
+          </a:xfrm>
+          <a:prstGeom prst="rect">
+            <a:avLst/>
+          </a:prstGeom>
+          <a:noFill/>
+        </p:spPr>
+        <p:txBody>
+          <a:bodyPr wrap="none">
+            <a:spAutoFit/>
+          </a:bodyPr>
+          <a:lstStyle/>
+          <a:p>
+            <a:pPr algn="l"/>
+            <a:r>
+              <a:rPr sz="3400" b="1" i="0">
                 <a:solidFill>
                   <a:srgbClr val="FFFFFF"/>
                 </a:solidFill>
               </a:rPr>
-              <a:t>ROADMAP</a:t>
-            </a:r>
-          </a:p>
-        </p:txBody>
-      </p:sp>
-      <p:sp>
-        <p:nvSpPr>
-          <p:cNvPr id="6" name="TextBox 5"/>
-          <p:cNvSpPr txBox="1"/>
-          <p:nvPr/>
-        </p:nvSpPr>
-        <p:spPr>
-          <a:xfrm>
-            <a:off x="457200" y="640080"/>
-            <a:ext cx="9144000" cy="640080"/>
-          </a:xfrm>
-          <a:prstGeom prst="rect">
-            <a:avLst/>
-          </a:prstGeom>
-          <a:noFill/>
-        </p:spPr>
-        <p:txBody>
-          <a:bodyPr wrap="none">
-            <a:spAutoFit/>
-          </a:bodyPr>
-          <a:lstStyle/>
-          <a:p>
-            <a:pPr algn="l"/>
-            <a:r>
-              <a:rPr sz="3200" b="1" i="0">
-                <a:solidFill>
-                  <a:srgbClr val="F0C040"/>
-                </a:solidFill>
-              </a:rPr>
               <a:t>Project Roadmap</a:t>
             </a:r>
           </a:p>
@@ -8747,20 +9267,20 @@
       </p:sp>
       <p:sp>
         <p:nvSpPr>
-          <p:cNvPr id="7" name="Rectangle 6"/>
+          <p:cNvPr id="8" name="Rectangle 7"/>
           <p:cNvSpPr/>
           <p:nvPr/>
         </p:nvSpPr>
         <p:spPr>
           <a:xfrm>
-            <a:off x="457200" y="1371600"/>
+            <a:off x="457200" y="1389888"/>
             <a:ext cx="11274552" cy="36576"/>
           </a:xfrm>
           <a:prstGeom prst="rect">
             <a:avLst/>
           </a:prstGeom>
           <a:solidFill>
-            <a:srgbClr val="9B59B6"/>
+            <a:srgbClr val="1ABC9C"/>
           </a:solidFill>
           <a:ln>
             <a:noFill/>
@@ -8790,20 +9310,20 @@
       </p:sp>
       <p:sp>
         <p:nvSpPr>
-          <p:cNvPr id="8" name="Rectangle 7"/>
+          <p:cNvPr id="9" name="Rectangle 8"/>
           <p:cNvSpPr/>
           <p:nvPr/>
         </p:nvSpPr>
         <p:spPr>
           <a:xfrm>
-            <a:off x="457200" y="1600200"/>
-            <a:ext cx="1371600" cy="685800"/>
+            <a:off x="457200" y="1572768"/>
+            <a:ext cx="1463040" cy="685800"/>
           </a:xfrm>
           <a:prstGeom prst="rect">
             <a:avLst/>
           </a:prstGeom>
           <a:solidFill>
-            <a:srgbClr val="F0C040"/>
+            <a:srgbClr val="D4A017"/>
           </a:solidFill>
           <a:ln>
             <a:noFill/>
@@ -8833,31 +9353,31 @@
       </p:sp>
       <p:sp>
         <p:nvSpPr>
-          <p:cNvPr id="9" name="TextBox 8"/>
+          <p:cNvPr id="10" name="TextBox 9"/>
           <p:cNvSpPr txBox="1"/>
           <p:nvPr/>
         </p:nvSpPr>
         <p:spPr>
           <a:xfrm>
             <a:off x="457200" y="1737360"/>
-            <a:ext cx="1371600" cy="411480"/>
-          </a:xfrm>
-          <a:prstGeom prst="rect">
-            <a:avLst/>
-          </a:prstGeom>
-          <a:noFill/>
-        </p:spPr>
-        <p:txBody>
-          <a:bodyPr wrap="none">
-            <a:spAutoFit/>
-          </a:bodyPr>
-          <a:lstStyle/>
-          <a:p>
-            <a:pPr algn="ctr"/>
-            <a:r>
-              <a:rPr sz="1300" b="1" i="0">
-                <a:solidFill>
-                  <a:srgbClr val="0D0D2B"/>
+            <a:ext cx="1463040" cy="384048"/>
+          </a:xfrm>
+          <a:prstGeom prst="rect">
+            <a:avLst/>
+          </a:prstGeom>
+          <a:noFill/>
+        </p:spPr>
+        <p:txBody>
+          <a:bodyPr wrap="none">
+            <a:spAutoFit/>
+          </a:bodyPr>
+          <a:lstStyle/>
+          <a:p>
+            <a:pPr algn="ctr"/>
+            <a:r>
+              <a:rPr sz="1400" b="1" i="0">
+                <a:solidFill>
+                  <a:srgbClr val="141414"/>
                 </a:solidFill>
               </a:rPr>
               <a:t>Phase 1</a:t>
@@ -8867,20 +9387,20 @@
       </p:sp>
       <p:sp>
         <p:nvSpPr>
-          <p:cNvPr id="10" name="Rectangle 9"/>
+          <p:cNvPr id="11" name="Rectangle 10"/>
           <p:cNvSpPr/>
           <p:nvPr/>
         </p:nvSpPr>
         <p:spPr>
           <a:xfrm>
-            <a:off x="2011680" y="1600200"/>
-            <a:ext cx="9692640" cy="685800"/>
+            <a:off x="2103120" y="1572768"/>
+            <a:ext cx="9601200" cy="685800"/>
           </a:xfrm>
           <a:prstGeom prst="rect">
             <a:avLst/>
           </a:prstGeom>
           <a:solidFill>
-            <a:srgbClr val="1A1A3E"/>
+            <a:srgbClr val="222222"/>
           </a:solidFill>
           <a:ln>
             <a:noFill/>
@@ -8910,14 +9430,14 @@
       </p:sp>
       <p:sp>
         <p:nvSpPr>
-          <p:cNvPr id="11" name="TextBox 10"/>
-          <p:cNvSpPr txBox="1"/>
-          <p:nvPr/>
-        </p:nvSpPr>
-        <p:spPr>
-          <a:xfrm>
-            <a:off x="2194560" y="1618488"/>
-            <a:ext cx="3657600" cy="347472"/>
+          <p:cNvPr id="12" name="TextBox 11"/>
+          <p:cNvSpPr txBox="1"/>
+          <p:nvPr/>
+        </p:nvSpPr>
+        <p:spPr>
+          <a:xfrm>
+            <a:off x="2286000" y="1609344"/>
+            <a:ext cx="5943600" cy="347472"/>
           </a:xfrm>
           <a:prstGeom prst="rect">
             <a:avLst/>
@@ -8932,9 +9452,9 @@
           <a:p>
             <a:pPr algn="l"/>
             <a:r>
-              <a:rPr sz="1500" b="1" i="0">
-                <a:solidFill>
-                  <a:srgbClr val="F0C040"/>
+              <a:rPr sz="1700" b="1" i="0">
+                <a:solidFill>
+                  <a:srgbClr val="D4A017"/>
                 </a:solidFill>
               </a:rPr>
               <a:t>Data Collection</a:t>
@@ -8944,14 +9464,14 @@
       </p:sp>
       <p:sp>
         <p:nvSpPr>
-          <p:cNvPr id="12" name="TextBox 11"/>
-          <p:cNvSpPr txBox="1"/>
-          <p:nvPr/>
-        </p:nvSpPr>
-        <p:spPr>
-          <a:xfrm>
-            <a:off x="2194560" y="1947672"/>
-            <a:ext cx="6400800" cy="320040"/>
+          <p:cNvPr id="13" name="TextBox 12"/>
+          <p:cNvSpPr txBox="1"/>
+          <p:nvPr/>
+        </p:nvSpPr>
+        <p:spPr>
+          <a:xfrm>
+            <a:off x="2286000" y="1956816"/>
+            <a:ext cx="7315200" cy="320040"/>
           </a:xfrm>
           <a:prstGeom prst="rect">
             <a:avLst/>
@@ -8966,47 +9486,12 @@
           <a:p>
             <a:pPr algn="l"/>
             <a:r>
-              <a:rPr sz="1200" b="0" i="0">
-                <a:solidFill>
-                  <a:srgbClr val="CCCCFF"/>
-                </a:solidFill>
-              </a:rPr>
-              <a:t>Photograph all 78 tarot cards
-~30 photos per card, HEIC/JPG</a:t>
-            </a:r>
-          </a:p>
-        </p:txBody>
-      </p:sp>
-      <p:sp>
-        <p:nvSpPr>
-          <p:cNvPr id="13" name="TextBox 12"/>
-          <p:cNvSpPr txBox="1"/>
-          <p:nvPr/>
-        </p:nvSpPr>
-        <p:spPr>
-          <a:xfrm>
-            <a:off x="9144000" y="1783080"/>
-            <a:ext cx="2377440" cy="320040"/>
-          </a:xfrm>
-          <a:prstGeom prst="rect">
-            <a:avLst/>
-          </a:prstGeom>
-          <a:noFill/>
-        </p:spPr>
-        <p:txBody>
-          <a:bodyPr wrap="none">
-            <a:spAutoFit/>
-          </a:bodyPr>
-          <a:lstStyle/>
-          <a:p>
-            <a:pPr algn="r"/>
-            <a:r>
-              <a:rPr sz="1300" b="1" i="0">
-                <a:solidFill>
-                  <a:srgbClr val="F0C040"/>
-                </a:solidFill>
-              </a:rPr>
-              <a:t>🔄 In Progress</a:t>
+              <a:rPr sz="1300" b="0" i="0">
+                <a:solidFill>
+                  <a:srgbClr val="CCCCCC"/>
+                </a:solidFill>
+              </a:rPr>
+              <a:t>Photograph all 78 tarot cards  ·  ~30 photos each  ·  HEIC / JPG</a:t>
             </a:r>
           </a:p>
         </p:txBody>
@@ -9019,14 +9504,14 @@
         </p:nvSpPr>
         <p:spPr>
           <a:xfrm>
-            <a:off x="457200" y="2514600"/>
-            <a:ext cx="1371600" cy="685800"/>
+            <a:off x="9601200" y="1737360"/>
+            <a:ext cx="1920240" cy="347472"/>
           </a:xfrm>
           <a:prstGeom prst="rect">
             <a:avLst/>
           </a:prstGeom>
           <a:solidFill>
-            <a:srgbClr val="9B59B6"/>
+            <a:srgbClr val="2A2410"/>
           </a:solidFill>
           <a:ln>
             <a:noFill/>
@@ -9062,8 +9547,8 @@
         </p:nvSpPr>
         <p:spPr>
           <a:xfrm>
-            <a:off x="457200" y="2651760"/>
-            <a:ext cx="1371600" cy="411480"/>
+            <a:off x="9601200" y="1755648"/>
+            <a:ext cx="1920240" cy="320040"/>
           </a:xfrm>
           <a:prstGeom prst="rect">
             <a:avLst/>
@@ -9080,10 +9565,10 @@
             <a:r>
               <a:rPr sz="1300" b="1" i="0">
                 <a:solidFill>
-                  <a:srgbClr val="FFFFFF"/>
-                </a:solidFill>
-              </a:rPr>
-              <a:t>Phase 2</a:t>
+                  <a:srgbClr val="D4A017"/>
+                </a:solidFill>
+              </a:rPr>
+              <a:t>🔄 In Progress</a:t>
             </a:r>
           </a:p>
         </p:txBody>
@@ -9096,14 +9581,14 @@
         </p:nvSpPr>
         <p:spPr>
           <a:xfrm>
-            <a:off x="2011680" y="2514600"/>
-            <a:ext cx="9692640" cy="685800"/>
+            <a:off x="457200" y="2468880"/>
+            <a:ext cx="1463040" cy="685800"/>
           </a:xfrm>
           <a:prstGeom prst="rect">
             <a:avLst/>
           </a:prstGeom>
           <a:solidFill>
-            <a:srgbClr val="1A1A3E"/>
+            <a:srgbClr val="1ABC9C"/>
           </a:solidFill>
           <a:ln>
             <a:noFill/>
@@ -9139,117 +9624,48 @@
         </p:nvSpPr>
         <p:spPr>
           <a:xfrm>
-            <a:off x="2194560" y="2532888"/>
-            <a:ext cx="3657600" cy="347472"/>
-          </a:xfrm>
-          <a:prstGeom prst="rect">
-            <a:avLst/>
-          </a:prstGeom>
-          <a:noFill/>
-        </p:spPr>
-        <p:txBody>
-          <a:bodyPr wrap="none">
-            <a:spAutoFit/>
-          </a:bodyPr>
-          <a:lstStyle/>
-          <a:p>
-            <a:pPr algn="l"/>
-            <a:r>
-              <a:rPr sz="1500" b="1" i="0">
-                <a:solidFill>
-                  <a:srgbClr val="9B59B6"/>
-                </a:solidFill>
-              </a:rPr>
-              <a:t>Model Training</a:t>
-            </a:r>
-          </a:p>
-        </p:txBody>
-      </p:sp>
-      <p:sp>
-        <p:nvSpPr>
-          <p:cNvPr id="18" name="TextBox 17"/>
-          <p:cNvSpPr txBox="1"/>
-          <p:nvPr/>
-        </p:nvSpPr>
-        <p:spPr>
-          <a:xfrm>
-            <a:off x="2194560" y="2862072"/>
-            <a:ext cx="6400800" cy="320040"/>
-          </a:xfrm>
-          <a:prstGeom prst="rect">
-            <a:avLst/>
-          </a:prstGeom>
-          <a:noFill/>
-        </p:spPr>
-        <p:txBody>
-          <a:bodyPr wrap="none">
-            <a:spAutoFit/>
-          </a:bodyPr>
-          <a:lstStyle/>
-          <a:p>
-            <a:pPr algn="l"/>
-            <a:r>
-              <a:rPr sz="1200" b="0" i="0">
-                <a:solidFill>
-                  <a:srgbClr val="CCCCFF"/>
-                </a:solidFill>
-              </a:rPr>
-              <a:t>Fine-tune EfficientNet-B0
-Google Colab T4 GPU</a:t>
-            </a:r>
-          </a:p>
-        </p:txBody>
-      </p:sp>
-      <p:sp>
-        <p:nvSpPr>
-          <p:cNvPr id="19" name="TextBox 18"/>
-          <p:cNvSpPr txBox="1"/>
-          <p:nvPr/>
-        </p:nvSpPr>
-        <p:spPr>
-          <a:xfrm>
-            <a:off x="9144000" y="2697480"/>
-            <a:ext cx="2377440" cy="320040"/>
-          </a:xfrm>
-          <a:prstGeom prst="rect">
-            <a:avLst/>
-          </a:prstGeom>
-          <a:noFill/>
-        </p:spPr>
-        <p:txBody>
-          <a:bodyPr wrap="none">
-            <a:spAutoFit/>
-          </a:bodyPr>
-          <a:lstStyle/>
-          <a:p>
-            <a:pPr algn="r"/>
-            <a:r>
-              <a:rPr sz="1300" b="1" i="0">
-                <a:solidFill>
-                  <a:srgbClr val="CCCCFF"/>
-                </a:solidFill>
-              </a:rPr>
-              <a:t>⏳ Upcoming</a:t>
-            </a:r>
-          </a:p>
-        </p:txBody>
-      </p:sp>
-      <p:sp>
-        <p:nvSpPr>
-          <p:cNvPr id="20" name="Rectangle 19"/>
+            <a:off x="457200" y="2633472"/>
+            <a:ext cx="1463040" cy="384048"/>
+          </a:xfrm>
+          <a:prstGeom prst="rect">
+            <a:avLst/>
+          </a:prstGeom>
+          <a:noFill/>
+        </p:spPr>
+        <p:txBody>
+          <a:bodyPr wrap="none">
+            <a:spAutoFit/>
+          </a:bodyPr>
+          <a:lstStyle/>
+          <a:p>
+            <a:pPr algn="ctr"/>
+            <a:r>
+              <a:rPr sz="1400" b="1" i="0">
+                <a:solidFill>
+                  <a:srgbClr val="FFFFFF"/>
+                </a:solidFill>
+              </a:rPr>
+              <a:t>Phase 2</a:t>
+            </a:r>
+          </a:p>
+        </p:txBody>
+      </p:sp>
+      <p:sp>
+        <p:nvSpPr>
+          <p:cNvPr id="18" name="Rectangle 17"/>
           <p:cNvSpPr/>
           <p:nvPr/>
         </p:nvSpPr>
         <p:spPr>
           <a:xfrm>
-            <a:off x="457200" y="3429000"/>
-            <a:ext cx="1371600" cy="685800"/>
+            <a:off x="2103120" y="2468880"/>
+            <a:ext cx="9601200" cy="685800"/>
           </a:xfrm>
           <a:prstGeom prst="rect">
             <a:avLst/>
           </a:prstGeom>
           <a:solidFill>
-            <a:srgbClr val="2ECC71"/>
+            <a:srgbClr val="222222"/>
           </a:solidFill>
           <a:ln>
             <a:noFill/>
@@ -9279,54 +9695,88 @@
       </p:sp>
       <p:sp>
         <p:nvSpPr>
-          <p:cNvPr id="21" name="TextBox 20"/>
-          <p:cNvSpPr txBox="1"/>
-          <p:nvPr/>
-        </p:nvSpPr>
-        <p:spPr>
-          <a:xfrm>
-            <a:off x="457200" y="3566160"/>
-            <a:ext cx="1371600" cy="411480"/>
-          </a:xfrm>
-          <a:prstGeom prst="rect">
-            <a:avLst/>
-          </a:prstGeom>
-          <a:noFill/>
-        </p:spPr>
-        <p:txBody>
-          <a:bodyPr wrap="none">
-            <a:spAutoFit/>
-          </a:bodyPr>
-          <a:lstStyle/>
-          <a:p>
-            <a:pPr algn="ctr"/>
-            <a:r>
-              <a:rPr sz="1300" b="1" i="0">
-                <a:solidFill>
-                  <a:srgbClr val="FFFFFF"/>
-                </a:solidFill>
-              </a:rPr>
-              <a:t>Phase 3</a:t>
-            </a:r>
-          </a:p>
-        </p:txBody>
-      </p:sp>
-      <p:sp>
-        <p:nvSpPr>
-          <p:cNvPr id="22" name="Rectangle 21"/>
+          <p:cNvPr id="19" name="TextBox 18"/>
+          <p:cNvSpPr txBox="1"/>
+          <p:nvPr/>
+        </p:nvSpPr>
+        <p:spPr>
+          <a:xfrm>
+            <a:off x="2286000" y="2505456"/>
+            <a:ext cx="5943600" cy="347472"/>
+          </a:xfrm>
+          <a:prstGeom prst="rect">
+            <a:avLst/>
+          </a:prstGeom>
+          <a:noFill/>
+        </p:spPr>
+        <p:txBody>
+          <a:bodyPr wrap="none">
+            <a:spAutoFit/>
+          </a:bodyPr>
+          <a:lstStyle/>
+          <a:p>
+            <a:pPr algn="l"/>
+            <a:r>
+              <a:rPr sz="1700" b="1" i="0">
+                <a:solidFill>
+                  <a:srgbClr val="1ABC9C"/>
+                </a:solidFill>
+              </a:rPr>
+              <a:t>Model Training</a:t>
+            </a:r>
+          </a:p>
+        </p:txBody>
+      </p:sp>
+      <p:sp>
+        <p:nvSpPr>
+          <p:cNvPr id="20" name="TextBox 19"/>
+          <p:cNvSpPr txBox="1"/>
+          <p:nvPr/>
+        </p:nvSpPr>
+        <p:spPr>
+          <a:xfrm>
+            <a:off x="2286000" y="2852928"/>
+            <a:ext cx="7315200" cy="320040"/>
+          </a:xfrm>
+          <a:prstGeom prst="rect">
+            <a:avLst/>
+          </a:prstGeom>
+          <a:noFill/>
+        </p:spPr>
+        <p:txBody>
+          <a:bodyPr wrap="none">
+            <a:spAutoFit/>
+          </a:bodyPr>
+          <a:lstStyle/>
+          <a:p>
+            <a:pPr algn="l"/>
+            <a:r>
+              <a:rPr sz="1300" b="0" i="0">
+                <a:solidFill>
+                  <a:srgbClr val="CCCCCC"/>
+                </a:solidFill>
+              </a:rPr>
+              <a:t>Fine-tune EfficientNet-B0 on Google Colab T4 GPU</a:t>
+            </a:r>
+          </a:p>
+        </p:txBody>
+      </p:sp>
+      <p:sp>
+        <p:nvSpPr>
+          <p:cNvPr id="21" name="Rectangle 20"/>
           <p:cNvSpPr/>
           <p:nvPr/>
         </p:nvSpPr>
         <p:spPr>
           <a:xfrm>
-            <a:off x="2011680" y="3429000"/>
-            <a:ext cx="9692640" cy="685800"/>
+            <a:off x="9601200" y="2633472"/>
+            <a:ext cx="1920240" cy="347472"/>
           </a:xfrm>
           <a:prstGeom prst="rect">
             <a:avLst/>
           </a:prstGeom>
           <a:solidFill>
-            <a:srgbClr val="1A1A3E"/>
+            <a:srgbClr val="1A1A1A"/>
           </a:solidFill>
           <a:ln>
             <a:noFill/>
@@ -9356,100 +9806,31 @@
       </p:sp>
       <p:sp>
         <p:nvSpPr>
-          <p:cNvPr id="23" name="TextBox 22"/>
-          <p:cNvSpPr txBox="1"/>
-          <p:nvPr/>
-        </p:nvSpPr>
-        <p:spPr>
-          <a:xfrm>
-            <a:off x="2194560" y="3447288"/>
-            <a:ext cx="3657600" cy="347472"/>
-          </a:xfrm>
-          <a:prstGeom prst="rect">
-            <a:avLst/>
-          </a:prstGeom>
-          <a:noFill/>
-        </p:spPr>
-        <p:txBody>
-          <a:bodyPr wrap="none">
-            <a:spAutoFit/>
-          </a:bodyPr>
-          <a:lstStyle/>
-          <a:p>
-            <a:pPr algn="l"/>
-            <a:r>
-              <a:rPr sz="1500" b="1" i="0">
-                <a:solidFill>
-                  <a:srgbClr val="2ECC71"/>
-                </a:solidFill>
-              </a:rPr>
-              <a:t>Prediction</a:t>
-            </a:r>
-          </a:p>
-        </p:txBody>
-      </p:sp>
-      <p:sp>
-        <p:nvSpPr>
-          <p:cNvPr id="24" name="TextBox 23"/>
-          <p:cNvSpPr txBox="1"/>
-          <p:nvPr/>
-        </p:nvSpPr>
-        <p:spPr>
-          <a:xfrm>
-            <a:off x="2194560" y="3776472"/>
-            <a:ext cx="6400800" cy="320040"/>
-          </a:xfrm>
-          <a:prstGeom prst="rect">
-            <a:avLst/>
-          </a:prstGeom>
-          <a:noFill/>
-        </p:spPr>
-        <p:txBody>
-          <a:bodyPr wrap="none">
-            <a:spAutoFit/>
-          </a:bodyPr>
-          <a:lstStyle/>
-          <a:p>
-            <a:pPr algn="l"/>
-            <a:r>
-              <a:rPr sz="1200" b="0" i="0">
-                <a:solidFill>
-                  <a:srgbClr val="CCCCFF"/>
-                </a:solidFill>
-              </a:rPr>
-              <a:t>Identify card from photo
-Top-3 confidence scores</a:t>
-            </a:r>
-          </a:p>
-        </p:txBody>
-      </p:sp>
-      <p:sp>
-        <p:nvSpPr>
-          <p:cNvPr id="25" name="TextBox 24"/>
-          <p:cNvSpPr txBox="1"/>
-          <p:nvPr/>
-        </p:nvSpPr>
-        <p:spPr>
-          <a:xfrm>
-            <a:off x="9144000" y="3611880"/>
-            <a:ext cx="2377440" cy="320040"/>
-          </a:xfrm>
-          <a:prstGeom prst="rect">
-            <a:avLst/>
-          </a:prstGeom>
-          <a:noFill/>
-        </p:spPr>
-        <p:txBody>
-          <a:bodyPr wrap="none">
-            <a:spAutoFit/>
-          </a:bodyPr>
-          <a:lstStyle/>
-          <a:p>
-            <a:pPr algn="r"/>
+          <p:cNvPr id="22" name="TextBox 21"/>
+          <p:cNvSpPr txBox="1"/>
+          <p:nvPr/>
+        </p:nvSpPr>
+        <p:spPr>
+          <a:xfrm>
+            <a:off x="9601200" y="2651760"/>
+            <a:ext cx="1920240" cy="320040"/>
+          </a:xfrm>
+          <a:prstGeom prst="rect">
+            <a:avLst/>
+          </a:prstGeom>
+          <a:noFill/>
+        </p:spPr>
+        <p:txBody>
+          <a:bodyPr wrap="none">
+            <a:spAutoFit/>
+          </a:bodyPr>
+          <a:lstStyle/>
+          <a:p>
+            <a:pPr algn="ctr"/>
             <a:r>
               <a:rPr sz="1300" b="1" i="0">
                 <a:solidFill>
-                  <a:srgbClr val="CCCCFF"/>
+                  <a:srgbClr val="888888"/>
                 </a:solidFill>
               </a:rPr>
               <a:t>⏳ Upcoming</a:t>
@@ -9459,14 +9840,14 @@
       </p:sp>
       <p:sp>
         <p:nvSpPr>
-          <p:cNvPr id="26" name="Rectangle 25"/>
+          <p:cNvPr id="23" name="Rectangle 22"/>
           <p:cNvSpPr/>
           <p:nvPr/>
         </p:nvSpPr>
         <p:spPr>
           <a:xfrm>
-            <a:off x="457200" y="4343400"/>
-            <a:ext cx="1371600" cy="685800"/>
+            <a:off x="457200" y="3364991"/>
+            <a:ext cx="1463040" cy="685800"/>
           </a:xfrm>
           <a:prstGeom prst="rect">
             <a:avLst/>
@@ -9502,54 +9883,54 @@
       </p:sp>
       <p:sp>
         <p:nvSpPr>
-          <p:cNvPr id="27" name="TextBox 26"/>
-          <p:cNvSpPr txBox="1"/>
-          <p:nvPr/>
-        </p:nvSpPr>
-        <p:spPr>
-          <a:xfrm>
-            <a:off x="457200" y="4480560"/>
-            <a:ext cx="1371600" cy="411480"/>
-          </a:xfrm>
-          <a:prstGeom prst="rect">
-            <a:avLst/>
-          </a:prstGeom>
-          <a:noFill/>
-        </p:spPr>
-        <p:txBody>
-          <a:bodyPr wrap="none">
-            <a:spAutoFit/>
-          </a:bodyPr>
-          <a:lstStyle/>
-          <a:p>
-            <a:pPr algn="ctr"/>
-            <a:r>
-              <a:rPr sz="1300" b="1" i="0">
+          <p:cNvPr id="24" name="TextBox 23"/>
+          <p:cNvSpPr txBox="1"/>
+          <p:nvPr/>
+        </p:nvSpPr>
+        <p:spPr>
+          <a:xfrm>
+            <a:off x="457200" y="3529584"/>
+            <a:ext cx="1463040" cy="384048"/>
+          </a:xfrm>
+          <a:prstGeom prst="rect">
+            <a:avLst/>
+          </a:prstGeom>
+          <a:noFill/>
+        </p:spPr>
+        <p:txBody>
+          <a:bodyPr wrap="none">
+            <a:spAutoFit/>
+          </a:bodyPr>
+          <a:lstStyle/>
+          <a:p>
+            <a:pPr algn="ctr"/>
+            <a:r>
+              <a:rPr sz="1400" b="1" i="0">
                 <a:solidFill>
                   <a:srgbClr val="FFFFFF"/>
                 </a:solidFill>
               </a:rPr>
-              <a:t>Phase 4</a:t>
-            </a:r>
-          </a:p>
-        </p:txBody>
-      </p:sp>
-      <p:sp>
-        <p:nvSpPr>
-          <p:cNvPr id="28" name="Rectangle 27"/>
+              <a:t>Phase 3</a:t>
+            </a:r>
+          </a:p>
+        </p:txBody>
+      </p:sp>
+      <p:sp>
+        <p:nvSpPr>
+          <p:cNvPr id="25" name="Rectangle 24"/>
           <p:cNvSpPr/>
           <p:nvPr/>
         </p:nvSpPr>
         <p:spPr>
           <a:xfrm>
-            <a:off x="2011680" y="4343400"/>
-            <a:ext cx="9692640" cy="685800"/>
+            <a:off x="2103120" y="3364991"/>
+            <a:ext cx="9601200" cy="685800"/>
           </a:xfrm>
           <a:prstGeom prst="rect">
             <a:avLst/>
           </a:prstGeom>
           <a:solidFill>
-            <a:srgbClr val="1A1A3E"/>
+            <a:srgbClr val="222222"/>
           </a:solidFill>
           <a:ln>
             <a:noFill/>
@@ -9579,70 +9960,189 @@
       </p:sp>
       <p:sp>
         <p:nvSpPr>
+          <p:cNvPr id="26" name="TextBox 25"/>
+          <p:cNvSpPr txBox="1"/>
+          <p:nvPr/>
+        </p:nvSpPr>
+        <p:spPr>
+          <a:xfrm>
+            <a:off x="2286000" y="3401568"/>
+            <a:ext cx="5943600" cy="347472"/>
+          </a:xfrm>
+          <a:prstGeom prst="rect">
+            <a:avLst/>
+          </a:prstGeom>
+          <a:noFill/>
+        </p:spPr>
+        <p:txBody>
+          <a:bodyPr wrap="none">
+            <a:spAutoFit/>
+          </a:bodyPr>
+          <a:lstStyle/>
+          <a:p>
+            <a:pPr algn="l"/>
+            <a:r>
+              <a:rPr sz="1700" b="1" i="0">
+                <a:solidFill>
+                  <a:srgbClr val="3B97D3"/>
+                </a:solidFill>
+              </a:rPr>
+              <a:t>Card Prediction</a:t>
+            </a:r>
+          </a:p>
+        </p:txBody>
+      </p:sp>
+      <p:sp>
+        <p:nvSpPr>
+          <p:cNvPr id="27" name="TextBox 26"/>
+          <p:cNvSpPr txBox="1"/>
+          <p:nvPr/>
+        </p:nvSpPr>
+        <p:spPr>
+          <a:xfrm>
+            <a:off x="2286000" y="3749039"/>
+            <a:ext cx="7315200" cy="320040"/>
+          </a:xfrm>
+          <a:prstGeom prst="rect">
+            <a:avLst/>
+          </a:prstGeom>
+          <a:noFill/>
+        </p:spPr>
+        <p:txBody>
+          <a:bodyPr wrap="none">
+            <a:spAutoFit/>
+          </a:bodyPr>
+          <a:lstStyle/>
+          <a:p>
+            <a:pPr algn="l"/>
+            <a:r>
+              <a:rPr sz="1300" b="0" i="0">
+                <a:solidFill>
+                  <a:srgbClr val="CCCCCC"/>
+                </a:solidFill>
+              </a:rPr>
+              <a:t>Identify card from photo  ·  Return top-3 confidence scores</a:t>
+            </a:r>
+          </a:p>
+        </p:txBody>
+      </p:sp>
+      <p:sp>
+        <p:nvSpPr>
+          <p:cNvPr id="28" name="Rectangle 27"/>
+          <p:cNvSpPr/>
+          <p:nvPr/>
+        </p:nvSpPr>
+        <p:spPr>
+          <a:xfrm>
+            <a:off x="9601200" y="3529584"/>
+            <a:ext cx="1920240" cy="347472"/>
+          </a:xfrm>
+          <a:prstGeom prst="rect">
+            <a:avLst/>
+          </a:prstGeom>
+          <a:solidFill>
+            <a:srgbClr val="1A1A1A"/>
+          </a:solidFill>
+          <a:ln>
+            <a:noFill/>
+          </a:ln>
+        </p:spPr>
+        <p:style>
+          <a:lnRef idx="1">
+            <a:schemeClr val="accent1"/>
+          </a:lnRef>
+          <a:fillRef idx="3">
+            <a:schemeClr val="accent1"/>
+          </a:fillRef>
+          <a:effectRef idx="2">
+            <a:schemeClr val="accent1"/>
+          </a:effectRef>
+          <a:fontRef idx="minor">
+            <a:schemeClr val="lt1"/>
+          </a:fontRef>
+        </p:style>
+        <p:txBody>
+          <a:bodyPr rtlCol="0" anchor="ctr"/>
+          <a:lstStyle/>
+          <a:p>
+            <a:pPr algn="ctr"/>
+          </a:p>
+        </p:txBody>
+      </p:sp>
+      <p:sp>
+        <p:nvSpPr>
           <p:cNvPr id="29" name="TextBox 28"/>
           <p:cNvSpPr txBox="1"/>
           <p:nvPr/>
         </p:nvSpPr>
         <p:spPr>
           <a:xfrm>
-            <a:off x="2194560" y="4361688"/>
-            <a:ext cx="3657600" cy="347472"/>
-          </a:xfrm>
-          <a:prstGeom prst="rect">
-            <a:avLst/>
-          </a:prstGeom>
-          <a:noFill/>
-        </p:spPr>
-        <p:txBody>
-          <a:bodyPr wrap="none">
-            <a:spAutoFit/>
-          </a:bodyPr>
-          <a:lstStyle/>
-          <a:p>
-            <a:pPr algn="l"/>
-            <a:r>
-              <a:rPr sz="1500" b="1" i="0">
-                <a:solidFill>
-                  <a:srgbClr val="3B97D3"/>
-                </a:solidFill>
-              </a:rPr>
-              <a:t>Fortune Telling</a:t>
-            </a:r>
-          </a:p>
-        </p:txBody>
-      </p:sp>
-      <p:sp>
-        <p:nvSpPr>
-          <p:cNvPr id="30" name="TextBox 29"/>
-          <p:cNvSpPr txBox="1"/>
-          <p:nvPr/>
-        </p:nvSpPr>
-        <p:spPr>
-          <a:xfrm>
-            <a:off x="2194560" y="4690872"/>
-            <a:ext cx="6400800" cy="320040"/>
-          </a:xfrm>
-          <a:prstGeom prst="rect">
-            <a:avLst/>
-          </a:prstGeom>
-          <a:noFill/>
-        </p:spPr>
-        <p:txBody>
-          <a:bodyPr wrap="none">
-            <a:spAutoFit/>
-          </a:bodyPr>
-          <a:lstStyle/>
-          <a:p>
-            <a:pPr algn="l"/>
-            <a:r>
-              <a:rPr sz="1200" b="0" i="0">
-                <a:solidFill>
-                  <a:srgbClr val="CCCCFF"/>
-                </a:solidFill>
-              </a:rPr>
-              <a:t>Map card → meaning
-Generate fortune reading</a:t>
-            </a:r>
+            <a:off x="9601200" y="3547872"/>
+            <a:ext cx="1920240" cy="320040"/>
+          </a:xfrm>
+          <a:prstGeom prst="rect">
+            <a:avLst/>
+          </a:prstGeom>
+          <a:noFill/>
+        </p:spPr>
+        <p:txBody>
+          <a:bodyPr wrap="none">
+            <a:spAutoFit/>
+          </a:bodyPr>
+          <a:lstStyle/>
+          <a:p>
+            <a:pPr algn="ctr"/>
+            <a:r>
+              <a:rPr sz="1300" b="1" i="0">
+                <a:solidFill>
+                  <a:srgbClr val="888888"/>
+                </a:solidFill>
+              </a:rPr>
+              <a:t>⏳ Upcoming</a:t>
+            </a:r>
+          </a:p>
+        </p:txBody>
+      </p:sp>
+      <p:sp>
+        <p:nvSpPr>
+          <p:cNvPr id="30" name="Rectangle 29"/>
+          <p:cNvSpPr/>
+          <p:nvPr/>
+        </p:nvSpPr>
+        <p:spPr>
+          <a:xfrm>
+            <a:off x="457200" y="4261104"/>
+            <a:ext cx="1463040" cy="685800"/>
+          </a:xfrm>
+          <a:prstGeom prst="rect">
+            <a:avLst/>
+          </a:prstGeom>
+          <a:solidFill>
+            <a:srgbClr val="27AE60"/>
+          </a:solidFill>
+          <a:ln>
+            <a:noFill/>
+          </a:ln>
+        </p:spPr>
+        <p:style>
+          <a:lnRef idx="1">
+            <a:schemeClr val="accent1"/>
+          </a:lnRef>
+          <a:fillRef idx="3">
+            <a:schemeClr val="accent1"/>
+          </a:fillRef>
+          <a:effectRef idx="2">
+            <a:schemeClr val="accent1"/>
+          </a:effectRef>
+          <a:fontRef idx="minor">
+            <a:schemeClr val="lt1"/>
+          </a:fontRef>
+        </p:style>
+        <p:txBody>
+          <a:bodyPr rtlCol="0" anchor="ctr"/>
+          <a:lstStyle/>
+          <a:p>
+            <a:pPr algn="ctr"/>
           </a:p>
         </p:txBody>
       </p:sp>
@@ -9654,28 +10154,28 @@
         </p:nvSpPr>
         <p:spPr>
           <a:xfrm>
-            <a:off x="9144000" y="4526280"/>
-            <a:ext cx="2377440" cy="320040"/>
-          </a:xfrm>
-          <a:prstGeom prst="rect">
-            <a:avLst/>
-          </a:prstGeom>
-          <a:noFill/>
-        </p:spPr>
-        <p:txBody>
-          <a:bodyPr wrap="none">
-            <a:spAutoFit/>
-          </a:bodyPr>
-          <a:lstStyle/>
-          <a:p>
-            <a:pPr algn="r"/>
-            <a:r>
-              <a:rPr sz="1300" b="1" i="0">
-                <a:solidFill>
-                  <a:srgbClr val="CCCCFF"/>
-                </a:solidFill>
-              </a:rPr>
-              <a:t>⏳ Upcoming</a:t>
+            <a:off x="457200" y="4425696"/>
+            <a:ext cx="1463040" cy="384048"/>
+          </a:xfrm>
+          <a:prstGeom prst="rect">
+            <a:avLst/>
+          </a:prstGeom>
+          <a:noFill/>
+        </p:spPr>
+        <p:txBody>
+          <a:bodyPr wrap="none">
+            <a:spAutoFit/>
+          </a:bodyPr>
+          <a:lstStyle/>
+          <a:p>
+            <a:pPr algn="ctr"/>
+            <a:r>
+              <a:rPr sz="1400" b="1" i="0">
+                <a:solidFill>
+                  <a:srgbClr val="FFFFFF"/>
+                </a:solidFill>
+              </a:rPr>
+              <a:t>Phase 4</a:t>
             </a:r>
           </a:p>
         </p:txBody>
@@ -9688,8 +10188,196 @@
         </p:nvSpPr>
         <p:spPr>
           <a:xfrm>
-            <a:off x="457200" y="5257800"/>
-            <a:ext cx="1371600" cy="685800"/>
+            <a:off x="2103120" y="4261104"/>
+            <a:ext cx="9601200" cy="685800"/>
+          </a:xfrm>
+          <a:prstGeom prst="rect">
+            <a:avLst/>
+          </a:prstGeom>
+          <a:solidFill>
+            <a:srgbClr val="222222"/>
+          </a:solidFill>
+          <a:ln>
+            <a:noFill/>
+          </a:ln>
+        </p:spPr>
+        <p:style>
+          <a:lnRef idx="1">
+            <a:schemeClr val="accent1"/>
+          </a:lnRef>
+          <a:fillRef idx="3">
+            <a:schemeClr val="accent1"/>
+          </a:fillRef>
+          <a:effectRef idx="2">
+            <a:schemeClr val="accent1"/>
+          </a:effectRef>
+          <a:fontRef idx="minor">
+            <a:schemeClr val="lt1"/>
+          </a:fontRef>
+        </p:style>
+        <p:txBody>
+          <a:bodyPr rtlCol="0" anchor="ctr"/>
+          <a:lstStyle/>
+          <a:p>
+            <a:pPr algn="ctr"/>
+          </a:p>
+        </p:txBody>
+      </p:sp>
+      <p:sp>
+        <p:nvSpPr>
+          <p:cNvPr id="33" name="TextBox 32"/>
+          <p:cNvSpPr txBox="1"/>
+          <p:nvPr/>
+        </p:nvSpPr>
+        <p:spPr>
+          <a:xfrm>
+            <a:off x="2286000" y="4297680"/>
+            <a:ext cx="5943600" cy="347472"/>
+          </a:xfrm>
+          <a:prstGeom prst="rect">
+            <a:avLst/>
+          </a:prstGeom>
+          <a:noFill/>
+        </p:spPr>
+        <p:txBody>
+          <a:bodyPr wrap="none">
+            <a:spAutoFit/>
+          </a:bodyPr>
+          <a:lstStyle/>
+          <a:p>
+            <a:pPr algn="l"/>
+            <a:r>
+              <a:rPr sz="1700" b="1" i="0">
+                <a:solidFill>
+                  <a:srgbClr val="27AE60"/>
+                </a:solidFill>
+              </a:rPr>
+              <a:t>Fortune Telling</a:t>
+            </a:r>
+          </a:p>
+        </p:txBody>
+      </p:sp>
+      <p:sp>
+        <p:nvSpPr>
+          <p:cNvPr id="34" name="TextBox 33"/>
+          <p:cNvSpPr txBox="1"/>
+          <p:nvPr/>
+        </p:nvSpPr>
+        <p:spPr>
+          <a:xfrm>
+            <a:off x="2286000" y="4645152"/>
+            <a:ext cx="7315200" cy="320040"/>
+          </a:xfrm>
+          <a:prstGeom prst="rect">
+            <a:avLst/>
+          </a:prstGeom>
+          <a:noFill/>
+        </p:spPr>
+        <p:txBody>
+          <a:bodyPr wrap="none">
+            <a:spAutoFit/>
+          </a:bodyPr>
+          <a:lstStyle/>
+          <a:p>
+            <a:pPr algn="l"/>
+            <a:r>
+              <a:rPr sz="1300" b="0" i="0">
+                <a:solidFill>
+                  <a:srgbClr val="CCCCCC"/>
+                </a:solidFill>
+              </a:rPr>
+              <a:t>Map predicted card → meaning  ·  Generate fortune reading</a:t>
+            </a:r>
+          </a:p>
+        </p:txBody>
+      </p:sp>
+      <p:sp>
+        <p:nvSpPr>
+          <p:cNvPr id="35" name="Rectangle 34"/>
+          <p:cNvSpPr/>
+          <p:nvPr/>
+        </p:nvSpPr>
+        <p:spPr>
+          <a:xfrm>
+            <a:off x="9601200" y="4425696"/>
+            <a:ext cx="1920240" cy="347472"/>
+          </a:xfrm>
+          <a:prstGeom prst="rect">
+            <a:avLst/>
+          </a:prstGeom>
+          <a:solidFill>
+            <a:srgbClr val="1A1A1A"/>
+          </a:solidFill>
+          <a:ln>
+            <a:noFill/>
+          </a:ln>
+        </p:spPr>
+        <p:style>
+          <a:lnRef idx="1">
+            <a:schemeClr val="accent1"/>
+          </a:lnRef>
+          <a:fillRef idx="3">
+            <a:schemeClr val="accent1"/>
+          </a:fillRef>
+          <a:effectRef idx="2">
+            <a:schemeClr val="accent1"/>
+          </a:effectRef>
+          <a:fontRef idx="minor">
+            <a:schemeClr val="lt1"/>
+          </a:fontRef>
+        </p:style>
+        <p:txBody>
+          <a:bodyPr rtlCol="0" anchor="ctr"/>
+          <a:lstStyle/>
+          <a:p>
+            <a:pPr algn="ctr"/>
+          </a:p>
+        </p:txBody>
+      </p:sp>
+      <p:sp>
+        <p:nvSpPr>
+          <p:cNvPr id="36" name="TextBox 35"/>
+          <p:cNvSpPr txBox="1"/>
+          <p:nvPr/>
+        </p:nvSpPr>
+        <p:spPr>
+          <a:xfrm>
+            <a:off x="9601200" y="4443984"/>
+            <a:ext cx="1920240" cy="320040"/>
+          </a:xfrm>
+          <a:prstGeom prst="rect">
+            <a:avLst/>
+          </a:prstGeom>
+          <a:noFill/>
+        </p:spPr>
+        <p:txBody>
+          <a:bodyPr wrap="none">
+            <a:spAutoFit/>
+          </a:bodyPr>
+          <a:lstStyle/>
+          <a:p>
+            <a:pPr algn="ctr"/>
+            <a:r>
+              <a:rPr sz="1300" b="1" i="0">
+                <a:solidFill>
+                  <a:srgbClr val="888888"/>
+                </a:solidFill>
+              </a:rPr>
+              <a:t>⏳ Upcoming</a:t>
+            </a:r>
+          </a:p>
+        </p:txBody>
+      </p:sp>
+      <p:sp>
+        <p:nvSpPr>
+          <p:cNvPr id="37" name="Rectangle 36"/>
+          <p:cNvSpPr/>
+          <p:nvPr/>
+        </p:nvSpPr>
+        <p:spPr>
+          <a:xfrm>
+            <a:off x="457200" y="5157216"/>
+            <a:ext cx="1463040" cy="685800"/>
           </a:xfrm>
           <a:prstGeom prst="rect">
             <a:avLst/>
@@ -9725,29 +10413,29 @@
       </p:sp>
       <p:sp>
         <p:nvSpPr>
-          <p:cNvPr id="33" name="TextBox 32"/>
-          <p:cNvSpPr txBox="1"/>
-          <p:nvPr/>
-        </p:nvSpPr>
-        <p:spPr>
-          <a:xfrm>
-            <a:off x="457200" y="5394960"/>
-            <a:ext cx="1371600" cy="411480"/>
-          </a:xfrm>
-          <a:prstGeom prst="rect">
-            <a:avLst/>
-          </a:prstGeom>
-          <a:noFill/>
-        </p:spPr>
-        <p:txBody>
-          <a:bodyPr wrap="none">
-            <a:spAutoFit/>
-          </a:bodyPr>
-          <a:lstStyle/>
-          <a:p>
-            <a:pPr algn="ctr"/>
-            <a:r>
-              <a:rPr sz="1300" b="1" i="0">
+          <p:cNvPr id="38" name="TextBox 37"/>
+          <p:cNvSpPr txBox="1"/>
+          <p:nvPr/>
+        </p:nvSpPr>
+        <p:spPr>
+          <a:xfrm>
+            <a:off x="457200" y="5321807"/>
+            <a:ext cx="1463040" cy="384048"/>
+          </a:xfrm>
+          <a:prstGeom prst="rect">
+            <a:avLst/>
+          </a:prstGeom>
+          <a:noFill/>
+        </p:spPr>
+        <p:txBody>
+          <a:bodyPr wrap="none">
+            <a:spAutoFit/>
+          </a:bodyPr>
+          <a:lstStyle/>
+          <a:p>
+            <a:pPr algn="ctr"/>
+            <a:r>
+              <a:rPr sz="1400" b="1" i="0">
                 <a:solidFill>
                   <a:srgbClr val="FFFFFF"/>
                 </a:solidFill>
@@ -9759,20 +10447,20 @@
       </p:sp>
       <p:sp>
         <p:nvSpPr>
-          <p:cNvPr id="34" name="Rectangle 33"/>
+          <p:cNvPr id="39" name="Rectangle 38"/>
           <p:cNvSpPr/>
           <p:nvPr/>
         </p:nvSpPr>
         <p:spPr>
           <a:xfrm>
-            <a:off x="2011680" y="5257800"/>
-            <a:ext cx="9692640" cy="685800"/>
+            <a:off x="2103120" y="5157216"/>
+            <a:ext cx="9601200" cy="685800"/>
           </a:xfrm>
           <a:prstGeom prst="rect">
             <a:avLst/>
           </a:prstGeom>
           <a:solidFill>
-            <a:srgbClr val="1A1A3E"/>
+            <a:srgbClr val="222222"/>
           </a:solidFill>
           <a:ln>
             <a:noFill/>
@@ -9802,14 +10490,14 @@
       </p:sp>
       <p:sp>
         <p:nvSpPr>
-          <p:cNvPr id="35" name="TextBox 34"/>
-          <p:cNvSpPr txBox="1"/>
-          <p:nvPr/>
-        </p:nvSpPr>
-        <p:spPr>
-          <a:xfrm>
-            <a:off x="2194560" y="5276088"/>
-            <a:ext cx="3657600" cy="347472"/>
+          <p:cNvPr id="40" name="TextBox 39"/>
+          <p:cNvSpPr txBox="1"/>
+          <p:nvPr/>
+        </p:nvSpPr>
+        <p:spPr>
+          <a:xfrm>
+            <a:off x="2286000" y="5193792"/>
+            <a:ext cx="5943600" cy="347472"/>
           </a:xfrm>
           <a:prstGeom prst="rect">
             <a:avLst/>
@@ -9824,26 +10512,26 @@
           <a:p>
             <a:pPr algn="l"/>
             <a:r>
-              <a:rPr sz="1500" b="1" i="0">
+              <a:rPr sz="1700" b="1" i="0">
                 <a:solidFill>
                   <a:srgbClr val="E67E22"/>
                 </a:solidFill>
               </a:rPr>
-              <a:t>App</a:t>
-            </a:r>
-          </a:p>
-        </p:txBody>
-      </p:sp>
-      <p:sp>
-        <p:nvSpPr>
-          <p:cNvPr id="36" name="TextBox 35"/>
-          <p:cNvSpPr txBox="1"/>
-          <p:nvPr/>
-        </p:nvSpPr>
-        <p:spPr>
-          <a:xfrm>
-            <a:off x="2194560" y="5605272"/>
-            <a:ext cx="6400800" cy="320040"/>
+              <a:t>Application</a:t>
+            </a:r>
+          </a:p>
+        </p:txBody>
+      </p:sp>
+      <p:sp>
+        <p:nvSpPr>
+          <p:cNvPr id="41" name="TextBox 40"/>
+          <p:cNvSpPr txBox="1"/>
+          <p:nvPr/>
+        </p:nvSpPr>
+        <p:spPr>
+          <a:xfrm>
+            <a:off x="2286000" y="5541264"/>
+            <a:ext cx="7315200" cy="320040"/>
           </a:xfrm>
           <a:prstGeom prst="rect">
             <a:avLst/>
@@ -9858,44 +10546,86 @@
           <a:p>
             <a:pPr algn="l"/>
             <a:r>
-              <a:rPr sz="1200" b="0" i="0">
-                <a:solidFill>
-                  <a:srgbClr val="CCCCFF"/>
-                </a:solidFill>
-              </a:rPr>
-              <a:t>Build full UI
-Photo capture + fortune display</a:t>
-            </a:r>
-          </a:p>
-        </p:txBody>
-      </p:sp>
-      <p:sp>
-        <p:nvSpPr>
-          <p:cNvPr id="37" name="TextBox 36"/>
-          <p:cNvSpPr txBox="1"/>
-          <p:nvPr/>
-        </p:nvSpPr>
-        <p:spPr>
-          <a:xfrm>
-            <a:off x="9144000" y="5440680"/>
-            <a:ext cx="2377440" cy="320040"/>
-          </a:xfrm>
-          <a:prstGeom prst="rect">
-            <a:avLst/>
-          </a:prstGeom>
-          <a:noFill/>
-        </p:spPr>
-        <p:txBody>
-          <a:bodyPr wrap="none">
-            <a:spAutoFit/>
-          </a:bodyPr>
-          <a:lstStyle/>
-          <a:p>
-            <a:pPr algn="r"/>
+              <a:rPr sz="1300" b="0" i="0">
+                <a:solidFill>
+                  <a:srgbClr val="CCCCCC"/>
+                </a:solidFill>
+              </a:rPr>
+              <a:t>Build full UI  ·  Camera capture  +  fortune display</a:t>
+            </a:r>
+          </a:p>
+        </p:txBody>
+      </p:sp>
+      <p:sp>
+        <p:nvSpPr>
+          <p:cNvPr id="42" name="Rectangle 41"/>
+          <p:cNvSpPr/>
+          <p:nvPr/>
+        </p:nvSpPr>
+        <p:spPr>
+          <a:xfrm>
+            <a:off x="9601200" y="5321807"/>
+            <a:ext cx="1920240" cy="347472"/>
+          </a:xfrm>
+          <a:prstGeom prst="rect">
+            <a:avLst/>
+          </a:prstGeom>
+          <a:solidFill>
+            <a:srgbClr val="1A1A1A"/>
+          </a:solidFill>
+          <a:ln>
+            <a:noFill/>
+          </a:ln>
+        </p:spPr>
+        <p:style>
+          <a:lnRef idx="1">
+            <a:schemeClr val="accent1"/>
+          </a:lnRef>
+          <a:fillRef idx="3">
+            <a:schemeClr val="accent1"/>
+          </a:fillRef>
+          <a:effectRef idx="2">
+            <a:schemeClr val="accent1"/>
+          </a:effectRef>
+          <a:fontRef idx="minor">
+            <a:schemeClr val="lt1"/>
+          </a:fontRef>
+        </p:style>
+        <p:txBody>
+          <a:bodyPr rtlCol="0" anchor="ctr"/>
+          <a:lstStyle/>
+          <a:p>
+            <a:pPr algn="ctr"/>
+          </a:p>
+        </p:txBody>
+      </p:sp>
+      <p:sp>
+        <p:nvSpPr>
+          <p:cNvPr id="43" name="TextBox 42"/>
+          <p:cNvSpPr txBox="1"/>
+          <p:nvPr/>
+        </p:nvSpPr>
+        <p:spPr>
+          <a:xfrm>
+            <a:off x="9601200" y="5340096"/>
+            <a:ext cx="1920240" cy="320040"/>
+          </a:xfrm>
+          <a:prstGeom prst="rect">
+            <a:avLst/>
+          </a:prstGeom>
+          <a:noFill/>
+        </p:spPr>
+        <p:txBody>
+          <a:bodyPr wrap="none">
+            <a:spAutoFit/>
+          </a:bodyPr>
+          <a:lstStyle/>
+          <a:p>
+            <a:pPr algn="ctr"/>
             <a:r>
               <a:rPr sz="1300" b="1" i="0">
                 <a:solidFill>
-                  <a:srgbClr val="CCCCFF"/>
+                  <a:srgbClr val="888888"/>
                 </a:solidFill>
               </a:rPr>
               <a:t>⏳ Upcoming</a:t>

--- a/Fortune_Teller_Presentation.pptx
+++ b/Fortune_Teller_Presentation.pptx
@@ -6,11 +6,11 @@
   </p:sldMasterIdLst>
   <p:sldIdLst>
     <p:sldId id="256" r:id="rId7"/>
-    <p:sldId id="257" r:id="rId8"/>
-    <p:sldId id="258" r:id="rId9"/>
-    <p:sldId id="259" r:id="rId10"/>
-    <p:sldId id="260" r:id="rId11"/>
-    <p:sldId id="261" r:id="rId12"/>
+    <p:sldId id="257" r:id="rId9"/>
+    <p:sldId id="258" r:id="rId10"/>
+    <p:sldId id="259" r:id="rId11"/>
+    <p:sldId id="260" r:id="rId12"/>
+    <p:sldId id="261" r:id="rId13"/>
   </p:sldIdLst>
   <p:sldSz cx="12188952" cy="6858000" type="screen4x3"/>
   <p:notesSz cx="6858000" cy="9144000"/>
@@ -110,6 +110,938 @@
     </a:lvl9pPr>
   </p:defaultTextStyle>
 </p:presentation>
+</file>
+
+<file path=ppt/notesMasters/notesMaster1.xml><?xml version="1.0" encoding="utf-8"?>
+<p:notesMaster xmlns:a="http://schemas.openxmlformats.org/drawingml/2006/main" xmlns:p="http://schemas.openxmlformats.org/presentationml/2006/main" xmlns:r="http://schemas.openxmlformats.org/officeDocument/2006/relationships">
+  <p:cSld>
+    <p:bg>
+      <p:bgRef idx="1001">
+        <a:schemeClr val="bg1"/>
+      </p:bgRef>
+    </p:bg>
+    <p:spTree>
+      <p:nvGrpSpPr>
+        <p:cNvPr id="1" name=""/>
+        <p:cNvGrpSpPr/>
+        <p:nvPr/>
+      </p:nvGrpSpPr>
+      <p:grpSpPr>
+        <a:xfrm>
+          <a:off x="0" y="0"/>
+          <a:ext cx="0" cy="0"/>
+          <a:chOff x="0" y="0"/>
+          <a:chExt cx="0" cy="0"/>
+        </a:xfrm>
+      </p:grpSpPr>
+      <p:sp>
+        <p:nvSpPr>
+          <p:cNvPr id="2" name="Header Placeholder 1"/>
+          <p:cNvSpPr>
+            <a:spLocks noGrp="1"/>
+          </p:cNvSpPr>
+          <p:nvPr>
+            <p:ph type="hdr" sz="quarter"/>
+          </p:nvPr>
+        </p:nvSpPr>
+        <p:spPr>
+          <a:xfrm>
+            <a:off x="0" y="0"/>
+            <a:ext cx="2971800" cy="457200"/>
+          </a:xfrm>
+          <a:prstGeom prst="rect">
+            <a:avLst/>
+          </a:prstGeom>
+        </p:spPr>
+        <p:txBody>
+          <a:bodyPr vert="horz" lIns="91440" tIns="45720" rIns="91440" bIns="45720" rtlCol="0"/>
+          <a:lstStyle>
+            <a:lvl1pPr algn="l">
+              <a:defRPr sz="1200"/>
+            </a:lvl1pPr>
+          </a:lstStyle>
+          <a:p>
+            <a:endParaRPr lang="en-US"/>
+          </a:p>
+        </p:txBody>
+      </p:sp>
+      <p:sp>
+        <p:nvSpPr>
+          <p:cNvPr id="3" name="Date Placeholder 2"/>
+          <p:cNvSpPr>
+            <a:spLocks noGrp="1"/>
+          </p:cNvSpPr>
+          <p:nvPr>
+            <p:ph type="dt" idx="1"/>
+          </p:nvPr>
+        </p:nvSpPr>
+        <p:spPr>
+          <a:xfrm>
+            <a:off x="3884613" y="0"/>
+            <a:ext cx="2971800" cy="457200"/>
+          </a:xfrm>
+          <a:prstGeom prst="rect">
+            <a:avLst/>
+          </a:prstGeom>
+        </p:spPr>
+        <p:txBody>
+          <a:bodyPr vert="horz" lIns="91440" tIns="45720" rIns="91440" bIns="45720" rtlCol="0"/>
+          <a:lstStyle>
+            <a:lvl1pPr algn="r">
+              <a:defRPr sz="1200"/>
+            </a:lvl1pPr>
+          </a:lstStyle>
+          <a:p>
+            <a:fld id="{0F89C1C7-3DCD-1040-A9CF-14679D8B5DDD}" type="datetimeFigureOut">
+              <a:rPr lang="en-US" smtClean="0"/>
+              <a:t>10/17/16</a:t>
+            </a:fld>
+            <a:endParaRPr lang="en-US"/>
+          </a:p>
+        </p:txBody>
+      </p:sp>
+      <p:sp>
+        <p:nvSpPr>
+          <p:cNvPr id="4" name="Slide Image Placeholder 3"/>
+          <p:cNvSpPr>
+            <a:spLocks noGrp="1" noRot="1" noChangeAspect="1"/>
+          </p:cNvSpPr>
+          <p:nvPr>
+            <p:ph type="sldImg" idx="2"/>
+          </p:nvPr>
+        </p:nvSpPr>
+        <p:spPr>
+          <a:xfrm>
+            <a:off x="1143000" y="685800"/>
+            <a:ext cx="4572000" cy="3429000"/>
+          </a:xfrm>
+          <a:prstGeom prst="rect">
+            <a:avLst/>
+          </a:prstGeom>
+          <a:noFill/>
+          <a:ln w="12700">
+            <a:solidFill>
+              <a:prstClr val="black"/>
+            </a:solidFill>
+          </a:ln>
+        </p:spPr>
+        <p:txBody>
+          <a:bodyPr vert="horz" lIns="91440" tIns="45720" rIns="91440" bIns="45720" rtlCol="0" anchor="ctr"/>
+          <a:lstStyle/>
+          <a:p>
+            <a:endParaRPr lang="en-US"/>
+          </a:p>
+        </p:txBody>
+      </p:sp>
+      <p:sp>
+        <p:nvSpPr>
+          <p:cNvPr id="5" name="Notes Placeholder 4"/>
+          <p:cNvSpPr>
+            <a:spLocks noGrp="1"/>
+          </p:cNvSpPr>
+          <p:nvPr>
+            <p:ph type="body" sz="quarter" idx="3"/>
+          </p:nvPr>
+        </p:nvSpPr>
+        <p:spPr>
+          <a:xfrm>
+            <a:off x="685800" y="4343400"/>
+            <a:ext cx="5486400" cy="4114800"/>
+          </a:xfrm>
+          <a:prstGeom prst="rect">
+            <a:avLst/>
+          </a:prstGeom>
+        </p:spPr>
+        <p:txBody>
+          <a:bodyPr vert="horz" lIns="91440" tIns="45720" rIns="91440" bIns="45720" rtlCol="0"/>
+          <a:lstStyle/>
+          <a:p>
+            <a:pPr lvl="0"/>
+            <a:r>
+              <a:rPr lang="en-US" smtClean="0"/>
+              <a:t>Click to edit Master text styles</a:t>
+            </a:r>
+          </a:p>
+          <a:p>
+            <a:pPr lvl="1"/>
+            <a:r>
+              <a:rPr lang="en-US" smtClean="0"/>
+              <a:t>Second level</a:t>
+            </a:r>
+          </a:p>
+          <a:p>
+            <a:pPr lvl="2"/>
+            <a:r>
+              <a:rPr lang="en-US" smtClean="0"/>
+              <a:t>Third level</a:t>
+            </a:r>
+          </a:p>
+          <a:p>
+            <a:pPr lvl="3"/>
+            <a:r>
+              <a:rPr lang="en-US" smtClean="0"/>
+              <a:t>Fourth level</a:t>
+            </a:r>
+          </a:p>
+          <a:p>
+            <a:pPr lvl="4"/>
+            <a:r>
+              <a:rPr lang="en-US" smtClean="0"/>
+              <a:t>Fifth level</a:t>
+            </a:r>
+            <a:endParaRPr lang="en-US"/>
+          </a:p>
+        </p:txBody>
+      </p:sp>
+      <p:sp>
+        <p:nvSpPr>
+          <p:cNvPr id="6" name="Footer Placeholder 5"/>
+          <p:cNvSpPr>
+            <a:spLocks noGrp="1"/>
+          </p:cNvSpPr>
+          <p:nvPr>
+            <p:ph type="ftr" sz="quarter" idx="4"/>
+          </p:nvPr>
+        </p:nvSpPr>
+        <p:spPr>
+          <a:xfrm>
+            <a:off x="0" y="8685213"/>
+            <a:ext cx="2971800" cy="457200"/>
+          </a:xfrm>
+          <a:prstGeom prst="rect">
+            <a:avLst/>
+          </a:prstGeom>
+        </p:spPr>
+        <p:txBody>
+          <a:bodyPr vert="horz" lIns="91440" tIns="45720" rIns="91440" bIns="45720" rtlCol="0" anchor="b"/>
+          <a:lstStyle>
+            <a:lvl1pPr algn="l">
+              <a:defRPr sz="1200"/>
+            </a:lvl1pPr>
+          </a:lstStyle>
+          <a:p>
+            <a:endParaRPr lang="en-US"/>
+          </a:p>
+        </p:txBody>
+      </p:sp>
+      <p:sp>
+        <p:nvSpPr>
+          <p:cNvPr id="7" name="Slide Number Placeholder 6"/>
+          <p:cNvSpPr>
+            <a:spLocks noGrp="1"/>
+          </p:cNvSpPr>
+          <p:nvPr>
+            <p:ph type="sldNum" sz="quarter" idx="5"/>
+          </p:nvPr>
+        </p:nvSpPr>
+        <p:spPr>
+          <a:xfrm>
+            <a:off x="3884613" y="8685213"/>
+            <a:ext cx="2971800" cy="457200"/>
+          </a:xfrm>
+          <a:prstGeom prst="rect">
+            <a:avLst/>
+          </a:prstGeom>
+        </p:spPr>
+        <p:txBody>
+          <a:bodyPr vert="horz" lIns="91440" tIns="45720" rIns="91440" bIns="45720" rtlCol="0" anchor="b"/>
+          <a:lstStyle>
+            <a:lvl1pPr algn="r">
+              <a:defRPr sz="1200"/>
+            </a:lvl1pPr>
+          </a:lstStyle>
+          <a:p>
+            <a:fld id="{BB5E49A5-4136-284D-997B-48E1D791AD67}" type="slidenum">
+              <a:rPr lang="en-US" smtClean="0"/>
+              <a:t>‹#›</a:t>
+            </a:fld>
+            <a:endParaRPr lang="en-US"/>
+          </a:p>
+        </p:txBody>
+      </p:sp>
+    </p:spTree>
+    <p:extLst>
+      <p:ext uri="{BB962C8B-B14F-4D97-AF65-F5344CB8AC3E}">
+        <p14:creationId xmlns:p14="http://schemas.microsoft.com/office/powerpoint/2010/main" val="2623252185"/>
+      </p:ext>
+    </p:extLst>
+  </p:cSld>
+  <p:clrMap bg1="lt1" tx1="dk1" bg2="lt2" tx2="dk2" accent1="accent1" accent2="accent2" accent3="accent3" accent4="accent4" accent5="accent5" accent6="accent6" hlink="hlink" folHlink="folHlink"/>
+  <p:notesStyle>
+    <a:lvl1pPr marL="0" algn="l" defTabSz="457200" rtl="0" eaLnBrk="1" latinLnBrk="0" hangingPunct="1">
+      <a:defRPr sz="1200" kern="1200">
+        <a:solidFill>
+          <a:schemeClr val="tx1"/>
+        </a:solidFill>
+        <a:latin typeface="+mn-lt"/>
+        <a:ea typeface="+mn-ea"/>
+        <a:cs typeface="+mn-cs"/>
+      </a:defRPr>
+    </a:lvl1pPr>
+    <a:lvl2pPr marL="457200" algn="l" defTabSz="457200" rtl="0" eaLnBrk="1" latinLnBrk="0" hangingPunct="1">
+      <a:defRPr sz="1200" kern="1200">
+        <a:solidFill>
+          <a:schemeClr val="tx1"/>
+        </a:solidFill>
+        <a:latin typeface="+mn-lt"/>
+        <a:ea typeface="+mn-ea"/>
+        <a:cs typeface="+mn-cs"/>
+      </a:defRPr>
+    </a:lvl2pPr>
+    <a:lvl3pPr marL="914400" algn="l" defTabSz="457200" rtl="0" eaLnBrk="1" latinLnBrk="0" hangingPunct="1">
+      <a:defRPr sz="1200" kern="1200">
+        <a:solidFill>
+          <a:schemeClr val="tx1"/>
+        </a:solidFill>
+        <a:latin typeface="+mn-lt"/>
+        <a:ea typeface="+mn-ea"/>
+        <a:cs typeface="+mn-cs"/>
+      </a:defRPr>
+    </a:lvl3pPr>
+    <a:lvl4pPr marL="1371600" algn="l" defTabSz="457200" rtl="0" eaLnBrk="1" latinLnBrk="0" hangingPunct="1">
+      <a:defRPr sz="1200" kern="1200">
+        <a:solidFill>
+          <a:schemeClr val="tx1"/>
+        </a:solidFill>
+        <a:latin typeface="+mn-lt"/>
+        <a:ea typeface="+mn-ea"/>
+        <a:cs typeface="+mn-cs"/>
+      </a:defRPr>
+    </a:lvl4pPr>
+    <a:lvl5pPr marL="1828800" algn="l" defTabSz="457200" rtl="0" eaLnBrk="1" latinLnBrk="0" hangingPunct="1">
+      <a:defRPr sz="1200" kern="1200">
+        <a:solidFill>
+          <a:schemeClr val="tx1"/>
+        </a:solidFill>
+        <a:latin typeface="+mn-lt"/>
+        <a:ea typeface="+mn-ea"/>
+        <a:cs typeface="+mn-cs"/>
+      </a:defRPr>
+    </a:lvl5pPr>
+    <a:lvl6pPr marL="2286000" algn="l" defTabSz="457200" rtl="0" eaLnBrk="1" latinLnBrk="0" hangingPunct="1">
+      <a:defRPr sz="1200" kern="1200">
+        <a:solidFill>
+          <a:schemeClr val="tx1"/>
+        </a:solidFill>
+        <a:latin typeface="+mn-lt"/>
+        <a:ea typeface="+mn-ea"/>
+        <a:cs typeface="+mn-cs"/>
+      </a:defRPr>
+    </a:lvl6pPr>
+    <a:lvl7pPr marL="2743200" algn="l" defTabSz="457200" rtl="0" eaLnBrk="1" latinLnBrk="0" hangingPunct="1">
+      <a:defRPr sz="1200" kern="1200">
+        <a:solidFill>
+          <a:schemeClr val="tx1"/>
+        </a:solidFill>
+        <a:latin typeface="+mn-lt"/>
+        <a:ea typeface="+mn-ea"/>
+        <a:cs typeface="+mn-cs"/>
+      </a:defRPr>
+    </a:lvl7pPr>
+    <a:lvl8pPr marL="3200400" algn="l" defTabSz="457200" rtl="0" eaLnBrk="1" latinLnBrk="0" hangingPunct="1">
+      <a:defRPr sz="1200" kern="1200">
+        <a:solidFill>
+          <a:schemeClr val="tx1"/>
+        </a:solidFill>
+        <a:latin typeface="+mn-lt"/>
+        <a:ea typeface="+mn-ea"/>
+        <a:cs typeface="+mn-cs"/>
+      </a:defRPr>
+    </a:lvl8pPr>
+    <a:lvl9pPr marL="3657600" algn="l" defTabSz="457200" rtl="0" eaLnBrk="1" latinLnBrk="0" hangingPunct="1">
+      <a:defRPr sz="1200" kern="1200">
+        <a:solidFill>
+          <a:schemeClr val="tx1"/>
+        </a:solidFill>
+        <a:latin typeface="+mn-lt"/>
+        <a:ea typeface="+mn-ea"/>
+        <a:cs typeface="+mn-cs"/>
+      </a:defRPr>
+    </a:lvl9pPr>
+  </p:notesStyle>
+</p:notesMaster>
+</file>
+
+<file path=ppt/notesSlides/notesSlide1.xml><?xml version="1.0" encoding="utf-8"?>
+<p:notes xmlns:a="http://schemas.openxmlformats.org/drawingml/2006/main" xmlns:p="http://schemas.openxmlformats.org/presentationml/2006/main" xmlns:r="http://schemas.openxmlformats.org/officeDocument/2006/relationships">
+  <p:cSld>
+    <p:spTree>
+      <p:nvGrpSpPr>
+        <p:cNvPr id="1" name=""/>
+        <p:cNvGrpSpPr/>
+        <p:nvPr/>
+      </p:nvGrpSpPr>
+      <p:grpSpPr>
+        <a:xfrm>
+          <a:off x="0" y="0"/>
+          <a:ext cx="0" cy="0"/>
+          <a:chOff x="0" y="0"/>
+          <a:chExt cx="0" cy="0"/>
+        </a:xfrm>
+      </p:grpSpPr>
+      <p:sp>
+        <p:nvSpPr>
+          <p:cNvPr id="2" name="Slide Image Placeholder 1"/>
+          <p:cNvSpPr>
+            <a:spLocks noGrp="1"/>
+          </p:cNvSpPr>
+          <p:nvPr>
+            <p:ph type="sldImg" idx="2"/>
+          </p:nvPr>
+        </p:nvSpPr>
+        <p:spPr/>
+      </p:sp>
+      <p:sp>
+        <p:nvSpPr>
+          <p:cNvPr id="3" name="Notes Placeholder 2"/>
+          <p:cNvSpPr>
+            <a:spLocks noGrp="1"/>
+          </p:cNvSpPr>
+          <p:nvPr>
+            <p:ph type="body" idx="3" sz="quarter"/>
+          </p:nvPr>
+        </p:nvSpPr>
+        <p:spPr/>
+        <p:txBody>
+          <a:bodyPr/>
+          <a:lstStyle/>
+          <a:p>
+            <a:r>
+              <a:t>Hello everyone. My name is Wannakorn Sangthongngam.</a:t>
+            </a:r>
+          </a:p>
+          <a:p/>
+          <a:p>
+            <a:r>
+              <a:t>Today I am presenting Fortune Teller — an AI-powered system that can recognize tarot cards from photos and generate fortune readings.</a:t>
+            </a:r>
+          </a:p>
+          <a:p/>
+          <a:p>
+            <a:r>
+              <a:t>The project uses EfficientNet-B0, a state-of-the-art image classification model built with PyTorch, trained using transfer learning from ImageNet.</a:t>
+            </a:r>
+          </a:p>
+          <a:p/>
+          <a:p>
+            <a:r>
+              <a:t>Let me walk you through the project from motivation to roadmap.</a:t>
+            </a:r>
+          </a:p>
+        </p:txBody>
+      </p:sp>
+      <p:sp>
+        <p:nvSpPr>
+          <p:cNvPr id="4" name="Slide Number Placeholder 3"/>
+          <p:cNvSpPr>
+            <a:spLocks noGrp="1"/>
+          </p:cNvSpPr>
+          <p:nvPr>
+            <p:ph type="sldNum" idx="5" sz="quarter"/>
+          </p:nvPr>
+        </p:nvSpPr>
+        <p:spPr/>
+      </p:sp>
+    </p:spTree>
+  </p:cSld>
+  <p:clrMapOvr>
+    <a:masterClrMapping/>
+  </p:clrMapOvr>
+</p:notes>
+</file>
+
+<file path=ppt/notesSlides/notesSlide2.xml><?xml version="1.0" encoding="utf-8"?>
+<p:notes xmlns:a="http://schemas.openxmlformats.org/drawingml/2006/main" xmlns:p="http://schemas.openxmlformats.org/presentationml/2006/main" xmlns:r="http://schemas.openxmlformats.org/officeDocument/2006/relationships">
+  <p:cSld>
+    <p:spTree>
+      <p:nvGrpSpPr>
+        <p:cNvPr id="1" name=""/>
+        <p:cNvGrpSpPr/>
+        <p:nvPr/>
+      </p:nvGrpSpPr>
+      <p:grpSpPr>
+        <a:xfrm>
+          <a:off x="0" y="0"/>
+          <a:ext cx="0" cy="0"/>
+          <a:chOff x="0" y="0"/>
+          <a:chExt cx="0" cy="0"/>
+        </a:xfrm>
+      </p:grpSpPr>
+      <p:sp>
+        <p:nvSpPr>
+          <p:cNvPr id="2" name="Slide Image Placeholder 1"/>
+          <p:cNvSpPr>
+            <a:spLocks noGrp="1"/>
+          </p:cNvSpPr>
+          <p:nvPr>
+            <p:ph type="sldImg" idx="2"/>
+          </p:nvPr>
+        </p:nvSpPr>
+        <p:spPr/>
+      </p:sp>
+      <p:sp>
+        <p:nvSpPr>
+          <p:cNvPr id="3" name="Notes Placeholder 2"/>
+          <p:cNvSpPr>
+            <a:spLocks noGrp="1"/>
+          </p:cNvSpPr>
+          <p:nvPr>
+            <p:ph type="body" idx="3" sz="quarter"/>
+          </p:nvPr>
+        </p:nvSpPr>
+        <p:spPr/>
+        <p:txBody>
+          <a:bodyPr/>
+          <a:lstStyle/>
+          <a:p>
+            <a:r>
+              <a:t>Fortune Teller is a system that combines computer vision and tarot card knowledge.</a:t>
+            </a:r>
+          </a:p>
+          <a:p/>
+          <a:p>
+            <a:r>
+              <a:t>The idea is simple — the user takes a photo of a tarot card, the AI model identifies which card it is, and then the system displays the fortune meaning associated with that card.</a:t>
+            </a:r>
+          </a:p>
+          <a:p/>
+          <a:p>
+            <a:r>
+              <a:t>There are 78 cards in a standard tarot deck, each with its own meaning and symbolism.</a:t>
+            </a:r>
+          </a:p>
+          <a:p/>
+          <a:p>
+            <a:r>
+              <a:t>On the technology side, we use PyTorch as the deep learning framework, EfficientNet-B0 as the model backbone, and Google Colab for training on a free GPU.</a:t>
+            </a:r>
+          </a:p>
+          <a:p/>
+          <a:p>
+            <a:r>
+              <a:t>The bottom of this slide shows the full pipeline: Photo → AI Model → Card Identification → Fortune Reading.</a:t>
+            </a:r>
+          </a:p>
+        </p:txBody>
+      </p:sp>
+      <p:sp>
+        <p:nvSpPr>
+          <p:cNvPr id="4" name="Slide Number Placeholder 3"/>
+          <p:cNvSpPr>
+            <a:spLocks noGrp="1"/>
+          </p:cNvSpPr>
+          <p:nvPr>
+            <p:ph type="sldNum" idx="5" sz="quarter"/>
+          </p:nvPr>
+        </p:nvSpPr>
+        <p:spPr/>
+      </p:sp>
+    </p:spTree>
+  </p:cSld>
+  <p:clrMapOvr>
+    <a:masterClrMapping/>
+  </p:clrMapOvr>
+</p:notes>
+</file>
+
+<file path=ppt/notesSlides/notesSlide3.xml><?xml version="1.0" encoding="utf-8"?>
+<p:notes xmlns:a="http://schemas.openxmlformats.org/drawingml/2006/main" xmlns:p="http://schemas.openxmlformats.org/presentationml/2006/main" xmlns:r="http://schemas.openxmlformats.org/officeDocument/2006/relationships">
+  <p:cSld>
+    <p:spTree>
+      <p:nvGrpSpPr>
+        <p:cNvPr id="1" name=""/>
+        <p:cNvGrpSpPr/>
+        <p:nvPr/>
+      </p:nvGrpSpPr>
+      <p:grpSpPr>
+        <a:xfrm>
+          <a:off x="0" y="0"/>
+          <a:ext cx="0" cy="0"/>
+          <a:chOff x="0" y="0"/>
+          <a:chExt cx="0" cy="0"/>
+        </a:xfrm>
+      </p:grpSpPr>
+      <p:sp>
+        <p:nvSpPr>
+          <p:cNvPr id="2" name="Slide Image Placeholder 1"/>
+          <p:cNvSpPr>
+            <a:spLocks noGrp="1"/>
+          </p:cNvSpPr>
+          <p:nvPr>
+            <p:ph type="sldImg" idx="2"/>
+          </p:nvPr>
+        </p:nvSpPr>
+        <p:spPr/>
+      </p:sp>
+      <p:sp>
+        <p:nvSpPr>
+          <p:cNvPr id="3" name="Notes Placeholder 2"/>
+          <p:cNvSpPr>
+            <a:spLocks noGrp="1"/>
+          </p:cNvSpPr>
+          <p:nvPr>
+            <p:ph type="body" idx="3" sz="quarter"/>
+          </p:nvPr>
+        </p:nvSpPr>
+        <p:spPr/>
+        <p:txBody>
+          <a:bodyPr/>
+          <a:lstStyle/>
+          <a:p>
+            <a:r>
+              <a:t>The main challenge of this project is that tarot cards are visually complex — each of the 78 cards has unique symbols, figures, and color patterns that the model must learn to distinguish.</a:t>
+            </a:r>
+          </a:p>
+          <a:p/>
+          <a:p>
+            <a:r>
+              <a:t>The biggest constraint is our small dataset. We only have around 30 photos per card, which is far too little to train a neural network from scratch.</a:t>
+            </a:r>
+          </a:p>
+          <a:p/>
+          <a:p>
+            <a:r>
+              <a:t>Our solution is transfer learning. Instead of starting from random weights, we use EfficientNet-B0 which was already trained on 1.2 million images from ImageNet. The model already knows how to detect edges, shapes, textures, and patterns.</a:t>
+            </a:r>
+          </a:p>
+          <a:p/>
+          <a:p>
+            <a:r>
+              <a:t>We then apply data augmentation — randomly flipping, rotating, and adjusting colors — to artificially create more variety from our small set of photos.</a:t>
+            </a:r>
+          </a:p>
+          <a:p/>
+          <a:p>
+            <a:r>
+              <a:t>Finally, we use a 2-phase training strategy: first train only the classification head while the backbone is frozen, then unfreeze everything for fine-tuning.</a:t>
+            </a:r>
+          </a:p>
+        </p:txBody>
+      </p:sp>
+      <p:sp>
+        <p:nvSpPr>
+          <p:cNvPr id="4" name="Slide Number Placeholder 3"/>
+          <p:cNvSpPr>
+            <a:spLocks noGrp="1"/>
+          </p:cNvSpPr>
+          <p:nvPr>
+            <p:ph type="sldNum" idx="5" sz="quarter"/>
+          </p:nvPr>
+        </p:nvSpPr>
+        <p:spPr/>
+      </p:sp>
+    </p:spTree>
+  </p:cSld>
+  <p:clrMapOvr>
+    <a:masterClrMapping/>
+  </p:clrMapOvr>
+</p:notes>
+</file>
+
+<file path=ppt/notesSlides/notesSlide4.xml><?xml version="1.0" encoding="utf-8"?>
+<p:notes xmlns:a="http://schemas.openxmlformats.org/drawingml/2006/main" xmlns:p="http://schemas.openxmlformats.org/presentationml/2006/main" xmlns:r="http://schemas.openxmlformats.org/officeDocument/2006/relationships">
+  <p:cSld>
+    <p:spTree>
+      <p:nvGrpSpPr>
+        <p:cNvPr id="1" name=""/>
+        <p:cNvGrpSpPr/>
+        <p:nvPr/>
+      </p:nvGrpSpPr>
+      <p:grpSpPr>
+        <a:xfrm>
+          <a:off x="0" y="0"/>
+          <a:ext cx="0" cy="0"/>
+          <a:chOff x="0" y="0"/>
+          <a:chExt cx="0" cy="0"/>
+        </a:xfrm>
+      </p:grpSpPr>
+      <p:sp>
+        <p:nvSpPr>
+          <p:cNvPr id="2" name="Slide Image Placeholder 1"/>
+          <p:cNvSpPr>
+            <a:spLocks noGrp="1"/>
+          </p:cNvSpPr>
+          <p:nvPr>
+            <p:ph type="sldImg" idx="2"/>
+          </p:nvPr>
+        </p:nvSpPr>
+        <p:spPr/>
+      </p:sp>
+      <p:sp>
+        <p:nvSpPr>
+          <p:cNvPr id="3" name="Notes Placeholder 2"/>
+          <p:cNvSpPr>
+            <a:spLocks noGrp="1"/>
+          </p:cNvSpPr>
+          <p:nvPr>
+            <p:ph type="body" idx="3" sz="quarter"/>
+          </p:nvPr>
+        </p:nvSpPr>
+        <p:spPr/>
+        <p:txBody>
+          <a:bodyPr/>
+          <a:lstStyle/>
+          <a:p>
+            <a:r>
+              <a:t>This slide shows the full architecture of our model.</a:t>
+            </a:r>
+          </a:p>
+          <a:p/>
+          <a:p>
+            <a:r>
+              <a:t>Starting from the left — the input is an image resized to 224 by 224 pixels with 3 color channels.</a:t>
+            </a:r>
+          </a:p>
+          <a:p/>
+          <a:p>
+            <a:r>
+              <a:t>It then passes through the EfficientNet-B0 backbone, which was pretrained on ImageNet. This backbone acts as a powerful feature extractor — it outputs a 1280-dimensional feature vector summarizing what it sees in the image.</a:t>
+            </a:r>
+          </a:p>
+          <a:p/>
+          <a:p>
+            <a:r>
+              <a:t>We then add our custom classification head on top: a Dropout layer to prevent overfitting, a Linear layer reducing 1280 to 512 dimensions, a ReLU activation, another Dropout, and finally a Linear layer outputting 78 scores — one for each tarot card.</a:t>
+            </a:r>
+          </a:p>
+          <a:p/>
+          <a:p>
+            <a:r>
+              <a:t>The card with the highest score is the prediction.</a:t>
+            </a:r>
+          </a:p>
+          <a:p/>
+          <a:p>
+            <a:r>
+              <a:t>Why EfficientNet-B0? It scales depth, width, and resolution together, giving the best accuracy per number of parameters. It has only 5.3 million parameters, making it fast enough to run on a laptop CPU.</a:t>
+            </a:r>
+          </a:p>
+        </p:txBody>
+      </p:sp>
+      <p:sp>
+        <p:nvSpPr>
+          <p:cNvPr id="4" name="Slide Number Placeholder 3"/>
+          <p:cNvSpPr>
+            <a:spLocks noGrp="1"/>
+          </p:cNvSpPr>
+          <p:nvPr>
+            <p:ph type="sldNum" idx="5" sz="quarter"/>
+          </p:nvPr>
+        </p:nvSpPr>
+        <p:spPr/>
+      </p:sp>
+    </p:spTree>
+  </p:cSld>
+  <p:clrMapOvr>
+    <a:masterClrMapping/>
+  </p:clrMapOvr>
+</p:notes>
+</file>
+
+<file path=ppt/notesSlides/notesSlide5.xml><?xml version="1.0" encoding="utf-8"?>
+<p:notes xmlns:a="http://schemas.openxmlformats.org/drawingml/2006/main" xmlns:p="http://schemas.openxmlformats.org/presentationml/2006/main" xmlns:r="http://schemas.openxmlformats.org/officeDocument/2006/relationships">
+  <p:cSld>
+    <p:spTree>
+      <p:nvGrpSpPr>
+        <p:cNvPr id="1" name=""/>
+        <p:cNvGrpSpPr/>
+        <p:nvPr/>
+      </p:nvGrpSpPr>
+      <p:grpSpPr>
+        <a:xfrm>
+          <a:off x="0" y="0"/>
+          <a:ext cx="0" cy="0"/>
+          <a:chOff x="0" y="0"/>
+          <a:chExt cx="0" cy="0"/>
+        </a:xfrm>
+      </p:grpSpPr>
+      <p:sp>
+        <p:nvSpPr>
+          <p:cNvPr id="2" name="Slide Image Placeholder 1"/>
+          <p:cNvSpPr>
+            <a:spLocks noGrp="1"/>
+          </p:cNvSpPr>
+          <p:nvPr>
+            <p:ph type="sldImg" idx="2"/>
+          </p:nvPr>
+        </p:nvSpPr>
+        <p:spPr/>
+      </p:sp>
+      <p:sp>
+        <p:nvSpPr>
+          <p:cNvPr id="3" name="Notes Placeholder 2"/>
+          <p:cNvSpPr>
+            <a:spLocks noGrp="1"/>
+          </p:cNvSpPr>
+          <p:nvPr>
+            <p:ph type="body" idx="3" sz="quarter"/>
+          </p:nvPr>
+        </p:nvSpPr>
+        <p:spPr/>
+        <p:txBody>
+          <a:bodyPr/>
+          <a:lstStyle/>
+          <a:p>
+            <a:r>
+              <a:t>Our training pipeline has three stages.</a:t>
+            </a:r>
+          </a:p>
+          <a:p/>
+          <a:p>
+            <a:r>
+              <a:t>First, data preparation. We collect around 30 photos per card for all 78 cards. The photos are taken on an iPhone in HEIC format and organized into folders — one folder per card. The dataset is then split into 75% training, 15% validation, and 10% test.</a:t>
+            </a:r>
+          </a:p>
+          <a:p/>
+          <a:p>
+            <a:r>
+              <a:t>Second, Phase 1 training. We freeze the EfficientNet backbone so its pretrained ImageNet weights are not changed. Only our custom classification head is trained. We use the Adam optimizer with a learning rate of 1e-3 for 10 epochs. This phase converges quickly because the backbone already extracts good features.</a:t>
+            </a:r>
+          </a:p>
+          <a:p/>
+          <a:p>
+            <a:r>
+              <a:t>Third, Phase 2 fine-tuning. We unfreeze all layers and train the entire network at a lower learning rate of 1e-4 for 20 more epochs. This allows the backbone to slightly adjust to tarot card features. The best model based on validation accuracy is saved automatically.</a:t>
+            </a:r>
+          </a:p>
+          <a:p/>
+          <a:p>
+            <a:r>
+              <a:t>The augmentation pipeline shown at the bottom helps the model generalize by seeing different versions of each photo during training.</a:t>
+            </a:r>
+          </a:p>
+        </p:txBody>
+      </p:sp>
+      <p:sp>
+        <p:nvSpPr>
+          <p:cNvPr id="4" name="Slide Number Placeholder 3"/>
+          <p:cNvSpPr>
+            <a:spLocks noGrp="1"/>
+          </p:cNvSpPr>
+          <p:nvPr>
+            <p:ph type="sldNum" idx="5" sz="quarter"/>
+          </p:nvPr>
+        </p:nvSpPr>
+        <p:spPr/>
+      </p:sp>
+    </p:spTree>
+  </p:cSld>
+  <p:clrMapOvr>
+    <a:masterClrMapping/>
+  </p:clrMapOvr>
+</p:notes>
+</file>
+
+<file path=ppt/notesSlides/notesSlide6.xml><?xml version="1.0" encoding="utf-8"?>
+<p:notes xmlns:a="http://schemas.openxmlformats.org/drawingml/2006/main" xmlns:p="http://schemas.openxmlformats.org/presentationml/2006/main" xmlns:r="http://schemas.openxmlformats.org/officeDocument/2006/relationships">
+  <p:cSld>
+    <p:spTree>
+      <p:nvGrpSpPr>
+        <p:cNvPr id="1" name=""/>
+        <p:cNvGrpSpPr/>
+        <p:nvPr/>
+      </p:nvGrpSpPr>
+      <p:grpSpPr>
+        <a:xfrm>
+          <a:off x="0" y="0"/>
+          <a:ext cx="0" cy="0"/>
+          <a:chOff x="0" y="0"/>
+          <a:chExt cx="0" cy="0"/>
+        </a:xfrm>
+      </p:grpSpPr>
+      <p:sp>
+        <p:nvSpPr>
+          <p:cNvPr id="2" name="Slide Image Placeholder 1"/>
+          <p:cNvSpPr>
+            <a:spLocks noGrp="1"/>
+          </p:cNvSpPr>
+          <p:nvPr>
+            <p:ph type="sldImg" idx="2"/>
+          </p:nvPr>
+        </p:nvSpPr>
+        <p:spPr/>
+      </p:sp>
+      <p:sp>
+        <p:nvSpPr>
+          <p:cNvPr id="3" name="Notes Placeholder 2"/>
+          <p:cNvSpPr>
+            <a:spLocks noGrp="1"/>
+          </p:cNvSpPr>
+          <p:nvPr>
+            <p:ph type="body" idx="3" sz="quarter"/>
+          </p:nvPr>
+        </p:nvSpPr>
+        <p:spPr/>
+        <p:txBody>
+          <a:bodyPr/>
+          <a:lstStyle/>
+          <a:p>
+            <a:r>
+              <a:t>This roadmap outlines the five phases of the project.</a:t>
+            </a:r>
+          </a:p>
+          <a:p/>
+          <a:p>
+            <a:r>
+              <a:t>Phase 1 is currently in progress — we are photographing all 78 tarot cards, around 30 shots each, using an iPhone.</a:t>
+            </a:r>
+          </a:p>
+          <a:p/>
+          <a:p>
+            <a:r>
+              <a:t>Phase 2 will be model training on Google Colab using a free T4 GPU. We expect this to take around 30 to 60 minutes once the photos are ready.</a:t>
+            </a:r>
+          </a:p>
+          <a:p/>
+          <a:p>
+            <a:r>
+              <a:t>Phase 3 is the prediction module — given a new photo, the model returns the top 3 most likely cards with confidence scores.</a:t>
+            </a:r>
+          </a:p>
+          <a:p/>
+          <a:p>
+            <a:r>
+              <a:t>Phase 4 adds the fortune telling logic — mapping the predicted card to its traditional meaning and generating a reading for the user.</a:t>
+            </a:r>
+          </a:p>
+          <a:p/>
+          <a:p>
+            <a:r>
+              <a:t>Phase 5 is the final application — a user interface where someone can take a photo and receive their fortune in real time.</a:t>
+            </a:r>
+          </a:p>
+          <a:p/>
+          <a:p>
+            <a:r>
+              <a:t>Each phase builds directly on the previous one. The foundation we are building now — a clean dataset and a well-trained model — is what makes everything else possible.</a:t>
+            </a:r>
+          </a:p>
+          <a:p/>
+          <a:p>
+            <a:r>
+              <a:t>Thank you for listening. I am happy to answer any questions.</a:t>
+            </a:r>
+          </a:p>
+        </p:txBody>
+      </p:sp>
+      <p:sp>
+        <p:nvSpPr>
+          <p:cNvPr id="4" name="Slide Number Placeholder 3"/>
+          <p:cNvSpPr>
+            <a:spLocks noGrp="1"/>
+          </p:cNvSpPr>
+          <p:nvPr>
+            <p:ph type="sldNum" idx="5" sz="quarter"/>
+          </p:nvPr>
+        </p:nvSpPr>
+        <p:spPr/>
+      </p:sp>
+    </p:spTree>
+  </p:cSld>
+  <p:clrMapOvr>
+    <a:masterClrMapping/>
+  </p:clrMapOvr>
+</p:notes>
 </file>
 
 <file path=ppt/slideLayouts/slideLayout1.xml><?xml version="1.0" encoding="utf-8"?>
@@ -10959,4 +11891,324 @@
   </a:objectDefaults>
   <a:extraClrSchemeLst/>
 </a:theme>
+</file>
+
+<file path=ppt/theme/theme2.xml><?xml version="1.0" encoding="utf-8"?>
+<a:theme xmlns:a="http://schemas.openxmlformats.org/drawingml/2006/main" name="Office Theme">
+  <a:themeElements>
+    <a:clrScheme name="Office">
+      <a:dk1>
+        <a:sysClr val="windowText" lastClr="000000"/>
+      </a:dk1>
+      <a:lt1>
+        <a:sysClr val="window" lastClr="FFFFFF"/>
+      </a:lt1>
+      <a:dk2>
+        <a:srgbClr val="1F497D"/>
+      </a:dk2>
+      <a:lt2>
+        <a:srgbClr val="EEECE1"/>
+      </a:lt2>
+      <a:accent1>
+        <a:srgbClr val="4F81BD"/>
+      </a:accent1>
+      <a:accent2>
+        <a:srgbClr val="C0504D"/>
+      </a:accent2>
+      <a:accent3>
+        <a:srgbClr val="9BBB59"/>
+      </a:accent3>
+      <a:accent4>
+        <a:srgbClr val="8064A2"/>
+      </a:accent4>
+      <a:accent5>
+        <a:srgbClr val="4BACC6"/>
+      </a:accent5>
+      <a:accent6>
+        <a:srgbClr val="F79646"/>
+      </a:accent6>
+      <a:hlink>
+        <a:srgbClr val="0000FF"/>
+      </a:hlink>
+      <a:folHlink>
+        <a:srgbClr val="800080"/>
+      </a:folHlink>
+    </a:clrScheme>
+    <a:fontScheme name="Office">
+      <a:majorFont>
+        <a:latin typeface="Calibri"/>
+        <a:ea typeface=""/>
+        <a:cs typeface=""/>
+        <a:font script="Jpan" typeface="ＭＳ Ｐゴシック"/>
+        <a:font script="Hang" typeface="맑은 고딕"/>
+        <a:font script="Hans" typeface="宋体"/>
+        <a:font script="Hant" typeface="新細明體"/>
+        <a:font script="Arab" typeface="Times New Roman"/>
+        <a:font script="Hebr" typeface="Times New Roman"/>
+        <a:font script="Thai" typeface="Angsana New"/>
+        <a:font script="Ethi" typeface="Nyala"/>
+        <a:font script="Beng" typeface="Vrinda"/>
+        <a:font script="Gujr" typeface="Shruti"/>
+        <a:font script="Khmr" typeface="MoolBoran"/>
+        <a:font script="Knda" typeface="Tunga"/>
+        <a:font script="Guru" typeface="Raavi"/>
+        <a:font script="Cans" typeface="Euphemia"/>
+        <a:font script="Cher" typeface="Plantagenet Cherokee"/>
+        <a:font script="Yiii" typeface="Microsoft Yi Baiti"/>
+        <a:font script="Tibt" typeface="Microsoft Himalaya"/>
+        <a:font script="Thaa" typeface="MV Boli"/>
+        <a:font script="Deva" typeface="Mangal"/>
+        <a:font script="Telu" typeface="Gautami"/>
+        <a:font script="Taml" typeface="Latha"/>
+        <a:font script="Syrc" typeface="Estrangelo Edessa"/>
+        <a:font script="Orya" typeface="Kalinga"/>
+        <a:font script="Mlym" typeface="Kartika"/>
+        <a:font script="Laoo" typeface="DokChampa"/>
+        <a:font script="Sinh" typeface="Iskoola Pota"/>
+        <a:font script="Mong" typeface="Mongolian Baiti"/>
+        <a:font script="Viet" typeface="Times New Roman"/>
+        <a:font script="Uigh" typeface="Microsoft Uighur"/>
+        <a:font script="Geor" typeface="Sylfaen"/>
+      </a:majorFont>
+      <a:minorFont>
+        <a:latin typeface="Calibri"/>
+        <a:ea typeface=""/>
+        <a:cs typeface=""/>
+        <a:font script="Jpan" typeface="ＭＳ Ｐゴシック"/>
+        <a:font script="Hang" typeface="맑은 고딕"/>
+        <a:font script="Hans" typeface="宋体"/>
+        <a:font script="Hant" typeface="新細明體"/>
+        <a:font script="Arab" typeface="Arial"/>
+        <a:font script="Hebr" typeface="Arial"/>
+        <a:font script="Thai" typeface="Cordia New"/>
+        <a:font script="Ethi" typeface="Nyala"/>
+        <a:font script="Beng" typeface="Vrinda"/>
+        <a:font script="Gujr" typeface="Shruti"/>
+        <a:font script="Khmr" typeface="DaunPenh"/>
+        <a:font script="Knda" typeface="Tunga"/>
+        <a:font script="Guru" typeface="Raavi"/>
+        <a:font script="Cans" typeface="Euphemia"/>
+        <a:font script="Cher" typeface="Plantagenet Cherokee"/>
+        <a:font script="Yiii" typeface="Microsoft Yi Baiti"/>
+        <a:font script="Tibt" typeface="Microsoft Himalaya"/>
+        <a:font script="Thaa" typeface="MV Boli"/>
+        <a:font script="Deva" typeface="Mangal"/>
+        <a:font script="Telu" typeface="Gautami"/>
+        <a:font script="Taml" typeface="Latha"/>
+        <a:font script="Syrc" typeface="Estrangelo Edessa"/>
+        <a:font script="Orya" typeface="Kalinga"/>
+        <a:font script="Mlym" typeface="Kartika"/>
+        <a:font script="Laoo" typeface="DokChampa"/>
+        <a:font script="Sinh" typeface="Iskoola Pota"/>
+        <a:font script="Mong" typeface="Mongolian Baiti"/>
+        <a:font script="Viet" typeface="Arial"/>
+        <a:font script="Uigh" typeface="Microsoft Uighur"/>
+        <a:font script="Geor" typeface="Sylfaen"/>
+      </a:minorFont>
+    </a:fontScheme>
+    <a:fmtScheme name="Office">
+      <a:fillStyleLst>
+        <a:solidFill>
+          <a:schemeClr val="phClr"/>
+        </a:solidFill>
+        <a:gradFill rotWithShape="1">
+          <a:gsLst>
+            <a:gs pos="0">
+              <a:schemeClr val="phClr">
+                <a:tint val="50000"/>
+                <a:satMod val="300000"/>
+              </a:schemeClr>
+            </a:gs>
+            <a:gs pos="35000">
+              <a:schemeClr val="phClr">
+                <a:tint val="37000"/>
+                <a:satMod val="300000"/>
+              </a:schemeClr>
+            </a:gs>
+            <a:gs pos="100000">
+              <a:schemeClr val="phClr">
+                <a:tint val="15000"/>
+                <a:satMod val="350000"/>
+              </a:schemeClr>
+            </a:gs>
+          </a:gsLst>
+          <a:lin ang="16200000" scaled="1"/>
+        </a:gradFill>
+        <a:gradFill rotWithShape="1">
+          <a:gsLst>
+            <a:gs pos="0">
+              <a:schemeClr val="phClr">
+                <a:tint val="100000"/>
+                <a:shade val="100000"/>
+                <a:satMod val="130000"/>
+              </a:schemeClr>
+            </a:gs>
+            <a:gs pos="100000">
+              <a:schemeClr val="phClr">
+                <a:tint val="50000"/>
+                <a:shade val="100000"/>
+                <a:satMod val="350000"/>
+              </a:schemeClr>
+            </a:gs>
+          </a:gsLst>
+          <a:lin ang="16200000" scaled="0"/>
+        </a:gradFill>
+      </a:fillStyleLst>
+      <a:lnStyleLst>
+        <a:ln w="9525" cap="flat" cmpd="sng" algn="ctr">
+          <a:solidFill>
+            <a:schemeClr val="phClr">
+              <a:shade val="95000"/>
+              <a:satMod val="105000"/>
+            </a:schemeClr>
+          </a:solidFill>
+          <a:prstDash val="solid"/>
+        </a:ln>
+        <a:ln w="25400" cap="flat" cmpd="sng" algn="ctr">
+          <a:solidFill>
+            <a:schemeClr val="phClr"/>
+          </a:solidFill>
+          <a:prstDash val="solid"/>
+        </a:ln>
+        <a:ln w="38100" cap="flat" cmpd="sng" algn="ctr">
+          <a:solidFill>
+            <a:schemeClr val="phClr"/>
+          </a:solidFill>
+          <a:prstDash val="solid"/>
+        </a:ln>
+      </a:lnStyleLst>
+      <a:effectStyleLst>
+        <a:effectStyle>
+          <a:effectLst>
+            <a:outerShdw blurRad="40000" dist="20000" dir="5400000" rotWithShape="0">
+              <a:srgbClr val="000000">
+                <a:alpha val="38000"/>
+              </a:srgbClr>
+            </a:outerShdw>
+          </a:effectLst>
+        </a:effectStyle>
+        <a:effectStyle>
+          <a:effectLst>
+            <a:outerShdw blurRad="40000" dist="23000" dir="5400000" rotWithShape="0">
+              <a:srgbClr val="000000">
+                <a:alpha val="35000"/>
+              </a:srgbClr>
+            </a:outerShdw>
+          </a:effectLst>
+        </a:effectStyle>
+        <a:effectStyle>
+          <a:effectLst>
+            <a:outerShdw blurRad="40000" dist="23000" dir="5400000" rotWithShape="0">
+              <a:srgbClr val="000000">
+                <a:alpha val="35000"/>
+              </a:srgbClr>
+            </a:outerShdw>
+          </a:effectLst>
+          <a:scene3d>
+            <a:camera prst="orthographicFront">
+              <a:rot lat="0" lon="0" rev="0"/>
+            </a:camera>
+            <a:lightRig rig="threePt" dir="t">
+              <a:rot lat="0" lon="0" rev="1200000"/>
+            </a:lightRig>
+          </a:scene3d>
+          <a:sp3d>
+            <a:bevelT w="63500" h="25400"/>
+          </a:sp3d>
+        </a:effectStyle>
+      </a:effectStyleLst>
+      <a:bgFillStyleLst>
+        <a:solidFill>
+          <a:schemeClr val="phClr"/>
+        </a:solidFill>
+        <a:gradFill rotWithShape="1">
+          <a:gsLst>
+            <a:gs pos="0">
+              <a:schemeClr val="phClr">
+                <a:tint val="40000"/>
+                <a:satMod val="350000"/>
+              </a:schemeClr>
+            </a:gs>
+            <a:gs pos="40000">
+              <a:schemeClr val="phClr">
+                <a:tint val="45000"/>
+                <a:shade val="99000"/>
+                <a:satMod val="350000"/>
+              </a:schemeClr>
+            </a:gs>
+            <a:gs pos="100000">
+              <a:schemeClr val="phClr">
+                <a:shade val="20000"/>
+                <a:satMod val="255000"/>
+              </a:schemeClr>
+            </a:gs>
+          </a:gsLst>
+          <a:path path="circle">
+            <a:fillToRect l="50000" t="-80000" r="50000" b="180000"/>
+          </a:path>
+        </a:gradFill>
+        <a:gradFill rotWithShape="1">
+          <a:gsLst>
+            <a:gs pos="0">
+              <a:schemeClr val="phClr">
+                <a:tint val="80000"/>
+                <a:satMod val="300000"/>
+              </a:schemeClr>
+            </a:gs>
+            <a:gs pos="100000">
+              <a:schemeClr val="phClr">
+                <a:shade val="30000"/>
+                <a:satMod val="200000"/>
+              </a:schemeClr>
+            </a:gs>
+          </a:gsLst>
+          <a:path path="circle">
+            <a:fillToRect l="50000" t="50000" r="50000" b="50000"/>
+          </a:path>
+        </a:gradFill>
+      </a:bgFillStyleLst>
+    </a:fmtScheme>
+  </a:themeElements>
+  <a:objectDefaults>
+    <a:spDef>
+      <a:spPr/>
+      <a:bodyPr/>
+      <a:lstStyle/>
+      <a:style>
+        <a:lnRef idx="1">
+          <a:schemeClr val="accent1"/>
+        </a:lnRef>
+        <a:fillRef idx="3">
+          <a:schemeClr val="accent1"/>
+        </a:fillRef>
+        <a:effectRef idx="2">
+          <a:schemeClr val="accent1"/>
+        </a:effectRef>
+        <a:fontRef idx="minor">
+          <a:schemeClr val="lt1"/>
+        </a:fontRef>
+      </a:style>
+    </a:spDef>
+    <a:lnDef>
+      <a:spPr/>
+      <a:bodyPr/>
+      <a:lstStyle/>
+      <a:style>
+        <a:lnRef idx="2">
+          <a:schemeClr val="accent1"/>
+        </a:lnRef>
+        <a:fillRef idx="0">
+          <a:schemeClr val="accent1"/>
+        </a:fillRef>
+        <a:effectRef idx="1">
+          <a:schemeClr val="accent1"/>
+        </a:effectRef>
+        <a:fontRef idx="minor">
+          <a:schemeClr val="tx1"/>
+        </a:fontRef>
+      </a:style>
+    </a:lnDef>
+  </a:objectDefaults>
+  <a:extraClrSchemeLst/>
+</a:theme>
 </file>